--- a/Presentacion_Caso_A.pptx
+++ b/Presentacion_Caso_A.pptx
@@ -37,21 +37,19 @@
     <p:sldId id="289" r:id="rId31"/>
     <p:sldId id="290" r:id="rId32"/>
     <p:sldId id="292" r:id="rId33"/>
-    <p:sldId id="294" r:id="rId34"/>
-    <p:sldId id="295" r:id="rId35"/>
-    <p:sldId id="296" r:id="rId36"/>
-    <p:sldId id="297" r:id="rId37"/>
-    <p:sldId id="298" r:id="rId38"/>
-    <p:sldId id="299" r:id="rId39"/>
-    <p:sldId id="300" r:id="rId40"/>
-    <p:sldId id="301" r:id="rId41"/>
-    <p:sldId id="302" r:id="rId42"/>
-    <p:sldId id="303" r:id="rId43"/>
-    <p:sldId id="304" r:id="rId44"/>
-    <p:sldId id="305" r:id="rId45"/>
-    <p:sldId id="306" r:id="rId46"/>
-    <p:sldId id="307" r:id="rId47"/>
-    <p:sldId id="308" r:id="rId48"/>
+    <p:sldId id="295" r:id="rId34"/>
+    <p:sldId id="296" r:id="rId35"/>
+    <p:sldId id="297" r:id="rId36"/>
+    <p:sldId id="298" r:id="rId37"/>
+    <p:sldId id="299" r:id="rId38"/>
+    <p:sldId id="300" r:id="rId39"/>
+    <p:sldId id="301" r:id="rId40"/>
+    <p:sldId id="303" r:id="rId41"/>
+    <p:sldId id="304" r:id="rId42"/>
+    <p:sldId id="305" r:id="rId43"/>
+    <p:sldId id="306" r:id="rId44"/>
+    <p:sldId id="307" r:id="rId45"/>
+    <p:sldId id="308" r:id="rId46"/>
   </p:sldIdLst>
   <p:sldSz cx="12192000" cy="6858000"/>
   <p:notesSz cx="6858000" cy="9144000"/>
@@ -27991,24 +27989,6 @@
               </a:rPr>
               <a:t>revisión</a:t>
             </a:r>
-            <a:r>
-              <a:rPr sz="2700" b="1" dirty="0">
-                <a:solidFill>
-                  <a:srgbClr val="17150F"/>
-                </a:solidFill>
-                <a:latin typeface="Arial"/>
-              </a:rPr>
-              <a:t> antes del </a:t>
-            </a:r>
-            <a:r>
-              <a:rPr sz="2700" b="1" dirty="0" err="1">
-                <a:solidFill>
-                  <a:srgbClr val="17150F"/>
-                </a:solidFill>
-                <a:latin typeface="Arial"/>
-              </a:rPr>
-              <a:t>piloto</a:t>
-            </a:r>
             <a:endParaRPr sz="2700" b="1" dirty="0">
               <a:solidFill>
                 <a:srgbClr val="17150F"/>
@@ -28844,7 +28824,7 @@
             <a:avLst/>
           </a:prstGeom>
           <a:solidFill>
-            <a:srgbClr val="F4F2ED"/>
+            <a:srgbClr val="FFFFFF"/>
           </a:solidFill>
           <a:ln>
             <a:noFill/>
@@ -28876,14 +28856,59 @@
       </p:sp>
       <p:sp>
         <p:nvSpPr>
-          <p:cNvPr id="3" name="Rectangle 2"/>
+          <p:cNvPr id="3" name="TextBox 2"/>
+          <p:cNvSpPr txBox="1"/>
+          <p:nvPr/>
+        </p:nvSpPr>
+        <p:spPr>
+          <a:xfrm>
+            <a:off x="777240" y="475488"/>
+            <a:ext cx="10637215" cy="237744"/>
+          </a:xfrm>
+          <a:prstGeom prst="rect">
+            <a:avLst/>
+          </a:prstGeom>
+          <a:noFill/>
+        </p:spPr>
+        <p:txBody>
+          <a:bodyPr wrap="square" lIns="0" tIns="0" rIns="0" bIns="0">
+            <a:spAutoFit/>
+          </a:bodyPr>
+          <a:lstStyle/>
+          <a:p>
+            <a:pPr algn="l">
+              <a:lnSpc>
+                <a:spcPct val="122000"/>
+              </a:lnSpc>
+              <a:spcBef>
+                <a:spcPts val="0"/>
+              </a:spcBef>
+              <a:spcAft>
+                <a:spcPts val="0"/>
+              </a:spcAft>
+            </a:pPr>
+            <a:r>
+              <a:rPr sz="1050" b="1">
+                <a:solidFill>
+                  <a:srgbClr val="8C2F39"/>
+                </a:solidFill>
+                <a:latin typeface="Arial"/>
+              </a:rPr>
+              <a:t>PASO 14 · EL OPTIMIZADOR</a:t>
+            </a:r>
+          </a:p>
+        </p:txBody>
+      </p:sp>
+      <p:sp>
+        <p:nvSpPr>
+          <p:cNvPr id="4" name="Rectangle 3"/>
           <p:cNvSpPr/>
           <p:nvPr/>
         </p:nvSpPr>
         <p:spPr>
           <a:xfrm>
-            <a:off x="0" y="0"/>
-            <a:ext cx="114300" cy="6858000"/>
+            <a:off x="777240" y="768096"/>
+            <a:ext cx="502920" cy="30480"/>
           </a:xfrm>
           <a:prstGeom prst="rect">
             <a:avLst/>
@@ -28921,14 +28946,14 @@
       </p:sp>
       <p:sp>
         <p:nvSpPr>
-          <p:cNvPr id="4" name="TextBox 3"/>
+          <p:cNvPr id="5" name="TextBox 4"/>
           <p:cNvSpPr txBox="1"/>
           <p:nvPr/>
         </p:nvSpPr>
         <p:spPr>
           <a:xfrm>
-            <a:off x="777240" y="2651760"/>
-            <a:ext cx="9144000" cy="914400"/>
+            <a:off x="777240" y="914400"/>
+            <a:ext cx="10637215" cy="445770"/>
           </a:xfrm>
           <a:prstGeom prst="rect">
             <a:avLst/>
@@ -28943,52 +28968,350 @@
           <a:p>
             <a:pPr algn="l">
               <a:lnSpc>
-                <a:spcPct val="105000"/>
+                <a:spcPct val="106000"/>
               </a:lnSpc>
               <a:spcBef>
                 <a:spcPts val="0"/>
               </a:spcBef>
               <a:spcAft>
-                <a:spcPts val="1000"/>
+                <a:spcPts val="0"/>
               </a:spcAft>
             </a:pPr>
             <a:r>
-              <a:rPr sz="3400" b="1">
+              <a:rPr sz="2700" b="1">
                 <a:solidFill>
                   <a:srgbClr val="17150F"/>
                 </a:solidFill>
                 <a:latin typeface="Arial"/>
               </a:rPr>
-              <a:t>La decisión y el dinero</a:t>
-            </a:r>
-          </a:p>
+              <a:t>Toda la decisión cabe en tres líneas</a:t>
+            </a:r>
+          </a:p>
+        </p:txBody>
+      </p:sp>
+      <p:sp>
+        <p:nvSpPr>
+          <p:cNvPr id="7" name="Rectangle 6"/>
+          <p:cNvSpPr/>
+          <p:nvPr/>
+        </p:nvSpPr>
+        <p:spPr>
+          <a:xfrm>
+            <a:off x="777240" y="1990979"/>
+            <a:ext cx="10637215" cy="1463040"/>
+          </a:xfrm>
+          <a:prstGeom prst="rect">
+            <a:avLst/>
+          </a:prstGeom>
+          <a:solidFill>
+            <a:srgbClr val="F4F2ED"/>
+          </a:solidFill>
+          <a:ln>
+            <a:noFill/>
+          </a:ln>
+          <a:effectLst/>
+        </p:spPr>
+        <p:style>
+          <a:lnRef idx="1">
+            <a:schemeClr val="accent1"/>
+          </a:lnRef>
+          <a:fillRef idx="3">
+            <a:schemeClr val="accent1"/>
+          </a:fillRef>
+          <a:effectRef idx="2">
+            <a:schemeClr val="accent1"/>
+          </a:effectRef>
+          <a:fontRef idx="minor">
+            <a:schemeClr val="lt1"/>
+          </a:fontRef>
+        </p:style>
+        <p:txBody>
+          <a:bodyPr rtlCol="0" anchor="ctr"/>
+          <a:lstStyle/>
+          <a:p>
+            <a:pPr algn="ctr"/>
+            <a:endParaRPr/>
+          </a:p>
+        </p:txBody>
+      </p:sp>
+      <p:sp>
+        <p:nvSpPr>
+          <p:cNvPr id="8" name="TextBox 7"/>
+          <p:cNvSpPr txBox="1"/>
+          <p:nvPr/>
+        </p:nvSpPr>
+        <p:spPr>
+          <a:xfrm>
+            <a:off x="1097280" y="2228723"/>
+            <a:ext cx="9997135" cy="1005840"/>
+          </a:xfrm>
+          <a:prstGeom prst="rect">
+            <a:avLst/>
+          </a:prstGeom>
+          <a:noFill/>
+        </p:spPr>
+        <p:txBody>
+          <a:bodyPr wrap="square" lIns="0" tIns="0" rIns="0" bIns="0">
+            <a:spAutoFit/>
+          </a:bodyPr>
+          <a:lstStyle/>
           <a:p>
             <a:pPr algn="l">
               <a:lnSpc>
-                <a:spcPct val="130000"/>
+                <a:spcPct val="125000"/>
               </a:lnSpc>
               <a:spcBef>
                 <a:spcPts val="0"/>
               </a:spcBef>
               <a:spcAft>
-                <a:spcPts val="600"/>
+                <a:spcPts val="700"/>
               </a:spcAft>
             </a:pPr>
             <a:r>
-              <a:rPr sz="1550" b="0">
-                <a:solidFill>
-                  <a:srgbClr val="555045"/>
-                </a:solidFill>
-                <a:latin typeface="Arial"/>
-              </a:rPr>
-              <a:t>Pasos 14 y 15 · Optimizador del pedido y simulación de políticas</a:t>
-            </a:r>
-          </a:p>
-        </p:txBody>
-      </p:sp>
-      <p:sp>
-        <p:nvSpPr>
-          <p:cNvPr id="5" name="TextBox 4"/>
+              <a:rPr sz="1600" b="1">
+                <a:solidFill>
+                  <a:srgbClr val="17150F"/>
+                </a:solidFill>
+                <a:latin typeface="Arial"/>
+              </a:rPr>
+              <a:t>nivel de servicio  =  el que marcan los costes del producto</a:t>
+            </a:r>
+          </a:p>
+          <a:p>
+            <a:pPr algn="l">
+              <a:lnSpc>
+                <a:spcPct val="125000"/>
+              </a:lnSpc>
+              <a:spcBef>
+                <a:spcPts val="0"/>
+              </a:spcBef>
+              <a:spcAft>
+                <a:spcPts val="700"/>
+              </a:spcAft>
+            </a:pPr>
+            <a:r>
+              <a:rPr sz="1600" b="1">
+                <a:solidFill>
+                  <a:srgbClr val="17150F"/>
+                </a:solidFill>
+                <a:latin typeface="Arial"/>
+              </a:rPr>
+              <a:t>objetivo  =  la predicción del modelo a ese nivel, redondeada</a:t>
+            </a:r>
+          </a:p>
+          <a:p>
+            <a:pPr algn="l">
+              <a:lnSpc>
+                <a:spcPct val="125000"/>
+              </a:lnSpc>
+              <a:spcBef>
+                <a:spcPts val="0"/>
+              </a:spcBef>
+              <a:spcAft>
+                <a:spcPts val="0"/>
+              </a:spcAft>
+            </a:pPr>
+            <a:r>
+              <a:rPr sz="1600" b="1">
+                <a:solidFill>
+                  <a:srgbClr val="8C2F39"/>
+                </a:solidFill>
+                <a:latin typeface="Arial"/>
+              </a:rPr>
+              <a:t>pedido  =  máximo ( 0 ,  objetivo − stock en estantería )</a:t>
+            </a:r>
+          </a:p>
+        </p:txBody>
+      </p:sp>
+      <p:sp>
+        <p:nvSpPr>
+          <p:cNvPr id="9" name="Rectangle 8"/>
+          <p:cNvSpPr/>
+          <p:nvPr/>
+        </p:nvSpPr>
+        <p:spPr>
+          <a:xfrm>
+            <a:off x="777240" y="3874643"/>
+            <a:ext cx="63500" cy="63500"/>
+          </a:xfrm>
+          <a:prstGeom prst="rect">
+            <a:avLst/>
+          </a:prstGeom>
+          <a:solidFill>
+            <a:srgbClr val="8C2F39"/>
+          </a:solidFill>
+          <a:ln>
+            <a:noFill/>
+          </a:ln>
+          <a:effectLst/>
+        </p:spPr>
+        <p:style>
+          <a:lnRef idx="1">
+            <a:schemeClr val="accent1"/>
+          </a:lnRef>
+          <a:fillRef idx="3">
+            <a:schemeClr val="accent1"/>
+          </a:fillRef>
+          <a:effectRef idx="2">
+            <a:schemeClr val="accent1"/>
+          </a:effectRef>
+          <a:fontRef idx="minor">
+            <a:schemeClr val="lt1"/>
+          </a:fontRef>
+        </p:style>
+        <p:txBody>
+          <a:bodyPr rtlCol="0" anchor="ctr"/>
+          <a:lstStyle/>
+          <a:p>
+            <a:pPr algn="ctr"/>
+            <a:endParaRPr/>
+          </a:p>
+        </p:txBody>
+      </p:sp>
+      <p:sp>
+        <p:nvSpPr>
+          <p:cNvPr id="10" name="TextBox 9"/>
+          <p:cNvSpPr txBox="1"/>
+          <p:nvPr/>
+        </p:nvSpPr>
+        <p:spPr>
+          <a:xfrm>
+            <a:off x="978408" y="3774059"/>
+            <a:ext cx="10436047" cy="776859"/>
+          </a:xfrm>
+          <a:prstGeom prst="rect">
+            <a:avLst/>
+          </a:prstGeom>
+          <a:noFill/>
+        </p:spPr>
+        <p:txBody>
+          <a:bodyPr wrap="square" lIns="0" tIns="0" rIns="0" bIns="0">
+            <a:spAutoFit/>
+          </a:bodyPr>
+          <a:lstStyle/>
+          <a:p>
+            <a:pPr>
+              <a:lnSpc>
+                <a:spcPct val="124000"/>
+              </a:lnSpc>
+              <a:spcAft>
+                <a:spcPts val="0"/>
+              </a:spcAft>
+            </a:pPr>
+            <a:r>
+              <a:rPr sz="1450" b="1">
+                <a:solidFill>
+                  <a:srgbClr val="17150F"/>
+                </a:solidFill>
+                <a:latin typeface="Arial"/>
+              </a:rPr>
+              <a:t>Seis propiedades se verifican en cada ejecución</a:t>
+            </a:r>
+            <a:r>
+              <a:rPr sz="1450" b="0">
+                <a:solidFill>
+                  <a:srgbClr val="555045"/>
+                </a:solidFill>
+                <a:latin typeface="Arial"/>
+              </a:rPr>
+              <a:t>: ningún pedido negativo, todas las cantidades enteras, el pedido más el stock alcanza el objetivo, cero pedido donde el stock ya cubre, cada producto con su nivel, y ningún objetivo por debajo del pronóstico central.</a:t>
+            </a:r>
+          </a:p>
+        </p:txBody>
+      </p:sp>
+      <p:sp>
+        <p:nvSpPr>
+          <p:cNvPr id="15" name="Rectangle 14"/>
+          <p:cNvSpPr/>
+          <p:nvPr/>
+        </p:nvSpPr>
+        <p:spPr>
+          <a:xfrm>
+            <a:off x="777240" y="6327648"/>
+            <a:ext cx="10637215" cy="9525"/>
+          </a:xfrm>
+          <a:prstGeom prst="rect">
+            <a:avLst/>
+          </a:prstGeom>
+          <a:solidFill>
+            <a:srgbClr val="DCD8CF"/>
+          </a:solidFill>
+          <a:ln>
+            <a:noFill/>
+          </a:ln>
+          <a:effectLst/>
+        </p:spPr>
+        <p:style>
+          <a:lnRef idx="1">
+            <a:schemeClr val="accent1"/>
+          </a:lnRef>
+          <a:fillRef idx="3">
+            <a:schemeClr val="accent1"/>
+          </a:fillRef>
+          <a:effectRef idx="2">
+            <a:schemeClr val="accent1"/>
+          </a:effectRef>
+          <a:fontRef idx="minor">
+            <a:schemeClr val="lt1"/>
+          </a:fontRef>
+        </p:style>
+        <p:txBody>
+          <a:bodyPr rtlCol="0" anchor="ctr"/>
+          <a:lstStyle/>
+          <a:p>
+            <a:pPr algn="ctr"/>
+            <a:endParaRPr/>
+          </a:p>
+        </p:txBody>
+      </p:sp>
+      <p:sp>
+        <p:nvSpPr>
+          <p:cNvPr id="16" name="TextBox 15"/>
+          <p:cNvSpPr txBox="1"/>
+          <p:nvPr/>
+        </p:nvSpPr>
+        <p:spPr>
+          <a:xfrm>
+            <a:off x="777240" y="6428232"/>
+            <a:ext cx="8686800" cy="274320"/>
+          </a:xfrm>
+          <a:prstGeom prst="rect">
+            <a:avLst/>
+          </a:prstGeom>
+          <a:noFill/>
+        </p:spPr>
+        <p:txBody>
+          <a:bodyPr wrap="square" lIns="0" tIns="0" rIns="0" bIns="0">
+            <a:spAutoFit/>
+          </a:bodyPr>
+          <a:lstStyle/>
+          <a:p>
+            <a:pPr algn="l">
+              <a:lnSpc>
+                <a:spcPct val="122000"/>
+              </a:lnSpc>
+              <a:spcBef>
+                <a:spcPts val="0"/>
+              </a:spcBef>
+              <a:spcAft>
+                <a:spcPts val="0"/>
+              </a:spcAft>
+            </a:pPr>
+            <a:r>
+              <a:rPr sz="950" b="0">
+                <a:solidFill>
+                  <a:srgbClr val="8B8478"/>
+                </a:solidFill>
+                <a:latin typeface="Arial"/>
+              </a:rPr>
+              <a:t>Paso 14 · Optimizador del pedido</a:t>
+            </a:r>
+          </a:p>
+        </p:txBody>
+      </p:sp>
+      <p:sp>
+        <p:nvSpPr>
+          <p:cNvPr id="17" name="TextBox 16"/>
           <p:cNvSpPr txBox="1"/>
           <p:nvPr/>
         </p:nvSpPr>
@@ -29026,7 +29349,7 @@
                 </a:solidFill>
                 <a:latin typeface="Arial"/>
               </a:rPr>
-              <a:t>38</a:t>
+              <a:t>39</a:t>
             </a:r>
           </a:p>
         </p:txBody>
@@ -29141,7 +29464,7 @@
                 </a:solidFill>
                 <a:latin typeface="Arial"/>
               </a:rPr>
-              <a:t>PASO 14 · EL OPTIMIZADOR</a:t>
+              <a:t>PASO 14 · EL COLCHÓN</a:t>
             </a:r>
           </a:p>
         </p:txBody>
@@ -29231,21 +29554,45 @@
                 </a:solidFill>
                 <a:latin typeface="Arial"/>
               </a:rPr>
-              <a:t>Toda la decisión cabe en tres líneas</a:t>
-            </a:r>
-          </a:p>
-        </p:txBody>
-      </p:sp>
-      <p:sp>
-        <p:nvSpPr>
-          <p:cNvPr id="6" name="TextBox 5"/>
+              <a:t>La respuesta visible a la pregunta del encargo</a:t>
+            </a:r>
+          </a:p>
+        </p:txBody>
+      </p:sp>
+      <p:pic>
+        <p:nvPicPr>
+          <p:cNvPr id="6" name="Picture 5" descr="22_composicion_pedido.png"/>
+          <p:cNvPicPr>
+            <a:picLocks noChangeAspect="1"/>
+          </p:cNvPicPr>
+          <p:nvPr/>
+        </p:nvPicPr>
+        <p:blipFill>
+          <a:blip r:embed="rId2"/>
+          <a:stretch>
+            <a:fillRect/>
+          </a:stretch>
+        </p:blipFill>
+        <p:spPr>
+          <a:xfrm>
+            <a:off x="335280" y="1609344"/>
+            <a:ext cx="5760720" cy="3291840"/>
+          </a:xfrm>
+          <a:prstGeom prst="rect">
+            <a:avLst/>
+          </a:prstGeom>
+        </p:spPr>
+      </p:pic>
+      <p:sp>
+        <p:nvSpPr>
+          <p:cNvPr id="8" name="TextBox 7"/>
           <p:cNvSpPr txBox="1"/>
           <p:nvPr/>
         </p:nvSpPr>
         <p:spPr>
           <a:xfrm>
-            <a:off x="777240" y="1506474"/>
-            <a:ext cx="9966960" cy="283337"/>
+            <a:off x="6587972" y="4037076"/>
+            <a:ext cx="4556455" cy="1828800"/>
           </a:xfrm>
           <a:prstGeom prst="rect">
             <a:avLst/>
@@ -29260,157 +29607,495 @@
           <a:p>
             <a:pPr algn="l">
               <a:lnSpc>
-                <a:spcPct val="130000"/>
+                <a:spcPct val="128000"/>
               </a:lnSpc>
               <a:spcBef>
                 <a:spcPts val="0"/>
               </a:spcBef>
               <a:spcAft>
-                <a:spcPts val="0"/>
+                <a:spcPts val="1000"/>
               </a:spcAft>
             </a:pPr>
             <a:r>
-              <a:rPr sz="1450" b="0">
-                <a:solidFill>
-                  <a:srgbClr val="555045"/>
-                </a:solidFill>
-                <a:latin typeface="Arial"/>
-              </a:rPr>
-              <a:t>Deliberadamente corta, para que pueda revisarla alguien de operaciones sin leer el resto del proyecto.</a:t>
-            </a:r>
-          </a:p>
-        </p:txBody>
-      </p:sp>
-      <p:sp>
-        <p:nvSpPr>
-          <p:cNvPr id="7" name="Rectangle 6"/>
-          <p:cNvSpPr/>
-          <p:nvPr/>
-        </p:nvSpPr>
-        <p:spPr>
-          <a:xfrm>
-            <a:off x="777240" y="1990979"/>
-            <a:ext cx="10637215" cy="1463040"/>
-          </a:xfrm>
-          <a:prstGeom prst="rect">
-            <a:avLst/>
-          </a:prstGeom>
-          <a:solidFill>
-            <a:srgbClr val="F4F2ED"/>
-          </a:solidFill>
-          <a:ln>
-            <a:noFill/>
-          </a:ln>
-          <a:effectLst/>
-        </p:spPr>
-        <p:style>
-          <a:lnRef idx="1">
-            <a:schemeClr val="accent1"/>
-          </a:lnRef>
-          <a:fillRef idx="3">
-            <a:schemeClr val="accent1"/>
-          </a:fillRef>
-          <a:effectRef idx="2">
-            <a:schemeClr val="accent1"/>
-          </a:effectRef>
-          <a:fontRef idx="minor">
-            <a:schemeClr val="lt1"/>
-          </a:fontRef>
-        </p:style>
-        <p:txBody>
-          <a:bodyPr rtlCol="0" anchor="ctr"/>
-          <a:lstStyle/>
-          <a:p>
-            <a:pPr algn="ctr"/>
-            <a:endParaRPr/>
-          </a:p>
-        </p:txBody>
-      </p:sp>
-      <p:sp>
-        <p:nvSpPr>
-          <p:cNvPr id="8" name="TextBox 7"/>
-          <p:cNvSpPr txBox="1"/>
-          <p:nvPr/>
-        </p:nvSpPr>
-        <p:spPr>
-          <a:xfrm>
-            <a:off x="1097280" y="2228723"/>
-            <a:ext cx="9997135" cy="1005840"/>
-          </a:xfrm>
-          <a:prstGeom prst="rect">
-            <a:avLst/>
-          </a:prstGeom>
-          <a:noFill/>
-        </p:spPr>
-        <p:txBody>
-          <a:bodyPr wrap="square" lIns="0" tIns="0" rIns="0" bIns="0">
-            <a:spAutoFit/>
-          </a:bodyPr>
-          <a:lstStyle/>
+              <a:rPr sz="1250" b="0" dirty="0">
+                <a:solidFill>
+                  <a:srgbClr val="555045"/>
+                </a:solidFill>
+                <a:latin typeface="Arial"/>
+              </a:rPr>
+              <a:t>El </a:t>
+            </a:r>
+            <a:r>
+              <a:rPr sz="1250" b="0" dirty="0" err="1">
+                <a:solidFill>
+                  <a:srgbClr val="555045"/>
+                </a:solidFill>
+                <a:latin typeface="Arial"/>
+              </a:rPr>
+              <a:t>colchón</a:t>
+            </a:r>
+            <a:r>
+              <a:rPr sz="1250" b="0" dirty="0">
+                <a:solidFill>
+                  <a:srgbClr val="555045"/>
+                </a:solidFill>
+                <a:latin typeface="Arial"/>
+              </a:rPr>
+              <a:t> es lo </a:t>
+            </a:r>
+            <a:r>
+              <a:rPr sz="1250" b="0" dirty="0" err="1">
+                <a:solidFill>
+                  <a:srgbClr val="555045"/>
+                </a:solidFill>
+                <a:latin typeface="Arial"/>
+              </a:rPr>
+              <a:t>que</a:t>
+            </a:r>
+            <a:r>
+              <a:rPr sz="1250" b="0" dirty="0">
+                <a:solidFill>
+                  <a:srgbClr val="555045"/>
+                </a:solidFill>
+                <a:latin typeface="Arial"/>
+              </a:rPr>
+              <a:t> se </a:t>
+            </a:r>
+            <a:r>
+              <a:rPr sz="1250" b="0" dirty="0" err="1">
+                <a:solidFill>
+                  <a:srgbClr val="555045"/>
+                </a:solidFill>
+                <a:latin typeface="Arial"/>
+              </a:rPr>
+              <a:t>pide</a:t>
+            </a:r>
+            <a:r>
+              <a:rPr sz="1250" b="0" dirty="0">
+                <a:solidFill>
+                  <a:srgbClr val="555045"/>
+                </a:solidFill>
+                <a:latin typeface="Arial"/>
+              </a:rPr>
+              <a:t> </a:t>
+            </a:r>
+            <a:r>
+              <a:rPr sz="1250" b="0" dirty="0" err="1">
+                <a:solidFill>
+                  <a:srgbClr val="555045"/>
+                </a:solidFill>
+                <a:latin typeface="Arial"/>
+              </a:rPr>
+              <a:t>por</a:t>
+            </a:r>
+            <a:r>
+              <a:rPr sz="1250" b="0" dirty="0">
+                <a:solidFill>
+                  <a:srgbClr val="555045"/>
+                </a:solidFill>
+                <a:latin typeface="Arial"/>
+              </a:rPr>
+              <a:t> </a:t>
+            </a:r>
+            <a:r>
+              <a:rPr sz="1250" b="0" dirty="0" err="1">
+                <a:solidFill>
+                  <a:srgbClr val="555045"/>
+                </a:solidFill>
+                <a:latin typeface="Arial"/>
+              </a:rPr>
+              <a:t>encima</a:t>
+            </a:r>
+            <a:r>
+              <a:rPr sz="1250" b="0" dirty="0">
+                <a:solidFill>
+                  <a:srgbClr val="555045"/>
+                </a:solidFill>
+                <a:latin typeface="Arial"/>
+              </a:rPr>
+              <a:t> de lo </a:t>
+            </a:r>
+            <a:r>
+              <a:rPr sz="1250" b="0" dirty="0" err="1">
+                <a:solidFill>
+                  <a:srgbClr val="555045"/>
+                </a:solidFill>
+                <a:latin typeface="Arial"/>
+              </a:rPr>
+              <a:t>esperado</a:t>
+            </a:r>
+            <a:r>
+              <a:rPr sz="1250" b="0" dirty="0">
+                <a:solidFill>
+                  <a:srgbClr val="555045"/>
+                </a:solidFill>
+                <a:latin typeface="Arial"/>
+              </a:rPr>
+              <a:t>. El </a:t>
+            </a:r>
+            <a:r>
+              <a:rPr sz="1250" b="0" dirty="0" err="1">
+                <a:solidFill>
+                  <a:srgbClr val="555045"/>
+                </a:solidFill>
+                <a:latin typeface="Arial"/>
+              </a:rPr>
+              <a:t>producto</a:t>
+            </a:r>
+            <a:r>
+              <a:rPr sz="1250" b="0" dirty="0">
+                <a:solidFill>
+                  <a:srgbClr val="555045"/>
+                </a:solidFill>
+                <a:latin typeface="Arial"/>
+              </a:rPr>
+              <a:t> con </a:t>
+            </a:r>
+            <a:r>
+              <a:rPr sz="1250" b="0" dirty="0" err="1">
+                <a:solidFill>
+                  <a:srgbClr val="555045"/>
+                </a:solidFill>
+                <a:latin typeface="Arial"/>
+              </a:rPr>
+              <a:t>más</a:t>
+            </a:r>
+            <a:r>
+              <a:rPr sz="1250" b="0" dirty="0">
+                <a:solidFill>
+                  <a:srgbClr val="555045"/>
+                </a:solidFill>
+                <a:latin typeface="Arial"/>
+              </a:rPr>
+              <a:t> </a:t>
+            </a:r>
+            <a:r>
+              <a:rPr sz="1250" b="0" dirty="0" err="1">
+                <a:solidFill>
+                  <a:srgbClr val="555045"/>
+                </a:solidFill>
+                <a:latin typeface="Arial"/>
+              </a:rPr>
+              <a:t>margen</a:t>
+            </a:r>
+            <a:r>
+              <a:rPr sz="1250" b="0" dirty="0">
+                <a:solidFill>
+                  <a:srgbClr val="555045"/>
+                </a:solidFill>
+                <a:latin typeface="Arial"/>
+              </a:rPr>
+              <a:t> se protege </a:t>
+            </a:r>
+            <a:r>
+              <a:rPr sz="1250" b="0" dirty="0" err="1">
+                <a:solidFill>
+                  <a:srgbClr val="555045"/>
+                </a:solidFill>
+                <a:latin typeface="Arial"/>
+              </a:rPr>
+              <a:t>más</a:t>
+            </a:r>
+            <a:r>
+              <a:rPr sz="1250" b="0" dirty="0">
+                <a:solidFill>
+                  <a:srgbClr val="555045"/>
+                </a:solidFill>
+                <a:latin typeface="Arial"/>
+              </a:rPr>
+              <a:t> del doble </a:t>
+            </a:r>
+            <a:r>
+              <a:rPr sz="1250" b="0" dirty="0" err="1">
+                <a:solidFill>
+                  <a:srgbClr val="555045"/>
+                </a:solidFill>
+                <a:latin typeface="Arial"/>
+              </a:rPr>
+              <a:t>que</a:t>
+            </a:r>
+            <a:r>
+              <a:rPr sz="1250" b="0" dirty="0">
+                <a:solidFill>
+                  <a:srgbClr val="555045"/>
+                </a:solidFill>
+                <a:latin typeface="Arial"/>
+              </a:rPr>
+              <a:t> el de </a:t>
+            </a:r>
+            <a:r>
+              <a:rPr sz="1250" b="0" dirty="0" err="1">
+                <a:solidFill>
+                  <a:srgbClr val="555045"/>
+                </a:solidFill>
+                <a:latin typeface="Arial"/>
+              </a:rPr>
+              <a:t>menos</a:t>
+            </a:r>
+            <a:r>
+              <a:rPr sz="1250" b="0" dirty="0">
+                <a:solidFill>
+                  <a:srgbClr val="555045"/>
+                </a:solidFill>
+                <a:latin typeface="Arial"/>
+              </a:rPr>
+              <a:t> </a:t>
+            </a:r>
+            <a:r>
+              <a:rPr sz="1250" b="0" dirty="0" err="1">
+                <a:solidFill>
+                  <a:srgbClr val="555045"/>
+                </a:solidFill>
+                <a:latin typeface="Arial"/>
+              </a:rPr>
+              <a:t>margen</a:t>
+            </a:r>
+            <a:r>
+              <a:rPr sz="1250" b="0" dirty="0">
+                <a:solidFill>
+                  <a:srgbClr val="555045"/>
+                </a:solidFill>
+                <a:latin typeface="Arial"/>
+              </a:rPr>
+              <a:t>, y </a:t>
+            </a:r>
+            <a:r>
+              <a:rPr sz="1250" b="0" dirty="0" err="1">
+                <a:solidFill>
+                  <a:srgbClr val="555045"/>
+                </a:solidFill>
+                <a:latin typeface="Arial"/>
+              </a:rPr>
+              <a:t>nadie</a:t>
+            </a:r>
+            <a:r>
+              <a:rPr sz="1250" b="0" dirty="0">
+                <a:solidFill>
+                  <a:srgbClr val="555045"/>
+                </a:solidFill>
+                <a:latin typeface="Arial"/>
+              </a:rPr>
+              <a:t> lo </a:t>
+            </a:r>
+            <a:r>
+              <a:rPr sz="1250" b="0" dirty="0" err="1">
+                <a:solidFill>
+                  <a:srgbClr val="555045"/>
+                </a:solidFill>
+                <a:latin typeface="Arial"/>
+              </a:rPr>
+              <a:t>decidió</a:t>
+            </a:r>
+            <a:r>
+              <a:rPr sz="1250" b="0" dirty="0">
+                <a:solidFill>
+                  <a:srgbClr val="555045"/>
+                </a:solidFill>
+                <a:latin typeface="Arial"/>
+              </a:rPr>
+              <a:t> a mano.</a:t>
+            </a:r>
+          </a:p>
           <a:p>
             <a:pPr algn="l">
               <a:lnSpc>
-                <a:spcPct val="125000"/>
+                <a:spcPct val="128000"/>
               </a:lnSpc>
               <a:spcBef>
                 <a:spcPts val="0"/>
               </a:spcBef>
               <a:spcAft>
-                <a:spcPts val="700"/>
+                <a:spcPts val="0"/>
               </a:spcAft>
             </a:pPr>
             <a:r>
-              <a:rPr sz="1600" b="1">
+              <a:rPr sz="1250" b="1" dirty="0">
                 <a:solidFill>
                   <a:srgbClr val="17150F"/>
                 </a:solidFill>
                 <a:latin typeface="Arial"/>
               </a:rPr>
-              <a:t>nivel de servicio  =  el que marcan los costes del producto</a:t>
-            </a:r>
-          </a:p>
-          <a:p>
-            <a:pPr algn="l">
-              <a:lnSpc>
-                <a:spcPct val="125000"/>
-              </a:lnSpc>
-              <a:spcBef>
-                <a:spcPts val="0"/>
-              </a:spcBef>
-              <a:spcAft>
-                <a:spcPts val="700"/>
-              </a:spcAft>
-            </a:pPr>
-            <a:r>
-              <a:rPr sz="1600" b="1">
+              <a:t>Al Pastel de Pollo </a:t>
+            </a:r>
+            <a:r>
+              <a:rPr sz="1250" b="1" dirty="0" err="1">
                 <a:solidFill>
                   <a:srgbClr val="17150F"/>
                 </a:solidFill>
                 <a:latin typeface="Arial"/>
               </a:rPr>
-              <a:t>objetivo  =  la predicción del modelo a ese nivel, redondeada</a:t>
-            </a:r>
-          </a:p>
-          <a:p>
-            <a:pPr algn="l">
-              <a:lnSpc>
-                <a:spcPct val="125000"/>
-              </a:lnSpc>
-              <a:spcBef>
-                <a:spcPts val="0"/>
-              </a:spcBef>
-              <a:spcAft>
-                <a:spcPts val="0"/>
-              </a:spcAft>
-            </a:pPr>
-            <a:r>
-              <a:rPr sz="1600" b="1">
-                <a:solidFill>
-                  <a:srgbClr val="8C2F39"/>
-                </a:solidFill>
-                <a:latin typeface="Arial"/>
-              </a:rPr>
-              <a:t>pedido  =  máximo ( 0 ,  objetivo − stock en estantería )</a:t>
+              <a:t>pasarse</a:t>
+            </a:r>
+            <a:r>
+              <a:rPr sz="1250" b="1" dirty="0">
+                <a:solidFill>
+                  <a:srgbClr val="17150F"/>
+                </a:solidFill>
+                <a:latin typeface="Arial"/>
+              </a:rPr>
+              <a:t> le </a:t>
+            </a:r>
+            <a:r>
+              <a:rPr sz="1250" b="1" dirty="0" err="1">
+                <a:solidFill>
+                  <a:srgbClr val="17150F"/>
+                </a:solidFill>
+                <a:latin typeface="Arial"/>
+              </a:rPr>
+              <a:t>duele</a:t>
+            </a:r>
+            <a:r>
+              <a:rPr sz="1250" b="1" dirty="0">
+                <a:solidFill>
+                  <a:srgbClr val="17150F"/>
+                </a:solidFill>
+                <a:latin typeface="Arial"/>
+              </a:rPr>
+              <a:t> </a:t>
+            </a:r>
+            <a:r>
+              <a:rPr sz="1250" b="1" dirty="0" err="1">
+                <a:solidFill>
+                  <a:srgbClr val="17150F"/>
+                </a:solidFill>
+                <a:latin typeface="Arial"/>
+              </a:rPr>
+              <a:t>casi</a:t>
+            </a:r>
+            <a:r>
+              <a:rPr sz="1250" b="1" dirty="0">
+                <a:solidFill>
+                  <a:srgbClr val="17150F"/>
+                </a:solidFill>
+                <a:latin typeface="Arial"/>
+              </a:rPr>
+              <a:t> tanto </a:t>
+            </a:r>
+            <a:r>
+              <a:rPr sz="1250" b="1" dirty="0" err="1">
+                <a:solidFill>
+                  <a:srgbClr val="17150F"/>
+                </a:solidFill>
+                <a:latin typeface="Arial"/>
+              </a:rPr>
+              <a:t>como</a:t>
+            </a:r>
+            <a:r>
+              <a:rPr sz="1250" b="1" dirty="0">
+                <a:solidFill>
+                  <a:srgbClr val="17150F"/>
+                </a:solidFill>
+                <a:latin typeface="Arial"/>
+              </a:rPr>
+              <a:t> </a:t>
+            </a:r>
+            <a:r>
+              <a:rPr sz="1250" b="1" dirty="0" err="1">
+                <a:solidFill>
+                  <a:srgbClr val="17150F"/>
+                </a:solidFill>
+                <a:latin typeface="Arial"/>
+              </a:rPr>
+              <a:t>quedarse</a:t>
+            </a:r>
+            <a:r>
+              <a:rPr sz="1250" b="1" dirty="0">
+                <a:solidFill>
+                  <a:srgbClr val="17150F"/>
+                </a:solidFill>
+                <a:latin typeface="Arial"/>
+              </a:rPr>
+              <a:t> corto: </a:t>
+            </a:r>
+            <a:r>
+              <a:rPr sz="1250" b="1" dirty="0" err="1">
+                <a:solidFill>
+                  <a:srgbClr val="17150F"/>
+                </a:solidFill>
+                <a:latin typeface="Arial"/>
+              </a:rPr>
+              <a:t>margen</a:t>
+            </a:r>
+            <a:r>
+              <a:rPr sz="1250" b="1" dirty="0">
+                <a:solidFill>
+                  <a:srgbClr val="17150F"/>
+                </a:solidFill>
+                <a:latin typeface="Arial"/>
+              </a:rPr>
+              <a:t> bajo y </a:t>
+            </a:r>
+            <a:r>
+              <a:rPr sz="1250" b="1" dirty="0" err="1">
+                <a:solidFill>
+                  <a:srgbClr val="17150F"/>
+                </a:solidFill>
+                <a:latin typeface="Arial"/>
+              </a:rPr>
+              <a:t>almacenaje</a:t>
+            </a:r>
+            <a:r>
+              <a:rPr sz="1250" b="1" dirty="0">
+                <a:solidFill>
+                  <a:srgbClr val="17150F"/>
+                </a:solidFill>
+                <a:latin typeface="Arial"/>
+              </a:rPr>
+              <a:t> </a:t>
+            </a:r>
+            <a:r>
+              <a:rPr sz="1250" b="1" dirty="0" err="1">
+                <a:solidFill>
+                  <a:srgbClr val="17150F"/>
+                </a:solidFill>
+                <a:latin typeface="Arial"/>
+              </a:rPr>
+              <a:t>caro</a:t>
+            </a:r>
+            <a:r>
+              <a:rPr sz="1250" b="1" dirty="0">
+                <a:solidFill>
+                  <a:srgbClr val="17150F"/>
+                </a:solidFill>
+                <a:latin typeface="Arial"/>
+              </a:rPr>
+              <a:t>. Al Tinto le </a:t>
+            </a:r>
+            <a:r>
+              <a:rPr sz="1250" b="1" dirty="0" err="1">
+                <a:solidFill>
+                  <a:srgbClr val="17150F"/>
+                </a:solidFill>
+                <a:latin typeface="Arial"/>
+              </a:rPr>
+              <a:t>compensa</a:t>
+            </a:r>
+            <a:r>
+              <a:rPr sz="1250" b="1" dirty="0">
+                <a:solidFill>
+                  <a:srgbClr val="17150F"/>
+                </a:solidFill>
+                <a:latin typeface="Arial"/>
+              </a:rPr>
+              <a:t> </a:t>
+            </a:r>
+            <a:r>
+              <a:rPr sz="1250" b="1" dirty="0" err="1">
+                <a:solidFill>
+                  <a:srgbClr val="17150F"/>
+                </a:solidFill>
+                <a:latin typeface="Arial"/>
+              </a:rPr>
+              <a:t>arriesgar</a:t>
+            </a:r>
+            <a:r>
+              <a:rPr sz="1250" b="1" dirty="0">
+                <a:solidFill>
+                  <a:srgbClr val="17150F"/>
+                </a:solidFill>
+                <a:latin typeface="Arial"/>
+              </a:rPr>
+              <a:t>.</a:t>
             </a:r>
           </a:p>
         </p:txBody>
@@ -29418,294 +30103,6 @@
       <p:sp>
         <p:nvSpPr>
           <p:cNvPr id="9" name="Rectangle 8"/>
-          <p:cNvSpPr/>
-          <p:nvPr/>
-        </p:nvSpPr>
-        <p:spPr>
-          <a:xfrm>
-            <a:off x="777240" y="3874643"/>
-            <a:ext cx="63500" cy="63500"/>
-          </a:xfrm>
-          <a:prstGeom prst="rect">
-            <a:avLst/>
-          </a:prstGeom>
-          <a:solidFill>
-            <a:srgbClr val="8C2F39"/>
-          </a:solidFill>
-          <a:ln>
-            <a:noFill/>
-          </a:ln>
-          <a:effectLst/>
-        </p:spPr>
-        <p:style>
-          <a:lnRef idx="1">
-            <a:schemeClr val="accent1"/>
-          </a:lnRef>
-          <a:fillRef idx="3">
-            <a:schemeClr val="accent1"/>
-          </a:fillRef>
-          <a:effectRef idx="2">
-            <a:schemeClr val="accent1"/>
-          </a:effectRef>
-          <a:fontRef idx="minor">
-            <a:schemeClr val="lt1"/>
-          </a:fontRef>
-        </p:style>
-        <p:txBody>
-          <a:bodyPr rtlCol="0" anchor="ctr"/>
-          <a:lstStyle/>
-          <a:p>
-            <a:pPr algn="ctr"/>
-            <a:endParaRPr/>
-          </a:p>
-        </p:txBody>
-      </p:sp>
-      <p:sp>
-        <p:nvSpPr>
-          <p:cNvPr id="10" name="TextBox 9"/>
-          <p:cNvSpPr txBox="1"/>
-          <p:nvPr/>
-        </p:nvSpPr>
-        <p:spPr>
-          <a:xfrm>
-            <a:off x="978408" y="3774059"/>
-            <a:ext cx="10436047" cy="776859"/>
-          </a:xfrm>
-          <a:prstGeom prst="rect">
-            <a:avLst/>
-          </a:prstGeom>
-          <a:noFill/>
-        </p:spPr>
-        <p:txBody>
-          <a:bodyPr wrap="square" lIns="0" tIns="0" rIns="0" bIns="0">
-            <a:spAutoFit/>
-          </a:bodyPr>
-          <a:lstStyle/>
-          <a:p>
-            <a:pPr>
-              <a:lnSpc>
-                <a:spcPct val="124000"/>
-              </a:lnSpc>
-              <a:spcAft>
-                <a:spcPts val="0"/>
-              </a:spcAft>
-            </a:pPr>
-            <a:r>
-              <a:rPr sz="1450" b="1">
-                <a:solidFill>
-                  <a:srgbClr val="17150F"/>
-                </a:solidFill>
-                <a:latin typeface="Arial"/>
-              </a:rPr>
-              <a:t>Seis propiedades se verifican en cada ejecución</a:t>
-            </a:r>
-            <a:r>
-              <a:rPr sz="1450" b="0">
-                <a:solidFill>
-                  <a:srgbClr val="555045"/>
-                </a:solidFill>
-                <a:latin typeface="Arial"/>
-              </a:rPr>
-              <a:t>: ningún pedido negativo, todas las cantidades enteras, el pedido más el stock alcanza el objetivo, cero pedido donde el stock ya cubre, cada producto con su nivel, y ningún objetivo por debajo del pronóstico central.</a:t>
-            </a:r>
-          </a:p>
-        </p:txBody>
-      </p:sp>
-      <p:sp>
-        <p:nvSpPr>
-          <p:cNvPr id="11" name="Rectangle 10"/>
-          <p:cNvSpPr/>
-          <p:nvPr/>
-        </p:nvSpPr>
-        <p:spPr>
-          <a:xfrm>
-            <a:off x="777240" y="4779518"/>
-            <a:ext cx="63500" cy="63500"/>
-          </a:xfrm>
-          <a:prstGeom prst="rect">
-            <a:avLst/>
-          </a:prstGeom>
-          <a:solidFill>
-            <a:srgbClr val="8C2F39"/>
-          </a:solidFill>
-          <a:ln>
-            <a:noFill/>
-          </a:ln>
-          <a:effectLst/>
-        </p:spPr>
-        <p:style>
-          <a:lnRef idx="1">
-            <a:schemeClr val="accent1"/>
-          </a:lnRef>
-          <a:fillRef idx="3">
-            <a:schemeClr val="accent1"/>
-          </a:fillRef>
-          <a:effectRef idx="2">
-            <a:schemeClr val="accent1"/>
-          </a:effectRef>
-          <a:fontRef idx="minor">
-            <a:schemeClr val="lt1"/>
-          </a:fontRef>
-        </p:style>
-        <p:txBody>
-          <a:bodyPr rtlCol="0" anchor="ctr"/>
-          <a:lstStyle/>
-          <a:p>
-            <a:pPr algn="ctr"/>
-            <a:endParaRPr/>
-          </a:p>
-        </p:txBody>
-      </p:sp>
-      <p:sp>
-        <p:nvSpPr>
-          <p:cNvPr id="12" name="TextBox 11"/>
-          <p:cNvSpPr txBox="1"/>
-          <p:nvPr/>
-        </p:nvSpPr>
-        <p:spPr>
-          <a:xfrm>
-            <a:off x="978408" y="4678934"/>
-            <a:ext cx="10436047" cy="530098"/>
-          </a:xfrm>
-          <a:prstGeom prst="rect">
-            <a:avLst/>
-          </a:prstGeom>
-          <a:noFill/>
-        </p:spPr>
-        <p:txBody>
-          <a:bodyPr wrap="square" lIns="0" tIns="0" rIns="0" bIns="0">
-            <a:spAutoFit/>
-          </a:bodyPr>
-          <a:lstStyle/>
-          <a:p>
-            <a:pPr>
-              <a:lnSpc>
-                <a:spcPct val="124000"/>
-              </a:lnSpc>
-              <a:spcAft>
-                <a:spcPts val="0"/>
-              </a:spcAft>
-            </a:pPr>
-            <a:r>
-              <a:rPr sz="1450" b="1">
-                <a:solidFill>
-                  <a:srgbClr val="17150F"/>
-                </a:solidFill>
-                <a:latin typeface="Arial"/>
-              </a:rPr>
-              <a:t>Ocho pruebas con casos construidos a mano</a:t>
-            </a:r>
-            <a:r>
-              <a:rPr sz="1450" b="0">
-                <a:solidFill>
-                  <a:srgbClr val="555045"/>
-                </a:solidFill>
-                <a:latin typeface="Arial"/>
-              </a:rPr>
-              <a:t>, donde la respuesta correcta se conoce de antemano. Dos exigen que el proceso falle: si falta un nivel o si una serie no tiene stock registrado.</a:t>
-            </a:r>
-          </a:p>
-        </p:txBody>
-      </p:sp>
-      <p:sp>
-        <p:nvSpPr>
-          <p:cNvPr id="13" name="Rectangle 12"/>
-          <p:cNvSpPr/>
-          <p:nvPr/>
-        </p:nvSpPr>
-        <p:spPr>
-          <a:xfrm>
-            <a:off x="777240" y="5437632"/>
-            <a:ext cx="63500" cy="63500"/>
-          </a:xfrm>
-          <a:prstGeom prst="rect">
-            <a:avLst/>
-          </a:prstGeom>
-          <a:solidFill>
-            <a:srgbClr val="8C2F39"/>
-          </a:solidFill>
-          <a:ln>
-            <a:noFill/>
-          </a:ln>
-          <a:effectLst/>
-        </p:spPr>
-        <p:style>
-          <a:lnRef idx="1">
-            <a:schemeClr val="accent1"/>
-          </a:lnRef>
-          <a:fillRef idx="3">
-            <a:schemeClr val="accent1"/>
-          </a:fillRef>
-          <a:effectRef idx="2">
-            <a:schemeClr val="accent1"/>
-          </a:effectRef>
-          <a:fontRef idx="minor">
-            <a:schemeClr val="lt1"/>
-          </a:fontRef>
-        </p:style>
-        <p:txBody>
-          <a:bodyPr rtlCol="0" anchor="ctr"/>
-          <a:lstStyle/>
-          <a:p>
-            <a:pPr algn="ctr"/>
-            <a:endParaRPr/>
-          </a:p>
-        </p:txBody>
-      </p:sp>
-      <p:sp>
-        <p:nvSpPr>
-          <p:cNvPr id="14" name="TextBox 13"/>
-          <p:cNvSpPr txBox="1"/>
-          <p:nvPr/>
-        </p:nvSpPr>
-        <p:spPr>
-          <a:xfrm>
-            <a:off x="978408" y="5337048"/>
-            <a:ext cx="10436047" cy="530098"/>
-          </a:xfrm>
-          <a:prstGeom prst="rect">
-            <a:avLst/>
-          </a:prstGeom>
-          <a:noFill/>
-        </p:spPr>
-        <p:txBody>
-          <a:bodyPr wrap="square" lIns="0" tIns="0" rIns="0" bIns="0">
-            <a:spAutoFit/>
-          </a:bodyPr>
-          <a:lstStyle/>
-          <a:p>
-            <a:pPr>
-              <a:lnSpc>
-                <a:spcPct val="124000"/>
-              </a:lnSpc>
-              <a:spcAft>
-                <a:spcPts val="0"/>
-              </a:spcAft>
-            </a:pPr>
-            <a:r>
-              <a:rPr sz="1450" b="1">
-                <a:solidFill>
-                  <a:srgbClr val="17150F"/>
-                </a:solidFill>
-                <a:latin typeface="Arial"/>
-              </a:rPr>
-              <a:t>Tres restricciones operativas están implementadas y desactivadas</a:t>
-            </a:r>
-            <a:r>
-              <a:rPr sz="1450" b="0">
-                <a:solidFill>
-                  <a:srgbClr val="555045"/>
-                </a:solidFill>
-                <a:latin typeface="Arial"/>
-              </a:rPr>
-              <a:t>: múltiplo de lote, redondeo al alza y techo físico por tienda. Se activan cambiando un parámetro, sin tocar la lógica.</a:t>
-            </a:r>
-          </a:p>
-        </p:txBody>
-      </p:sp>
-      <p:sp>
-        <p:nvSpPr>
-          <p:cNvPr id="15" name="Rectangle 14"/>
           <p:cNvSpPr/>
           <p:nvPr/>
         </p:nvSpPr>
@@ -29750,7 +30147,7 @@
       </p:sp>
       <p:sp>
         <p:nvSpPr>
-          <p:cNvPr id="16" name="TextBox 15"/>
+          <p:cNvPr id="10" name="TextBox 9"/>
           <p:cNvSpPr txBox="1"/>
           <p:nvPr/>
         </p:nvSpPr>
@@ -29795,7 +30192,7 @@
       </p:sp>
       <p:sp>
         <p:nvSpPr>
-          <p:cNvPr id="17" name="TextBox 16"/>
+          <p:cNvPr id="11" name="TextBox 10"/>
           <p:cNvSpPr txBox="1"/>
           <p:nvPr/>
         </p:nvSpPr>
@@ -29833,11 +30230,41 @@
                 </a:solidFill>
                 <a:latin typeface="Arial"/>
               </a:rPr>
-              <a:t>39</a:t>
-            </a:r>
-          </a:p>
-        </p:txBody>
-      </p:sp>
+              <a:t>40</a:t>
+            </a:r>
+          </a:p>
+        </p:txBody>
+      </p:sp>
+      <p:pic>
+        <p:nvPicPr>
+          <p:cNvPr id="12" name="Picture 11">
+            <a:extLst>
+              <a:ext uri="{FF2B5EF4-FFF2-40B4-BE49-F238E27FC236}">
+                <a16:creationId xmlns:a16="http://schemas.microsoft.com/office/drawing/2014/main" id="{E397AB7D-2680-E8CE-91C7-4BAFF0639184}"/>
+              </a:ext>
+            </a:extLst>
+          </p:cNvPr>
+          <p:cNvPicPr>
+            <a:picLocks noChangeAspect="1"/>
+          </p:cNvPicPr>
+          <p:nvPr/>
+        </p:nvPicPr>
+        <p:blipFill>
+          <a:blip r:embed="rId3"/>
+          <a:stretch>
+            <a:fillRect/>
+          </a:stretch>
+        </p:blipFill>
+        <p:spPr>
+          <a:xfrm>
+            <a:off x="6367954" y="1561338"/>
+            <a:ext cx="4776473" cy="2303946"/>
+          </a:xfrm>
+          <a:prstGeom prst="rect">
+            <a:avLst/>
+          </a:prstGeom>
+        </p:spPr>
+      </p:pic>
     </p:spTree>
   </p:cSld>
   <p:clrMapOvr>
@@ -29847,1380 +30274,6 @@
 </file>
 
 <file path=ppt/slides/slide35.xml><?xml version="1.0" encoding="utf-8"?>
-<p:sld xmlns:a="http://schemas.openxmlformats.org/drawingml/2006/main" xmlns:r="http://schemas.openxmlformats.org/officeDocument/2006/relationships" xmlns:p="http://schemas.openxmlformats.org/presentationml/2006/main">
-  <p:cSld>
-    <p:spTree>
-      <p:nvGrpSpPr>
-        <p:cNvPr id="1" name=""/>
-        <p:cNvGrpSpPr/>
-        <p:nvPr/>
-      </p:nvGrpSpPr>
-      <p:grpSpPr>
-        <a:xfrm>
-          <a:off x="0" y="0"/>
-          <a:ext cx="0" cy="0"/>
-          <a:chOff x="0" y="0"/>
-          <a:chExt cx="0" cy="0"/>
-        </a:xfrm>
-      </p:grpSpPr>
-      <p:sp>
-        <p:nvSpPr>
-          <p:cNvPr id="2" name="Rectangle 1"/>
-          <p:cNvSpPr/>
-          <p:nvPr/>
-        </p:nvSpPr>
-        <p:spPr>
-          <a:xfrm>
-            <a:off x="0" y="0"/>
-            <a:ext cx="12191695" cy="6858000"/>
-          </a:xfrm>
-          <a:prstGeom prst="rect">
-            <a:avLst/>
-          </a:prstGeom>
-          <a:solidFill>
-            <a:srgbClr val="FFFFFF"/>
-          </a:solidFill>
-          <a:ln>
-            <a:noFill/>
-          </a:ln>
-          <a:effectLst/>
-        </p:spPr>
-        <p:style>
-          <a:lnRef idx="1">
-            <a:schemeClr val="accent1"/>
-          </a:lnRef>
-          <a:fillRef idx="3">
-            <a:schemeClr val="accent1"/>
-          </a:fillRef>
-          <a:effectRef idx="2">
-            <a:schemeClr val="accent1"/>
-          </a:effectRef>
-          <a:fontRef idx="minor">
-            <a:schemeClr val="lt1"/>
-          </a:fontRef>
-        </p:style>
-        <p:txBody>
-          <a:bodyPr rtlCol="0" anchor="ctr"/>
-          <a:lstStyle/>
-          <a:p>
-            <a:pPr algn="ctr"/>
-            <a:endParaRPr/>
-          </a:p>
-        </p:txBody>
-      </p:sp>
-      <p:sp>
-        <p:nvSpPr>
-          <p:cNvPr id="3" name="TextBox 2"/>
-          <p:cNvSpPr txBox="1"/>
-          <p:nvPr/>
-        </p:nvSpPr>
-        <p:spPr>
-          <a:xfrm>
-            <a:off x="777240" y="475488"/>
-            <a:ext cx="10637215" cy="237744"/>
-          </a:xfrm>
-          <a:prstGeom prst="rect">
-            <a:avLst/>
-          </a:prstGeom>
-          <a:noFill/>
-        </p:spPr>
-        <p:txBody>
-          <a:bodyPr wrap="square" lIns="0" tIns="0" rIns="0" bIns="0">
-            <a:spAutoFit/>
-          </a:bodyPr>
-          <a:lstStyle/>
-          <a:p>
-            <a:pPr algn="l">
-              <a:lnSpc>
-                <a:spcPct val="122000"/>
-              </a:lnSpc>
-              <a:spcBef>
-                <a:spcPts val="0"/>
-              </a:spcBef>
-              <a:spcAft>
-                <a:spcPts val="0"/>
-              </a:spcAft>
-            </a:pPr>
-            <a:r>
-              <a:rPr sz="1050" b="1">
-                <a:solidFill>
-                  <a:srgbClr val="8C2F39"/>
-                </a:solidFill>
-                <a:latin typeface="Arial"/>
-              </a:rPr>
-              <a:t>PASO 14 · EL COLCHÓN</a:t>
-            </a:r>
-          </a:p>
-        </p:txBody>
-      </p:sp>
-      <p:sp>
-        <p:nvSpPr>
-          <p:cNvPr id="4" name="Rectangle 3"/>
-          <p:cNvSpPr/>
-          <p:nvPr/>
-        </p:nvSpPr>
-        <p:spPr>
-          <a:xfrm>
-            <a:off x="777240" y="768096"/>
-            <a:ext cx="502920" cy="30480"/>
-          </a:xfrm>
-          <a:prstGeom prst="rect">
-            <a:avLst/>
-          </a:prstGeom>
-          <a:solidFill>
-            <a:srgbClr val="8C2F39"/>
-          </a:solidFill>
-          <a:ln>
-            <a:noFill/>
-          </a:ln>
-          <a:effectLst/>
-        </p:spPr>
-        <p:style>
-          <a:lnRef idx="1">
-            <a:schemeClr val="accent1"/>
-          </a:lnRef>
-          <a:fillRef idx="3">
-            <a:schemeClr val="accent1"/>
-          </a:fillRef>
-          <a:effectRef idx="2">
-            <a:schemeClr val="accent1"/>
-          </a:effectRef>
-          <a:fontRef idx="minor">
-            <a:schemeClr val="lt1"/>
-          </a:fontRef>
-        </p:style>
-        <p:txBody>
-          <a:bodyPr rtlCol="0" anchor="ctr"/>
-          <a:lstStyle/>
-          <a:p>
-            <a:pPr algn="ctr"/>
-            <a:endParaRPr/>
-          </a:p>
-        </p:txBody>
-      </p:sp>
-      <p:sp>
-        <p:nvSpPr>
-          <p:cNvPr id="5" name="TextBox 4"/>
-          <p:cNvSpPr txBox="1"/>
-          <p:nvPr/>
-        </p:nvSpPr>
-        <p:spPr>
-          <a:xfrm>
-            <a:off x="777240" y="914400"/>
-            <a:ext cx="10637215" cy="445770"/>
-          </a:xfrm>
-          <a:prstGeom prst="rect">
-            <a:avLst/>
-          </a:prstGeom>
-          <a:noFill/>
-        </p:spPr>
-        <p:txBody>
-          <a:bodyPr wrap="square" lIns="0" tIns="0" rIns="0" bIns="0">
-            <a:spAutoFit/>
-          </a:bodyPr>
-          <a:lstStyle/>
-          <a:p>
-            <a:pPr algn="l">
-              <a:lnSpc>
-                <a:spcPct val="106000"/>
-              </a:lnSpc>
-              <a:spcBef>
-                <a:spcPts val="0"/>
-              </a:spcBef>
-              <a:spcAft>
-                <a:spcPts val="0"/>
-              </a:spcAft>
-            </a:pPr>
-            <a:r>
-              <a:rPr sz="2700" b="1">
-                <a:solidFill>
-                  <a:srgbClr val="17150F"/>
-                </a:solidFill>
-                <a:latin typeface="Arial"/>
-              </a:rPr>
-              <a:t>La respuesta visible a la pregunta del encargo</a:t>
-            </a:r>
-          </a:p>
-        </p:txBody>
-      </p:sp>
-      <p:pic>
-        <p:nvPicPr>
-          <p:cNvPr id="6" name="Picture 5" descr="22_composicion_pedido.png"/>
-          <p:cNvPicPr>
-            <a:picLocks noChangeAspect="1"/>
-          </p:cNvPicPr>
-          <p:nvPr/>
-        </p:nvPicPr>
-        <p:blipFill>
-          <a:blip r:embed="rId2"/>
-          <a:stretch>
-            <a:fillRect/>
-          </a:stretch>
-        </p:blipFill>
-        <p:spPr>
-          <a:xfrm>
-            <a:off x="777240" y="1506474"/>
-            <a:ext cx="5760720" cy="3291840"/>
-          </a:xfrm>
-          <a:prstGeom prst="rect">
-            <a:avLst/>
-          </a:prstGeom>
-        </p:spPr>
-      </p:pic>
-      <p:graphicFrame>
-        <p:nvGraphicFramePr>
-          <p:cNvPr id="7" name="Table 6"/>
-          <p:cNvGraphicFramePr>
-            <a:graphicFrameLocks noGrp="1"/>
-          </p:cNvGraphicFramePr>
-          <p:nvPr/>
-        </p:nvGraphicFramePr>
-        <p:xfrm>
-          <a:off x="6858000" y="1552194"/>
-          <a:ext cx="4556453" cy="2542032"/>
-        </p:xfrm>
-        <a:graphic>
-          <a:graphicData uri="http://schemas.openxmlformats.org/drawingml/2006/table">
-            <a:tbl>
-              <a:tblPr bandRow="1">
-                <a:tableStyleId>{5C22544A-7EE6-4342-B048-85BDC9FD1C3A}</a:tableStyleId>
-              </a:tblPr>
-              <a:tblGrid>
-                <a:gridCol w="1731452">
-                  <a:extLst>
-                    <a:ext uri="{9D8B030D-6E8A-4147-A177-3AD203B41FA5}">
-                      <a16:colId xmlns:a16="http://schemas.microsoft.com/office/drawing/2014/main" val="20000"/>
-                    </a:ext>
-                  </a:extLst>
-                </a:gridCol>
-                <a:gridCol w="1002420">
-                  <a:extLst>
-                    <a:ext uri="{9D8B030D-6E8A-4147-A177-3AD203B41FA5}">
-                      <a16:colId xmlns:a16="http://schemas.microsoft.com/office/drawing/2014/main" val="20001"/>
-                    </a:ext>
-                  </a:extLst>
-                </a:gridCol>
-                <a:gridCol w="820161">
-                  <a:extLst>
-                    <a:ext uri="{9D8B030D-6E8A-4147-A177-3AD203B41FA5}">
-                      <a16:colId xmlns:a16="http://schemas.microsoft.com/office/drawing/2014/main" val="20002"/>
-                    </a:ext>
-                  </a:extLst>
-                </a:gridCol>
-                <a:gridCol w="1002420">
-                  <a:extLst>
-                    <a:ext uri="{9D8B030D-6E8A-4147-A177-3AD203B41FA5}">
-                      <a16:colId xmlns:a16="http://schemas.microsoft.com/office/drawing/2014/main" val="20003"/>
-                    </a:ext>
-                  </a:extLst>
-                </a:gridCol>
-              </a:tblGrid>
-              <a:tr h="347472">
-                <a:tc>
-                  <a:txBody>
-                    <a:bodyPr/>
-                    <a:lstStyle/>
-                    <a:p>
-                      <a:pPr algn="l"/>
-                      <a:r>
-                        <a:rPr sz="1000" b="1">
-                          <a:solidFill>
-                            <a:srgbClr val="8B8478"/>
-                          </a:solidFill>
-                          <a:latin typeface="Arial"/>
-                        </a:rPr>
-                        <a:t>Producto</a:t>
-                      </a:r>
-                    </a:p>
-                  </a:txBody>
-                  <a:tcPr marL="82296" marR="82296" anchor="ctr">
-                    <a:solidFill>
-                      <a:srgbClr val="F4F2ED"/>
-                    </a:solidFill>
-                  </a:tcPr>
-                </a:tc>
-                <a:tc>
-                  <a:txBody>
-                    <a:bodyPr/>
-                    <a:lstStyle/>
-                    <a:p>
-                      <a:pPr algn="r"/>
-                      <a:r>
-                        <a:rPr sz="1000" b="1">
-                          <a:solidFill>
-                            <a:srgbClr val="8B8478"/>
-                          </a:solidFill>
-                          <a:latin typeface="Arial"/>
-                        </a:rPr>
-                        <a:t>Margen</a:t>
-                      </a:r>
-                    </a:p>
-                  </a:txBody>
-                  <a:tcPr marL="82296" marR="82296" anchor="ctr">
-                    <a:solidFill>
-                      <a:srgbClr val="F4F2ED"/>
-                    </a:solidFill>
-                  </a:tcPr>
-                </a:tc>
-                <a:tc>
-                  <a:txBody>
-                    <a:bodyPr/>
-                    <a:lstStyle/>
-                    <a:p>
-                      <a:pPr algn="r"/>
-                      <a:r>
-                        <a:rPr sz="1000" b="1">
-                          <a:solidFill>
-                            <a:srgbClr val="8B8478"/>
-                          </a:solidFill>
-                          <a:latin typeface="Arial"/>
-                        </a:rPr>
-                        <a:t>Nivel</a:t>
-                      </a:r>
-                    </a:p>
-                  </a:txBody>
-                  <a:tcPr marL="82296" marR="82296" anchor="ctr">
-                    <a:solidFill>
-                      <a:srgbClr val="F4F2ED"/>
-                    </a:solidFill>
-                  </a:tcPr>
-                </a:tc>
-                <a:tc>
-                  <a:txBody>
-                    <a:bodyPr/>
-                    <a:lstStyle/>
-                    <a:p>
-                      <a:pPr algn="r"/>
-                      <a:r>
-                        <a:rPr sz="1000" b="1">
-                          <a:solidFill>
-                            <a:srgbClr val="8B8478"/>
-                          </a:solidFill>
-                          <a:latin typeface="Arial"/>
-                        </a:rPr>
-                        <a:t>Colchón</a:t>
-                      </a:r>
-                    </a:p>
-                  </a:txBody>
-                  <a:tcPr marL="82296" marR="82296" anchor="ctr">
-                    <a:solidFill>
-                      <a:srgbClr val="F4F2ED"/>
-                    </a:solidFill>
-                  </a:tcPr>
-                </a:tc>
-                <a:extLst>
-                  <a:ext uri="{0D108BD9-81ED-4DB2-BD59-A6C34878D82A}">
-                    <a16:rowId xmlns:a16="http://schemas.microsoft.com/office/drawing/2014/main" val="10000"/>
-                  </a:ext>
-                </a:extLst>
-              </a:tr>
-              <a:tr h="274320">
-                <a:tc>
-                  <a:txBody>
-                    <a:bodyPr/>
-                    <a:lstStyle/>
-                    <a:p>
-                      <a:pPr algn="l"/>
-                      <a:r>
-                        <a:rPr sz="1150" b="0">
-                          <a:solidFill>
-                            <a:srgbClr val="17150F"/>
-                          </a:solidFill>
-                          <a:latin typeface="Arial"/>
-                        </a:rPr>
-                        <a:t>Tinto</a:t>
-                      </a:r>
-                    </a:p>
-                  </a:txBody>
-                  <a:tcPr marL="82296" marR="82296" anchor="ctr">
-                    <a:solidFill>
-                      <a:srgbClr val="FFFFFF"/>
-                    </a:solidFill>
-                  </a:tcPr>
-                </a:tc>
-                <a:tc>
-                  <a:txBody>
-                    <a:bodyPr/>
-                    <a:lstStyle/>
-                    <a:p>
-                      <a:pPr algn="r"/>
-                      <a:r>
-                        <a:rPr sz="1150" b="0">
-                          <a:solidFill>
-                            <a:srgbClr val="555045"/>
-                          </a:solidFill>
-                          <a:latin typeface="Arial"/>
-                        </a:rPr>
-                        <a:t>68,0 %</a:t>
-                      </a:r>
-                    </a:p>
-                  </a:txBody>
-                  <a:tcPr marL="82296" marR="82296" anchor="ctr">
-                    <a:solidFill>
-                      <a:srgbClr val="FFFFFF"/>
-                    </a:solidFill>
-                  </a:tcPr>
-                </a:tc>
-                <a:tc>
-                  <a:txBody>
-                    <a:bodyPr/>
-                    <a:lstStyle/>
-                    <a:p>
-                      <a:pPr algn="r"/>
-                      <a:r>
-                        <a:rPr sz="1150" b="0">
-                          <a:solidFill>
-                            <a:srgbClr val="555045"/>
-                          </a:solidFill>
-                          <a:latin typeface="Arial"/>
-                        </a:rPr>
-                        <a:t>0,68</a:t>
-                      </a:r>
-                    </a:p>
-                  </a:txBody>
-                  <a:tcPr marL="82296" marR="82296" anchor="ctr">
-                    <a:solidFill>
-                      <a:srgbClr val="FFFFFF"/>
-                    </a:solidFill>
-                  </a:tcPr>
-                </a:tc>
-                <a:tc>
-                  <a:txBody>
-                    <a:bodyPr/>
-                    <a:lstStyle/>
-                    <a:p>
-                      <a:pPr algn="r"/>
-                      <a:r>
-                        <a:rPr sz="1150" b="0">
-                          <a:solidFill>
-                            <a:srgbClr val="555045"/>
-                          </a:solidFill>
-                          <a:latin typeface="Arial"/>
-                        </a:rPr>
-                        <a:t>6,3 %</a:t>
-                      </a:r>
-                    </a:p>
-                  </a:txBody>
-                  <a:tcPr marL="82296" marR="82296" anchor="ctr">
-                    <a:solidFill>
-                      <a:srgbClr val="FFFFFF"/>
-                    </a:solidFill>
-                  </a:tcPr>
-                </a:tc>
-                <a:extLst>
-                  <a:ext uri="{0D108BD9-81ED-4DB2-BD59-A6C34878D82A}">
-                    <a16:rowId xmlns:a16="http://schemas.microsoft.com/office/drawing/2014/main" val="10001"/>
-                  </a:ext>
-                </a:extLst>
-              </a:tr>
-              <a:tr h="274320">
-                <a:tc>
-                  <a:txBody>
-                    <a:bodyPr/>
-                    <a:lstStyle/>
-                    <a:p>
-                      <a:pPr algn="l"/>
-                      <a:r>
-                        <a:rPr sz="1150" b="0">
-                          <a:solidFill>
-                            <a:srgbClr val="17150F"/>
-                          </a:solidFill>
-                          <a:latin typeface="Arial"/>
-                        </a:rPr>
-                        <a:t>Buñuelo</a:t>
-                      </a:r>
-                    </a:p>
-                  </a:txBody>
-                  <a:tcPr marL="82296" marR="82296" anchor="ctr">
-                    <a:solidFill>
-                      <a:srgbClr val="FFFFFF"/>
-                    </a:solidFill>
-                  </a:tcPr>
-                </a:tc>
-                <a:tc>
-                  <a:txBody>
-                    <a:bodyPr/>
-                    <a:lstStyle/>
-                    <a:p>
-                      <a:pPr algn="r"/>
-                      <a:r>
-                        <a:rPr sz="1150" b="0">
-                          <a:solidFill>
-                            <a:srgbClr val="555045"/>
-                          </a:solidFill>
-                          <a:latin typeface="Arial"/>
-                        </a:rPr>
-                        <a:t>68,0 %</a:t>
-                      </a:r>
-                    </a:p>
-                  </a:txBody>
-                  <a:tcPr marL="82296" marR="82296" anchor="ctr">
-                    <a:solidFill>
-                      <a:srgbClr val="FFFFFF"/>
-                    </a:solidFill>
-                  </a:tcPr>
-                </a:tc>
-                <a:tc>
-                  <a:txBody>
-                    <a:bodyPr/>
-                    <a:lstStyle/>
-                    <a:p>
-                      <a:pPr algn="r"/>
-                      <a:r>
-                        <a:rPr sz="1150" b="0">
-                          <a:solidFill>
-                            <a:srgbClr val="555045"/>
-                          </a:solidFill>
-                          <a:latin typeface="Arial"/>
-                        </a:rPr>
-                        <a:t>0,67</a:t>
-                      </a:r>
-                    </a:p>
-                  </a:txBody>
-                  <a:tcPr marL="82296" marR="82296" anchor="ctr">
-                    <a:solidFill>
-                      <a:srgbClr val="FFFFFF"/>
-                    </a:solidFill>
-                  </a:tcPr>
-                </a:tc>
-                <a:tc>
-                  <a:txBody>
-                    <a:bodyPr/>
-                    <a:lstStyle/>
-                    <a:p>
-                      <a:pPr algn="r"/>
-                      <a:r>
-                        <a:rPr sz="1150" b="0">
-                          <a:solidFill>
-                            <a:srgbClr val="555045"/>
-                          </a:solidFill>
-                          <a:latin typeface="Arial"/>
-                        </a:rPr>
-                        <a:t>5,5 %</a:t>
-                      </a:r>
-                    </a:p>
-                  </a:txBody>
-                  <a:tcPr marL="82296" marR="82296" anchor="ctr">
-                    <a:solidFill>
-                      <a:srgbClr val="FFFFFF"/>
-                    </a:solidFill>
-                  </a:tcPr>
-                </a:tc>
-                <a:extLst>
-                  <a:ext uri="{0D108BD9-81ED-4DB2-BD59-A6C34878D82A}">
-                    <a16:rowId xmlns:a16="http://schemas.microsoft.com/office/drawing/2014/main" val="10002"/>
-                  </a:ext>
-                </a:extLst>
-              </a:tr>
-              <a:tr h="274320">
-                <a:tc>
-                  <a:txBody>
-                    <a:bodyPr/>
-                    <a:lstStyle/>
-                    <a:p>
-                      <a:pPr algn="l"/>
-                      <a:r>
-                        <a:rPr sz="1150" b="0">
-                          <a:solidFill>
-                            <a:srgbClr val="17150F"/>
-                          </a:solidFill>
-                          <a:latin typeface="Arial"/>
-                        </a:rPr>
-                        <a:t>Cappuccino</a:t>
-                      </a:r>
-                    </a:p>
-                  </a:txBody>
-                  <a:tcPr marL="82296" marR="82296" anchor="ctr">
-                    <a:solidFill>
-                      <a:srgbClr val="FFFFFF"/>
-                    </a:solidFill>
-                  </a:tcPr>
-                </a:tc>
-                <a:tc>
-                  <a:txBody>
-                    <a:bodyPr/>
-                    <a:lstStyle/>
-                    <a:p>
-                      <a:pPr algn="r"/>
-                      <a:r>
-                        <a:rPr sz="1150" b="0">
-                          <a:solidFill>
-                            <a:srgbClr val="555045"/>
-                          </a:solidFill>
-                          <a:latin typeface="Arial"/>
-                        </a:rPr>
-                        <a:t>66,7 %</a:t>
-                      </a:r>
-                    </a:p>
-                  </a:txBody>
-                  <a:tcPr marL="82296" marR="82296" anchor="ctr">
-                    <a:solidFill>
-                      <a:srgbClr val="FFFFFF"/>
-                    </a:solidFill>
-                  </a:tcPr>
-                </a:tc>
-                <a:tc>
-                  <a:txBody>
-                    <a:bodyPr/>
-                    <a:lstStyle/>
-                    <a:p>
-                      <a:pPr algn="r"/>
-                      <a:r>
-                        <a:rPr sz="1150" b="0">
-                          <a:solidFill>
-                            <a:srgbClr val="555045"/>
-                          </a:solidFill>
-                          <a:latin typeface="Arial"/>
-                        </a:rPr>
-                        <a:t>0,66</a:t>
-                      </a:r>
-                    </a:p>
-                  </a:txBody>
-                  <a:tcPr marL="82296" marR="82296" anchor="ctr">
-                    <a:solidFill>
-                      <a:srgbClr val="FFFFFF"/>
-                    </a:solidFill>
-                  </a:tcPr>
-                </a:tc>
-                <a:tc>
-                  <a:txBody>
-                    <a:bodyPr/>
-                    <a:lstStyle/>
-                    <a:p>
-                      <a:pPr algn="r"/>
-                      <a:r>
-                        <a:rPr sz="1150" b="0">
-                          <a:solidFill>
-                            <a:srgbClr val="555045"/>
-                          </a:solidFill>
-                          <a:latin typeface="Arial"/>
-                        </a:rPr>
-                        <a:t>5,5 %</a:t>
-                      </a:r>
-                    </a:p>
-                  </a:txBody>
-                  <a:tcPr marL="82296" marR="82296" anchor="ctr">
-                    <a:solidFill>
-                      <a:srgbClr val="FFFFFF"/>
-                    </a:solidFill>
-                  </a:tcPr>
-                </a:tc>
-                <a:extLst>
-                  <a:ext uri="{0D108BD9-81ED-4DB2-BD59-A6C34878D82A}">
-                    <a16:rowId xmlns:a16="http://schemas.microsoft.com/office/drawing/2014/main" val="10003"/>
-                  </a:ext>
-                </a:extLst>
-              </a:tr>
-              <a:tr h="274320">
-                <a:tc>
-                  <a:txBody>
-                    <a:bodyPr/>
-                    <a:lstStyle/>
-                    <a:p>
-                      <a:pPr algn="l"/>
-                      <a:r>
-                        <a:rPr sz="1150" b="0">
-                          <a:solidFill>
-                            <a:srgbClr val="17150F"/>
-                          </a:solidFill>
-                          <a:latin typeface="Arial"/>
-                        </a:rPr>
-                        <a:t>Café con Leche</a:t>
-                      </a:r>
-                    </a:p>
-                  </a:txBody>
-                  <a:tcPr marL="82296" marR="82296" anchor="ctr">
-                    <a:solidFill>
-                      <a:srgbClr val="FFFFFF"/>
-                    </a:solidFill>
-                  </a:tcPr>
-                </a:tc>
-                <a:tc>
-                  <a:txBody>
-                    <a:bodyPr/>
-                    <a:lstStyle/>
-                    <a:p>
-                      <a:pPr algn="r"/>
-                      <a:r>
-                        <a:rPr sz="1150" b="0">
-                          <a:solidFill>
-                            <a:srgbClr val="555045"/>
-                          </a:solidFill>
-                          <a:latin typeface="Arial"/>
-                        </a:rPr>
-                        <a:t>65,7 %</a:t>
-                      </a:r>
-                    </a:p>
-                  </a:txBody>
-                  <a:tcPr marL="82296" marR="82296" anchor="ctr">
-                    <a:solidFill>
-                      <a:srgbClr val="FFFFFF"/>
-                    </a:solidFill>
-                  </a:tcPr>
-                </a:tc>
-                <a:tc>
-                  <a:txBody>
-                    <a:bodyPr/>
-                    <a:lstStyle/>
-                    <a:p>
-                      <a:pPr algn="r"/>
-                      <a:r>
-                        <a:rPr sz="1150" b="0">
-                          <a:solidFill>
-                            <a:srgbClr val="555045"/>
-                          </a:solidFill>
-                          <a:latin typeface="Arial"/>
-                        </a:rPr>
-                        <a:t>0,65</a:t>
-                      </a:r>
-                    </a:p>
-                  </a:txBody>
-                  <a:tcPr marL="82296" marR="82296" anchor="ctr">
-                    <a:solidFill>
-                      <a:srgbClr val="FFFFFF"/>
-                    </a:solidFill>
-                  </a:tcPr>
-                </a:tc>
-                <a:tc>
-                  <a:txBody>
-                    <a:bodyPr/>
-                    <a:lstStyle/>
-                    <a:p>
-                      <a:pPr algn="r"/>
-                      <a:r>
-                        <a:rPr sz="1150" b="0">
-                          <a:solidFill>
-                            <a:srgbClr val="555045"/>
-                          </a:solidFill>
-                          <a:latin typeface="Arial"/>
-                        </a:rPr>
-                        <a:t>6,1 %</a:t>
-                      </a:r>
-                    </a:p>
-                  </a:txBody>
-                  <a:tcPr marL="82296" marR="82296" anchor="ctr">
-                    <a:solidFill>
-                      <a:srgbClr val="FFFFFF"/>
-                    </a:solidFill>
-                  </a:tcPr>
-                </a:tc>
-                <a:extLst>
-                  <a:ext uri="{0D108BD9-81ED-4DB2-BD59-A6C34878D82A}">
-                    <a16:rowId xmlns:a16="http://schemas.microsoft.com/office/drawing/2014/main" val="10004"/>
-                  </a:ext>
-                </a:extLst>
-              </a:tr>
-              <a:tr h="274320">
-                <a:tc>
-                  <a:txBody>
-                    <a:bodyPr/>
-                    <a:lstStyle/>
-                    <a:p>
-                      <a:pPr algn="l"/>
-                      <a:r>
-                        <a:rPr sz="1150" b="0">
-                          <a:solidFill>
-                            <a:srgbClr val="17150F"/>
-                          </a:solidFill>
-                          <a:latin typeface="Arial"/>
-                        </a:rPr>
-                        <a:t>Croissant</a:t>
-                      </a:r>
-                    </a:p>
-                  </a:txBody>
-                  <a:tcPr marL="82296" marR="82296" anchor="ctr">
-                    <a:solidFill>
-                      <a:srgbClr val="FFFFFF"/>
-                    </a:solidFill>
-                  </a:tcPr>
-                </a:tc>
-                <a:tc>
-                  <a:txBody>
-                    <a:bodyPr/>
-                    <a:lstStyle/>
-                    <a:p>
-                      <a:pPr algn="r"/>
-                      <a:r>
-                        <a:rPr sz="1150" b="0">
-                          <a:solidFill>
-                            <a:srgbClr val="555045"/>
-                          </a:solidFill>
-                          <a:latin typeface="Arial"/>
-                        </a:rPr>
-                        <a:t>65,7 %</a:t>
-                      </a:r>
-                    </a:p>
-                  </a:txBody>
-                  <a:tcPr marL="82296" marR="82296" anchor="ctr">
-                    <a:solidFill>
-                      <a:srgbClr val="FFFFFF"/>
-                    </a:solidFill>
-                  </a:tcPr>
-                </a:tc>
-                <a:tc>
-                  <a:txBody>
-                    <a:bodyPr/>
-                    <a:lstStyle/>
-                    <a:p>
-                      <a:pPr algn="r"/>
-                      <a:r>
-                        <a:rPr sz="1150" b="0">
-                          <a:solidFill>
-                            <a:srgbClr val="555045"/>
-                          </a:solidFill>
-                          <a:latin typeface="Arial"/>
-                        </a:rPr>
-                        <a:t>0,65</a:t>
-                      </a:r>
-                    </a:p>
-                  </a:txBody>
-                  <a:tcPr marL="82296" marR="82296" anchor="ctr">
-                    <a:solidFill>
-                      <a:srgbClr val="FFFFFF"/>
-                    </a:solidFill>
-                  </a:tcPr>
-                </a:tc>
-                <a:tc>
-                  <a:txBody>
-                    <a:bodyPr/>
-                    <a:lstStyle/>
-                    <a:p>
-                      <a:pPr algn="r"/>
-                      <a:r>
-                        <a:rPr sz="1150" b="0">
-                          <a:solidFill>
-                            <a:srgbClr val="555045"/>
-                          </a:solidFill>
-                          <a:latin typeface="Arial"/>
-                        </a:rPr>
-                        <a:t>5,6 %</a:t>
-                      </a:r>
-                    </a:p>
-                  </a:txBody>
-                  <a:tcPr marL="82296" marR="82296" anchor="ctr">
-                    <a:solidFill>
-                      <a:srgbClr val="FFFFFF"/>
-                    </a:solidFill>
-                  </a:tcPr>
-                </a:tc>
-                <a:extLst>
-                  <a:ext uri="{0D108BD9-81ED-4DB2-BD59-A6C34878D82A}">
-                    <a16:rowId xmlns:a16="http://schemas.microsoft.com/office/drawing/2014/main" val="10005"/>
-                  </a:ext>
-                </a:extLst>
-              </a:tr>
-              <a:tr h="274320">
-                <a:tc>
-                  <a:txBody>
-                    <a:bodyPr/>
-                    <a:lstStyle/>
-                    <a:p>
-                      <a:pPr algn="l"/>
-                      <a:r>
-                        <a:rPr sz="1150" b="0">
-                          <a:solidFill>
-                            <a:srgbClr val="17150F"/>
-                          </a:solidFill>
-                          <a:latin typeface="Arial"/>
-                        </a:rPr>
-                        <a:t>Pan de Bono</a:t>
-                      </a:r>
-                    </a:p>
-                  </a:txBody>
-                  <a:tcPr marL="82296" marR="82296" anchor="ctr">
-                    <a:solidFill>
-                      <a:srgbClr val="FFFFFF"/>
-                    </a:solidFill>
-                  </a:tcPr>
-                </a:tc>
-                <a:tc>
-                  <a:txBody>
-                    <a:bodyPr/>
-                    <a:lstStyle/>
-                    <a:p>
-                      <a:pPr algn="r"/>
-                      <a:r>
-                        <a:rPr sz="1150" b="0">
-                          <a:solidFill>
-                            <a:srgbClr val="555045"/>
-                          </a:solidFill>
-                          <a:latin typeface="Arial"/>
-                        </a:rPr>
-                        <a:t>64,3 %</a:t>
-                      </a:r>
-                    </a:p>
-                  </a:txBody>
-                  <a:tcPr marL="82296" marR="82296" anchor="ctr">
-                    <a:solidFill>
-                      <a:srgbClr val="FFFFFF"/>
-                    </a:solidFill>
-                  </a:tcPr>
-                </a:tc>
-                <a:tc>
-                  <a:txBody>
-                    <a:bodyPr/>
-                    <a:lstStyle/>
-                    <a:p>
-                      <a:pPr algn="r"/>
-                      <a:r>
-                        <a:rPr sz="1150" b="0">
-                          <a:solidFill>
-                            <a:srgbClr val="555045"/>
-                          </a:solidFill>
-                          <a:latin typeface="Arial"/>
-                        </a:rPr>
-                        <a:t>0,64</a:t>
-                      </a:r>
-                    </a:p>
-                  </a:txBody>
-                  <a:tcPr marL="82296" marR="82296" anchor="ctr">
-                    <a:solidFill>
-                      <a:srgbClr val="FFFFFF"/>
-                    </a:solidFill>
-                  </a:tcPr>
-                </a:tc>
-                <a:tc>
-                  <a:txBody>
-                    <a:bodyPr/>
-                    <a:lstStyle/>
-                    <a:p>
-                      <a:pPr algn="r"/>
-                      <a:r>
-                        <a:rPr sz="1150" b="0">
-                          <a:solidFill>
-                            <a:srgbClr val="555045"/>
-                          </a:solidFill>
-                          <a:latin typeface="Arial"/>
-                        </a:rPr>
-                        <a:t>4,6 %</a:t>
-                      </a:r>
-                    </a:p>
-                  </a:txBody>
-                  <a:tcPr marL="82296" marR="82296" anchor="ctr">
-                    <a:solidFill>
-                      <a:srgbClr val="FFFFFF"/>
-                    </a:solidFill>
-                  </a:tcPr>
-                </a:tc>
-                <a:extLst>
-                  <a:ext uri="{0D108BD9-81ED-4DB2-BD59-A6C34878D82A}">
-                    <a16:rowId xmlns:a16="http://schemas.microsoft.com/office/drawing/2014/main" val="10006"/>
-                  </a:ext>
-                </a:extLst>
-              </a:tr>
-              <a:tr h="274320">
-                <a:tc>
-                  <a:txBody>
-                    <a:bodyPr/>
-                    <a:lstStyle/>
-                    <a:p>
-                      <a:pPr algn="l"/>
-                      <a:r>
-                        <a:rPr sz="1150" b="0">
-                          <a:solidFill>
-                            <a:srgbClr val="17150F"/>
-                          </a:solidFill>
-                          <a:latin typeface="Arial"/>
-                        </a:rPr>
-                        <a:t>Jugo de Naranja</a:t>
-                      </a:r>
-                    </a:p>
-                  </a:txBody>
-                  <a:tcPr marL="82296" marR="82296" anchor="ctr">
-                    <a:solidFill>
-                      <a:srgbClr val="FFFFFF"/>
-                    </a:solidFill>
-                  </a:tcPr>
-                </a:tc>
-                <a:tc>
-                  <a:txBody>
-                    <a:bodyPr/>
-                    <a:lstStyle/>
-                    <a:p>
-                      <a:pPr algn="r"/>
-                      <a:r>
-                        <a:rPr sz="1150" b="0">
-                          <a:solidFill>
-                            <a:srgbClr val="555045"/>
-                          </a:solidFill>
-                          <a:latin typeface="Arial"/>
-                        </a:rPr>
-                        <a:t>60,0 %</a:t>
-                      </a:r>
-                    </a:p>
-                  </a:txBody>
-                  <a:tcPr marL="82296" marR="82296" anchor="ctr">
-                    <a:solidFill>
-                      <a:srgbClr val="FFFFFF"/>
-                    </a:solidFill>
-                  </a:tcPr>
-                </a:tc>
-                <a:tc>
-                  <a:txBody>
-                    <a:bodyPr/>
-                    <a:lstStyle/>
-                    <a:p>
-                      <a:pPr algn="r"/>
-                      <a:r>
-                        <a:rPr sz="1150" b="0">
-                          <a:solidFill>
-                            <a:srgbClr val="555045"/>
-                          </a:solidFill>
-                          <a:latin typeface="Arial"/>
-                        </a:rPr>
-                        <a:t>0,59</a:t>
-                      </a:r>
-                    </a:p>
-                  </a:txBody>
-                  <a:tcPr marL="82296" marR="82296" anchor="ctr">
-                    <a:solidFill>
-                      <a:srgbClr val="FFFFFF"/>
-                    </a:solidFill>
-                  </a:tcPr>
-                </a:tc>
-                <a:tc>
-                  <a:txBody>
-                    <a:bodyPr/>
-                    <a:lstStyle/>
-                    <a:p>
-                      <a:pPr algn="r"/>
-                      <a:r>
-                        <a:rPr sz="1150" b="0">
-                          <a:solidFill>
-                            <a:srgbClr val="555045"/>
-                          </a:solidFill>
-                          <a:latin typeface="Arial"/>
-                        </a:rPr>
-                        <a:t>3,6 %</a:t>
-                      </a:r>
-                    </a:p>
-                  </a:txBody>
-                  <a:tcPr marL="82296" marR="82296" anchor="ctr">
-                    <a:solidFill>
-                      <a:srgbClr val="FFFFFF"/>
-                    </a:solidFill>
-                  </a:tcPr>
-                </a:tc>
-                <a:extLst>
-                  <a:ext uri="{0D108BD9-81ED-4DB2-BD59-A6C34878D82A}">
-                    <a16:rowId xmlns:a16="http://schemas.microsoft.com/office/drawing/2014/main" val="10007"/>
-                  </a:ext>
-                </a:extLst>
-              </a:tr>
-              <a:tr h="274320">
-                <a:tc>
-                  <a:txBody>
-                    <a:bodyPr/>
-                    <a:lstStyle/>
-                    <a:p>
-                      <a:pPr algn="l"/>
-                      <a:r>
-                        <a:rPr sz="1150" b="0">
-                          <a:solidFill>
-                            <a:srgbClr val="17150F"/>
-                          </a:solidFill>
-                          <a:latin typeface="Arial"/>
-                        </a:rPr>
-                        <a:t>Pastel de Pollo</a:t>
-                      </a:r>
-                    </a:p>
-                  </a:txBody>
-                  <a:tcPr marL="82296" marR="82296" anchor="ctr">
-                    <a:solidFill>
-                      <a:srgbClr val="FFFFFF"/>
-                    </a:solidFill>
-                  </a:tcPr>
-                </a:tc>
-                <a:tc>
-                  <a:txBody>
-                    <a:bodyPr/>
-                    <a:lstStyle/>
-                    <a:p>
-                      <a:pPr algn="r"/>
-                      <a:r>
-                        <a:rPr sz="1150" b="0">
-                          <a:solidFill>
-                            <a:srgbClr val="555045"/>
-                          </a:solidFill>
-                          <a:latin typeface="Arial"/>
-                        </a:rPr>
-                        <a:t>57,1 %</a:t>
-                      </a:r>
-                    </a:p>
-                  </a:txBody>
-                  <a:tcPr marL="82296" marR="82296" anchor="ctr">
-                    <a:solidFill>
-                      <a:srgbClr val="FFFFFF"/>
-                    </a:solidFill>
-                  </a:tcPr>
-                </a:tc>
-                <a:tc>
-                  <a:txBody>
-                    <a:bodyPr/>
-                    <a:lstStyle/>
-                    <a:p>
-                      <a:pPr algn="r"/>
-                      <a:r>
-                        <a:rPr sz="1150" b="0">
-                          <a:solidFill>
-                            <a:srgbClr val="555045"/>
-                          </a:solidFill>
-                          <a:latin typeface="Arial"/>
-                        </a:rPr>
-                        <a:t>0,57</a:t>
-                      </a:r>
-                    </a:p>
-                  </a:txBody>
-                  <a:tcPr marL="82296" marR="82296" anchor="ctr">
-                    <a:solidFill>
-                      <a:srgbClr val="FFFFFF"/>
-                    </a:solidFill>
-                  </a:tcPr>
-                </a:tc>
-                <a:tc>
-                  <a:txBody>
-                    <a:bodyPr/>
-                    <a:lstStyle/>
-                    <a:p>
-                      <a:pPr algn="r"/>
-                      <a:r>
-                        <a:rPr sz="1150" b="0">
-                          <a:solidFill>
-                            <a:srgbClr val="555045"/>
-                          </a:solidFill>
-                          <a:latin typeface="Arial"/>
-                        </a:rPr>
-                        <a:t>2,7 %</a:t>
-                      </a:r>
-                    </a:p>
-                  </a:txBody>
-                  <a:tcPr marL="82296" marR="82296" anchor="ctr">
-                    <a:solidFill>
-                      <a:srgbClr val="FFFFFF"/>
-                    </a:solidFill>
-                  </a:tcPr>
-                </a:tc>
-                <a:extLst>
-                  <a:ext uri="{0D108BD9-81ED-4DB2-BD59-A6C34878D82A}">
-                    <a16:rowId xmlns:a16="http://schemas.microsoft.com/office/drawing/2014/main" val="10008"/>
-                  </a:ext>
-                </a:extLst>
-              </a:tr>
-            </a:tbl>
-          </a:graphicData>
-        </a:graphic>
-      </p:graphicFrame>
-      <p:sp>
-        <p:nvSpPr>
-          <p:cNvPr id="8" name="TextBox 7"/>
-          <p:cNvSpPr txBox="1"/>
-          <p:nvPr/>
-        </p:nvSpPr>
-        <p:spPr>
-          <a:xfrm>
-            <a:off x="6858000" y="4249674"/>
-            <a:ext cx="4556455" cy="1828800"/>
-          </a:xfrm>
-          <a:prstGeom prst="rect">
-            <a:avLst/>
-          </a:prstGeom>
-          <a:noFill/>
-        </p:spPr>
-        <p:txBody>
-          <a:bodyPr wrap="square" lIns="0" tIns="0" rIns="0" bIns="0">
-            <a:spAutoFit/>
-          </a:bodyPr>
-          <a:lstStyle/>
-          <a:p>
-            <a:pPr algn="l">
-              <a:lnSpc>
-                <a:spcPct val="128000"/>
-              </a:lnSpc>
-              <a:spcBef>
-                <a:spcPts val="0"/>
-              </a:spcBef>
-              <a:spcAft>
-                <a:spcPts val="1000"/>
-              </a:spcAft>
-            </a:pPr>
-            <a:r>
-              <a:rPr sz="1250" b="0">
-                <a:solidFill>
-                  <a:srgbClr val="555045"/>
-                </a:solidFill>
-                <a:latin typeface="Arial"/>
-              </a:rPr>
-              <a:t>El colchón es lo que se pide por encima de lo esperado. El producto con más margen se protege más del doble que el de menos margen, y nadie lo decidió a mano.</a:t>
-            </a:r>
-          </a:p>
-          <a:p>
-            <a:pPr algn="l">
-              <a:lnSpc>
-                <a:spcPct val="128000"/>
-              </a:lnSpc>
-              <a:spcBef>
-                <a:spcPts val="0"/>
-              </a:spcBef>
-              <a:spcAft>
-                <a:spcPts val="0"/>
-              </a:spcAft>
-            </a:pPr>
-            <a:r>
-              <a:rPr sz="1250" b="1">
-                <a:solidFill>
-                  <a:srgbClr val="17150F"/>
-                </a:solidFill>
-                <a:latin typeface="Arial"/>
-              </a:rPr>
-              <a:t>Al Pastel de Pollo pasarse le duele casi tanto como quedarse corto: margen bajo y almacenaje caro. Al Tinto le compensa arriesgar.</a:t>
-            </a:r>
-          </a:p>
-        </p:txBody>
-      </p:sp>
-      <p:sp>
-        <p:nvSpPr>
-          <p:cNvPr id="9" name="Rectangle 8"/>
-          <p:cNvSpPr/>
-          <p:nvPr/>
-        </p:nvSpPr>
-        <p:spPr>
-          <a:xfrm>
-            <a:off x="777240" y="6327648"/>
-            <a:ext cx="10637215" cy="9525"/>
-          </a:xfrm>
-          <a:prstGeom prst="rect">
-            <a:avLst/>
-          </a:prstGeom>
-          <a:solidFill>
-            <a:srgbClr val="DCD8CF"/>
-          </a:solidFill>
-          <a:ln>
-            <a:noFill/>
-          </a:ln>
-          <a:effectLst/>
-        </p:spPr>
-        <p:style>
-          <a:lnRef idx="1">
-            <a:schemeClr val="accent1"/>
-          </a:lnRef>
-          <a:fillRef idx="3">
-            <a:schemeClr val="accent1"/>
-          </a:fillRef>
-          <a:effectRef idx="2">
-            <a:schemeClr val="accent1"/>
-          </a:effectRef>
-          <a:fontRef idx="minor">
-            <a:schemeClr val="lt1"/>
-          </a:fontRef>
-        </p:style>
-        <p:txBody>
-          <a:bodyPr rtlCol="0" anchor="ctr"/>
-          <a:lstStyle/>
-          <a:p>
-            <a:pPr algn="ctr"/>
-            <a:endParaRPr/>
-          </a:p>
-        </p:txBody>
-      </p:sp>
-      <p:sp>
-        <p:nvSpPr>
-          <p:cNvPr id="10" name="TextBox 9"/>
-          <p:cNvSpPr txBox="1"/>
-          <p:nvPr/>
-        </p:nvSpPr>
-        <p:spPr>
-          <a:xfrm>
-            <a:off x="777240" y="6428232"/>
-            <a:ext cx="8686800" cy="274320"/>
-          </a:xfrm>
-          <a:prstGeom prst="rect">
-            <a:avLst/>
-          </a:prstGeom>
-          <a:noFill/>
-        </p:spPr>
-        <p:txBody>
-          <a:bodyPr wrap="square" lIns="0" tIns="0" rIns="0" bIns="0">
-            <a:spAutoFit/>
-          </a:bodyPr>
-          <a:lstStyle/>
-          <a:p>
-            <a:pPr algn="l">
-              <a:lnSpc>
-                <a:spcPct val="122000"/>
-              </a:lnSpc>
-              <a:spcBef>
-                <a:spcPts val="0"/>
-              </a:spcBef>
-              <a:spcAft>
-                <a:spcPts val="0"/>
-              </a:spcAft>
-            </a:pPr>
-            <a:r>
-              <a:rPr sz="950" b="0">
-                <a:solidFill>
-                  <a:srgbClr val="8B8478"/>
-                </a:solidFill>
-                <a:latin typeface="Arial"/>
-              </a:rPr>
-              <a:t>Paso 14 · Optimizador del pedido</a:t>
-            </a:r>
-          </a:p>
-        </p:txBody>
-      </p:sp>
-      <p:sp>
-        <p:nvSpPr>
-          <p:cNvPr id="11" name="TextBox 10"/>
-          <p:cNvSpPr txBox="1"/>
-          <p:nvPr/>
-        </p:nvSpPr>
-        <p:spPr>
-          <a:xfrm>
-            <a:off x="10500055" y="6428232"/>
-            <a:ext cx="914400" cy="274320"/>
-          </a:xfrm>
-          <a:prstGeom prst="rect">
-            <a:avLst/>
-          </a:prstGeom>
-          <a:noFill/>
-        </p:spPr>
-        <p:txBody>
-          <a:bodyPr wrap="square" lIns="0" tIns="0" rIns="0" bIns="0">
-            <a:spAutoFit/>
-          </a:bodyPr>
-          <a:lstStyle/>
-          <a:p>
-            <a:pPr algn="r">
-              <a:lnSpc>
-                <a:spcPct val="122000"/>
-              </a:lnSpc>
-              <a:spcBef>
-                <a:spcPts val="0"/>
-              </a:spcBef>
-              <a:spcAft>
-                <a:spcPts val="0"/>
-              </a:spcAft>
-            </a:pPr>
-            <a:r>
-              <a:rPr sz="950" b="0">
-                <a:solidFill>
-                  <a:srgbClr val="8B8478"/>
-                </a:solidFill>
-                <a:latin typeface="Arial"/>
-              </a:rPr>
-              <a:t>40</a:t>
-            </a:r>
-          </a:p>
-        </p:txBody>
-      </p:sp>
-    </p:spTree>
-  </p:cSld>
-  <p:clrMapOvr>
-    <a:masterClrMapping/>
-  </p:clrMapOvr>
-</p:sld>
-</file>
-
-<file path=ppt/slides/slide36.xml><?xml version="1.0" encoding="utf-8"?>
 <p:sld xmlns:a="http://schemas.openxmlformats.org/drawingml/2006/main" xmlns:r="http://schemas.openxmlformats.org/officeDocument/2006/relationships" xmlns:p="http://schemas.openxmlformats.org/presentationml/2006/main">
   <p:cSld>
     <p:spTree>
@@ -32077,7 +31130,7 @@
 </p:sld>
 </file>
 
-<file path=ppt/slides/slide37.xml><?xml version="1.0" encoding="utf-8"?>
+<file path=ppt/slides/slide36.xml><?xml version="1.0" encoding="utf-8"?>
 <p:sld xmlns:a="http://schemas.openxmlformats.org/drawingml/2006/main" xmlns:r="http://schemas.openxmlformats.org/officeDocument/2006/relationships" xmlns:p="http://schemas.openxmlformats.org/presentationml/2006/main">
   <p:cSld>
     <p:spTree>
@@ -33031,7 +32084,7 @@
 </p:sld>
 </file>
 
-<file path=ppt/slides/slide38.xml><?xml version="1.0" encoding="utf-8"?>
+<file path=ppt/slides/slide37.xml><?xml version="1.0" encoding="utf-8"?>
 <p:sld xmlns:a="http://schemas.openxmlformats.org/drawingml/2006/main" xmlns:r="http://schemas.openxmlformats.org/officeDocument/2006/relationships" xmlns:p="http://schemas.openxmlformats.org/presentationml/2006/main">
   <p:cSld>
     <p:spTree>
@@ -33909,7 +32962,7 @@
 </p:sld>
 </file>
 
-<file path=ppt/slides/slide39.xml><?xml version="1.0" encoding="utf-8"?>
+<file path=ppt/slides/slide38.xml><?xml version="1.0" encoding="utf-8"?>
 <p:sld xmlns:a="http://schemas.openxmlformats.org/drawingml/2006/main" xmlns:r="http://schemas.openxmlformats.org/officeDocument/2006/relationships" xmlns:p="http://schemas.openxmlformats.org/presentationml/2006/main">
   <p:cSld>
     <p:spTree>
@@ -35129,1392 +34182,7 @@
 </p:sld>
 </file>
 
-<file path=ppt/slides/slide4.xml><?xml version="1.0" encoding="utf-8"?>
-<p:sld xmlns:a="http://schemas.openxmlformats.org/drawingml/2006/main" xmlns:r="http://schemas.openxmlformats.org/officeDocument/2006/relationships" xmlns:p="http://schemas.openxmlformats.org/presentationml/2006/main">
-  <p:cSld>
-    <p:spTree>
-      <p:nvGrpSpPr>
-        <p:cNvPr id="1" name=""/>
-        <p:cNvGrpSpPr/>
-        <p:nvPr/>
-      </p:nvGrpSpPr>
-      <p:grpSpPr>
-        <a:xfrm>
-          <a:off x="0" y="0"/>
-          <a:ext cx="0" cy="0"/>
-          <a:chOff x="0" y="0"/>
-          <a:chExt cx="0" cy="0"/>
-        </a:xfrm>
-      </p:grpSpPr>
-      <p:sp>
-        <p:nvSpPr>
-          <p:cNvPr id="2" name="Rectangle 1"/>
-          <p:cNvSpPr/>
-          <p:nvPr/>
-        </p:nvSpPr>
-        <p:spPr>
-          <a:xfrm>
-            <a:off x="0" y="0"/>
-            <a:ext cx="12191695" cy="6858000"/>
-          </a:xfrm>
-          <a:prstGeom prst="rect">
-            <a:avLst/>
-          </a:prstGeom>
-          <a:solidFill>
-            <a:srgbClr val="FFFFFF"/>
-          </a:solidFill>
-          <a:ln>
-            <a:noFill/>
-          </a:ln>
-          <a:effectLst/>
-        </p:spPr>
-        <p:style>
-          <a:lnRef idx="1">
-            <a:schemeClr val="accent1"/>
-          </a:lnRef>
-          <a:fillRef idx="3">
-            <a:schemeClr val="accent1"/>
-          </a:fillRef>
-          <a:effectRef idx="2">
-            <a:schemeClr val="accent1"/>
-          </a:effectRef>
-          <a:fontRef idx="minor">
-            <a:schemeClr val="lt1"/>
-          </a:fontRef>
-        </p:style>
-        <p:txBody>
-          <a:bodyPr rtlCol="0" anchor="ctr"/>
-          <a:lstStyle/>
-          <a:p>
-            <a:pPr algn="ctr"/>
-            <a:endParaRPr/>
-          </a:p>
-        </p:txBody>
-      </p:sp>
-      <p:sp>
-        <p:nvSpPr>
-          <p:cNvPr id="3" name="TextBox 2"/>
-          <p:cNvSpPr txBox="1"/>
-          <p:nvPr/>
-        </p:nvSpPr>
-        <p:spPr>
-          <a:xfrm>
-            <a:off x="777240" y="475488"/>
-            <a:ext cx="10637215" cy="237744"/>
-          </a:xfrm>
-          <a:prstGeom prst="rect">
-            <a:avLst/>
-          </a:prstGeom>
-          <a:noFill/>
-        </p:spPr>
-        <p:txBody>
-          <a:bodyPr wrap="square" lIns="0" tIns="0" rIns="0" bIns="0">
-            <a:spAutoFit/>
-          </a:bodyPr>
-          <a:lstStyle/>
-          <a:p>
-            <a:pPr algn="l">
-              <a:lnSpc>
-                <a:spcPct val="122000"/>
-              </a:lnSpc>
-              <a:spcBef>
-                <a:spcPts val="0"/>
-              </a:spcBef>
-              <a:spcAft>
-                <a:spcPts val="0"/>
-              </a:spcAft>
-            </a:pPr>
-            <a:r>
-              <a:rPr sz="1050" b="1">
-                <a:solidFill>
-                  <a:srgbClr val="8C2F39"/>
-                </a:solidFill>
-                <a:latin typeface="Arial"/>
-              </a:rPr>
-              <a:t>LOS DATOS DE PARTIDA</a:t>
-            </a:r>
-          </a:p>
-        </p:txBody>
-      </p:sp>
-      <p:sp>
-        <p:nvSpPr>
-          <p:cNvPr id="4" name="Rectangle 3"/>
-          <p:cNvSpPr/>
-          <p:nvPr/>
-        </p:nvSpPr>
-        <p:spPr>
-          <a:xfrm>
-            <a:off x="777240" y="768096"/>
-            <a:ext cx="502920" cy="30480"/>
-          </a:xfrm>
-          <a:prstGeom prst="rect">
-            <a:avLst/>
-          </a:prstGeom>
-          <a:solidFill>
-            <a:srgbClr val="8C2F39"/>
-          </a:solidFill>
-          <a:ln>
-            <a:noFill/>
-          </a:ln>
-          <a:effectLst/>
-        </p:spPr>
-        <p:style>
-          <a:lnRef idx="1">
-            <a:schemeClr val="accent1"/>
-          </a:lnRef>
-          <a:fillRef idx="3">
-            <a:schemeClr val="accent1"/>
-          </a:fillRef>
-          <a:effectRef idx="2">
-            <a:schemeClr val="accent1"/>
-          </a:effectRef>
-          <a:fontRef idx="minor">
-            <a:schemeClr val="lt1"/>
-          </a:fontRef>
-        </p:style>
-        <p:txBody>
-          <a:bodyPr rtlCol="0" anchor="ctr"/>
-          <a:lstStyle/>
-          <a:p>
-            <a:pPr algn="ctr"/>
-            <a:endParaRPr/>
-          </a:p>
-        </p:txBody>
-      </p:sp>
-      <p:sp>
-        <p:nvSpPr>
-          <p:cNvPr id="5" name="TextBox 4"/>
-          <p:cNvSpPr txBox="1"/>
-          <p:nvPr/>
-        </p:nvSpPr>
-        <p:spPr>
-          <a:xfrm>
-            <a:off x="777240" y="914400"/>
-            <a:ext cx="10637215" cy="445770"/>
-          </a:xfrm>
-          <a:prstGeom prst="rect">
-            <a:avLst/>
-          </a:prstGeom>
-          <a:noFill/>
-        </p:spPr>
-        <p:txBody>
-          <a:bodyPr wrap="square" lIns="0" tIns="0" rIns="0" bIns="0">
-            <a:spAutoFit/>
-          </a:bodyPr>
-          <a:lstStyle/>
-          <a:p>
-            <a:pPr algn="l">
-              <a:lnSpc>
-                <a:spcPct val="106000"/>
-              </a:lnSpc>
-              <a:spcBef>
-                <a:spcPts val="0"/>
-              </a:spcBef>
-              <a:spcAft>
-                <a:spcPts val="0"/>
-              </a:spcAft>
-            </a:pPr>
-            <a:r>
-              <a:rPr sz="2700" b="1">
-                <a:solidFill>
-                  <a:srgbClr val="17150F"/>
-                </a:solidFill>
-                <a:latin typeface="Arial"/>
-              </a:rPr>
-              <a:t>Cinco tablas, trece semanas, ciento sesenta series</a:t>
-            </a:r>
-          </a:p>
-        </p:txBody>
-      </p:sp>
-      <p:graphicFrame>
-        <p:nvGraphicFramePr>
-          <p:cNvPr id="6" name="Table 5"/>
-          <p:cNvGraphicFramePr>
-            <a:graphicFrameLocks noGrp="1"/>
-          </p:cNvGraphicFramePr>
-          <p:nvPr/>
-        </p:nvGraphicFramePr>
-        <p:xfrm>
-          <a:off x="777240" y="1506474"/>
-          <a:ext cx="10637214" cy="2267712"/>
-        </p:xfrm>
-        <a:graphic>
-          <a:graphicData uri="http://schemas.openxmlformats.org/drawingml/2006/table">
-            <a:tbl>
-              <a:tblPr bandRow="1">
-                <a:tableStyleId>{5C22544A-7EE6-4342-B048-85BDC9FD1C3A}</a:tableStyleId>
-              </a:tblPr>
-              <a:tblGrid>
-                <a:gridCol w="2765675">
-                  <a:extLst>
-                    <a:ext uri="{9D8B030D-6E8A-4147-A177-3AD203B41FA5}">
-                      <a16:colId xmlns:a16="http://schemas.microsoft.com/office/drawing/2014/main" val="20000"/>
-                    </a:ext>
-                  </a:extLst>
-                </a:gridCol>
-                <a:gridCol w="4254886">
-                  <a:extLst>
-                    <a:ext uri="{9D8B030D-6E8A-4147-A177-3AD203B41FA5}">
-                      <a16:colId xmlns:a16="http://schemas.microsoft.com/office/drawing/2014/main" val="20001"/>
-                    </a:ext>
-                  </a:extLst>
-                </a:gridCol>
-                <a:gridCol w="3616653">
-                  <a:extLst>
-                    <a:ext uri="{9D8B030D-6E8A-4147-A177-3AD203B41FA5}">
-                      <a16:colId xmlns:a16="http://schemas.microsoft.com/office/drawing/2014/main" val="20002"/>
-                    </a:ext>
-                  </a:extLst>
-                </a:gridCol>
-              </a:tblGrid>
-              <a:tr h="347472">
-                <a:tc>
-                  <a:txBody>
-                    <a:bodyPr/>
-                    <a:lstStyle/>
-                    <a:p>
-                      <a:pPr algn="l"/>
-                      <a:r>
-                        <a:rPr sz="1100" b="1">
-                          <a:solidFill>
-                            <a:srgbClr val="8B8478"/>
-                          </a:solidFill>
-                          <a:latin typeface="Arial"/>
-                        </a:rPr>
-                        <a:t>Tabla</a:t>
-                      </a:r>
-                    </a:p>
-                  </a:txBody>
-                  <a:tcPr marL="82296" marR="82296" anchor="ctr">
-                    <a:solidFill>
-                      <a:srgbClr val="F4F2ED"/>
-                    </a:solidFill>
-                  </a:tcPr>
-                </a:tc>
-                <a:tc>
-                  <a:txBody>
-                    <a:bodyPr/>
-                    <a:lstStyle/>
-                    <a:p>
-                      <a:pPr algn="r"/>
-                      <a:r>
-                        <a:rPr sz="1100" b="1">
-                          <a:solidFill>
-                            <a:srgbClr val="8B8478"/>
-                          </a:solidFill>
-                          <a:latin typeface="Arial"/>
-                        </a:rPr>
-                        <a:t>Contenido</a:t>
-                      </a:r>
-                    </a:p>
-                  </a:txBody>
-                  <a:tcPr marL="82296" marR="82296" anchor="ctr">
-                    <a:solidFill>
-                      <a:srgbClr val="F4F2ED"/>
-                    </a:solidFill>
-                  </a:tcPr>
-                </a:tc>
-                <a:tc>
-                  <a:txBody>
-                    <a:bodyPr/>
-                    <a:lstStyle/>
-                    <a:p>
-                      <a:pPr algn="r"/>
-                      <a:r>
-                        <a:rPr sz="1100" b="1">
-                          <a:solidFill>
-                            <a:srgbClr val="8B8478"/>
-                          </a:solidFill>
-                          <a:latin typeface="Arial"/>
-                        </a:rPr>
-                        <a:t>Uso en el proyecto</a:t>
-                      </a:r>
-                    </a:p>
-                  </a:txBody>
-                  <a:tcPr marL="82296" marR="82296" anchor="ctr">
-                    <a:solidFill>
-                      <a:srgbClr val="F4F2ED"/>
-                    </a:solidFill>
-                  </a:tcPr>
-                </a:tc>
-                <a:extLst>
-                  <a:ext uri="{0D108BD9-81ED-4DB2-BD59-A6C34878D82A}">
-                    <a16:rowId xmlns:a16="http://schemas.microsoft.com/office/drawing/2014/main" val="10000"/>
-                  </a:ext>
-                </a:extLst>
-              </a:tr>
-              <a:tr h="384048">
-                <a:tc>
-                  <a:txBody>
-                    <a:bodyPr/>
-                    <a:lstStyle/>
-                    <a:p>
-                      <a:pPr algn="l"/>
-                      <a:r>
-                        <a:rPr sz="1250" b="0">
-                          <a:solidFill>
-                            <a:srgbClr val="17150F"/>
-                          </a:solidFill>
-                          <a:latin typeface="Arial"/>
-                        </a:rPr>
-                        <a:t>ventas_historicas</a:t>
-                      </a:r>
-                    </a:p>
-                  </a:txBody>
-                  <a:tcPr marL="82296" marR="82296" anchor="ctr">
-                    <a:solidFill>
-                      <a:srgbClr val="FFFFFF"/>
-                    </a:solidFill>
-                  </a:tcPr>
-                </a:tc>
-                <a:tc>
-                  <a:txBody>
-                    <a:bodyPr/>
-                    <a:lstStyle/>
-                    <a:p>
-                      <a:pPr algn="r"/>
-                      <a:r>
-                        <a:rPr sz="1250" b="0">
-                          <a:solidFill>
-                            <a:srgbClr val="555045"/>
-                          </a:solidFill>
-                          <a:latin typeface="Arial"/>
-                        </a:rPr>
-                        <a:t>Ventas diarias por tienda y producto</a:t>
-                      </a:r>
-                    </a:p>
-                  </a:txBody>
-                  <a:tcPr marL="82296" marR="82296" anchor="ctr">
-                    <a:solidFill>
-                      <a:srgbClr val="FFFFFF"/>
-                    </a:solidFill>
-                  </a:tcPr>
-                </a:tc>
-                <a:tc>
-                  <a:txBody>
-                    <a:bodyPr/>
-                    <a:lstStyle/>
-                    <a:p>
-                      <a:pPr algn="r"/>
-                      <a:r>
-                        <a:rPr sz="1250" b="0">
-                          <a:solidFill>
-                            <a:srgbClr val="555045"/>
-                          </a:solidFill>
-                          <a:latin typeface="Arial"/>
-                        </a:rPr>
-                        <a:t>Objetivo a predecir</a:t>
-                      </a:r>
-                    </a:p>
-                  </a:txBody>
-                  <a:tcPr marL="82296" marR="82296" anchor="ctr">
-                    <a:solidFill>
-                      <a:srgbClr val="FFFFFF"/>
-                    </a:solidFill>
-                  </a:tcPr>
-                </a:tc>
-                <a:extLst>
-                  <a:ext uri="{0D108BD9-81ED-4DB2-BD59-A6C34878D82A}">
-                    <a16:rowId xmlns:a16="http://schemas.microsoft.com/office/drawing/2014/main" val="10001"/>
-                  </a:ext>
-                </a:extLst>
-              </a:tr>
-              <a:tr h="384048">
-                <a:tc>
-                  <a:txBody>
-                    <a:bodyPr/>
-                    <a:lstStyle/>
-                    <a:p>
-                      <a:pPr algn="l"/>
-                      <a:r>
-                        <a:rPr sz="1250" b="0">
-                          <a:solidFill>
-                            <a:srgbClr val="17150F"/>
-                          </a:solidFill>
-                          <a:latin typeface="Arial"/>
-                        </a:rPr>
-                        <a:t>catalogo_productos</a:t>
-                      </a:r>
-                    </a:p>
-                  </a:txBody>
-                  <a:tcPr marL="82296" marR="82296" anchor="ctr">
-                    <a:solidFill>
-                      <a:srgbClr val="FFFFFF"/>
-                    </a:solidFill>
-                  </a:tcPr>
-                </a:tc>
-                <a:tc>
-                  <a:txBody>
-                    <a:bodyPr/>
-                    <a:lstStyle/>
-                    <a:p>
-                      <a:pPr algn="r"/>
-                      <a:r>
-                        <a:rPr sz="1250" b="0">
-                          <a:solidFill>
-                            <a:srgbClr val="555045"/>
-                          </a:solidFill>
-                          <a:latin typeface="Arial"/>
-                        </a:rPr>
-                        <a:t>Precio, coste unitario y almacenaje</a:t>
-                      </a:r>
-                    </a:p>
-                  </a:txBody>
-                  <a:tcPr marL="82296" marR="82296" anchor="ctr">
-                    <a:solidFill>
-                      <a:srgbClr val="FFFFFF"/>
-                    </a:solidFill>
-                  </a:tcPr>
-                </a:tc>
-                <a:tc>
-                  <a:txBody>
-                    <a:bodyPr/>
-                    <a:lstStyle/>
-                    <a:p>
-                      <a:pPr algn="r"/>
-                      <a:r>
-                        <a:rPr sz="1250" b="0">
-                          <a:solidFill>
-                            <a:srgbClr val="555045"/>
-                          </a:solidFill>
-                          <a:latin typeface="Arial"/>
-                        </a:rPr>
-                        <a:t>Calcula el nivel de servicio</a:t>
-                      </a:r>
-                    </a:p>
-                  </a:txBody>
-                  <a:tcPr marL="82296" marR="82296" anchor="ctr">
-                    <a:solidFill>
-                      <a:srgbClr val="FFFFFF"/>
-                    </a:solidFill>
-                  </a:tcPr>
-                </a:tc>
-                <a:extLst>
-                  <a:ext uri="{0D108BD9-81ED-4DB2-BD59-A6C34878D82A}">
-                    <a16:rowId xmlns:a16="http://schemas.microsoft.com/office/drawing/2014/main" val="10002"/>
-                  </a:ext>
-                </a:extLst>
-              </a:tr>
-              <a:tr h="384048">
-                <a:tc>
-                  <a:txBody>
-                    <a:bodyPr/>
-                    <a:lstStyle/>
-                    <a:p>
-                      <a:pPr algn="l"/>
-                      <a:r>
-                        <a:rPr sz="1250" b="0">
-                          <a:solidFill>
-                            <a:srgbClr val="17150F"/>
-                          </a:solidFill>
-                          <a:latin typeface="Arial"/>
-                        </a:rPr>
-                        <a:t>inventario_actual</a:t>
-                      </a:r>
-                    </a:p>
-                  </a:txBody>
-                  <a:tcPr marL="82296" marR="82296" anchor="ctr">
-                    <a:solidFill>
-                      <a:srgbClr val="FFFFFF"/>
-                    </a:solidFill>
-                  </a:tcPr>
-                </a:tc>
-                <a:tc>
-                  <a:txBody>
-                    <a:bodyPr/>
-                    <a:lstStyle/>
-                    <a:p>
-                      <a:pPr algn="r"/>
-                      <a:r>
-                        <a:rPr sz="1250" b="0">
-                          <a:solidFill>
-                            <a:srgbClr val="555045"/>
-                          </a:solidFill>
-                          <a:latin typeface="Arial"/>
-                        </a:rPr>
-                        <a:t>Stock disponible por serie</a:t>
-                      </a:r>
-                    </a:p>
-                  </a:txBody>
-                  <a:tcPr marL="82296" marR="82296" anchor="ctr">
-                    <a:solidFill>
-                      <a:srgbClr val="FFFFFF"/>
-                    </a:solidFill>
-                  </a:tcPr>
-                </a:tc>
-                <a:tc>
-                  <a:txBody>
-                    <a:bodyPr/>
-                    <a:lstStyle/>
-                    <a:p>
-                      <a:pPr algn="r"/>
-                      <a:r>
-                        <a:rPr sz="1250" b="0">
-                          <a:solidFill>
-                            <a:srgbClr val="555045"/>
-                          </a:solidFill>
-                          <a:latin typeface="Arial"/>
-                        </a:rPr>
-                        <a:t>Se resta del objetivo</a:t>
-                      </a:r>
-                    </a:p>
-                  </a:txBody>
-                  <a:tcPr marL="82296" marR="82296" anchor="ctr">
-                    <a:solidFill>
-                      <a:srgbClr val="FFFFFF"/>
-                    </a:solidFill>
-                  </a:tcPr>
-                </a:tc>
-                <a:extLst>
-                  <a:ext uri="{0D108BD9-81ED-4DB2-BD59-A6C34878D82A}">
-                    <a16:rowId xmlns:a16="http://schemas.microsoft.com/office/drawing/2014/main" val="10003"/>
-                  </a:ext>
-                </a:extLst>
-              </a:tr>
-              <a:tr h="384048">
-                <a:tc>
-                  <a:txBody>
-                    <a:bodyPr/>
-                    <a:lstStyle/>
-                    <a:p>
-                      <a:pPr algn="l"/>
-                      <a:r>
-                        <a:rPr sz="1250" b="0">
-                          <a:solidFill>
-                            <a:srgbClr val="17150F"/>
-                          </a:solidFill>
-                          <a:latin typeface="Arial"/>
-                        </a:rPr>
-                        <a:t>maestro_tiendas</a:t>
-                      </a:r>
-                    </a:p>
-                  </a:txBody>
-                  <a:tcPr marL="82296" marR="82296" anchor="ctr">
-                    <a:solidFill>
-                      <a:srgbClr val="FFFFFF"/>
-                    </a:solidFill>
-                  </a:tcPr>
-                </a:tc>
-                <a:tc>
-                  <a:txBody>
-                    <a:bodyPr/>
-                    <a:lstStyle/>
-                    <a:p>
-                      <a:pPr algn="r"/>
-                      <a:r>
-                        <a:rPr sz="1250" b="0">
-                          <a:solidFill>
-                            <a:srgbClr val="555045"/>
-                          </a:solidFill>
-                          <a:latin typeface="Arial"/>
-                        </a:rPr>
-                        <a:t>Ciudad y superficie</a:t>
-                      </a:r>
-                    </a:p>
-                  </a:txBody>
-                  <a:tcPr marL="82296" marR="82296" anchor="ctr">
-                    <a:solidFill>
-                      <a:srgbClr val="FFFFFF"/>
-                    </a:solidFill>
-                  </a:tcPr>
-                </a:tc>
-                <a:tc>
-                  <a:txBody>
-                    <a:bodyPr/>
-                    <a:lstStyle/>
-                    <a:p>
-                      <a:pPr algn="r"/>
-                      <a:r>
-                        <a:rPr sz="1250" b="0">
-                          <a:solidFill>
-                            <a:srgbClr val="555045"/>
-                          </a:solidFill>
-                          <a:latin typeface="Arial"/>
-                        </a:rPr>
-                        <a:t>Superficie entra al modelo, ciudad no</a:t>
-                      </a:r>
-                    </a:p>
-                  </a:txBody>
-                  <a:tcPr marL="82296" marR="82296" anchor="ctr">
-                    <a:solidFill>
-                      <a:srgbClr val="FFFFFF"/>
-                    </a:solidFill>
-                  </a:tcPr>
-                </a:tc>
-                <a:extLst>
-                  <a:ext uri="{0D108BD9-81ED-4DB2-BD59-A6C34878D82A}">
-                    <a16:rowId xmlns:a16="http://schemas.microsoft.com/office/drawing/2014/main" val="10004"/>
-                  </a:ext>
-                </a:extLst>
-              </a:tr>
-              <a:tr h="384048">
-                <a:tc>
-                  <a:txBody>
-                    <a:bodyPr/>
-                    <a:lstStyle/>
-                    <a:p>
-                      <a:pPr algn="l"/>
-                      <a:r>
-                        <a:rPr sz="1250" b="0">
-                          <a:solidFill>
-                            <a:srgbClr val="17150F"/>
-                          </a:solidFill>
-                          <a:latin typeface="Arial"/>
-                        </a:rPr>
-                        <a:t>ground_truth_trends</a:t>
-                      </a:r>
-                    </a:p>
-                  </a:txBody>
-                  <a:tcPr marL="82296" marR="82296" anchor="ctr">
-                    <a:solidFill>
-                      <a:srgbClr val="FFFFFF"/>
-                    </a:solidFill>
-                  </a:tcPr>
-                </a:tc>
-                <a:tc>
-                  <a:txBody>
-                    <a:bodyPr/>
-                    <a:lstStyle/>
-                    <a:p>
-                      <a:pPr algn="r"/>
-                      <a:r>
-                        <a:rPr sz="1250" b="0">
-                          <a:solidFill>
-                            <a:srgbClr val="555045"/>
-                          </a:solidFill>
-                          <a:latin typeface="Arial"/>
-                        </a:rPr>
-                        <a:t>Patrón real de cada serie</a:t>
-                      </a:r>
-                    </a:p>
-                  </a:txBody>
-                  <a:tcPr marL="82296" marR="82296" anchor="ctr">
-                    <a:solidFill>
-                      <a:srgbClr val="FFFFFF"/>
-                    </a:solidFill>
-                  </a:tcPr>
-                </a:tc>
-                <a:tc>
-                  <a:txBody>
-                    <a:bodyPr/>
-                    <a:lstStyle/>
-                    <a:p>
-                      <a:pPr algn="r"/>
-                      <a:r>
-                        <a:rPr sz="1250" b="0">
-                          <a:solidFill>
-                            <a:srgbClr val="555045"/>
-                          </a:solidFill>
-                          <a:latin typeface="Arial"/>
-                        </a:rPr>
-                        <a:t>Solo contraste, nunca predictor</a:t>
-                      </a:r>
-                    </a:p>
-                  </a:txBody>
-                  <a:tcPr marL="82296" marR="82296" anchor="ctr">
-                    <a:solidFill>
-                      <a:srgbClr val="FFFFFF"/>
-                    </a:solidFill>
-                  </a:tcPr>
-                </a:tc>
-                <a:extLst>
-                  <a:ext uri="{0D108BD9-81ED-4DB2-BD59-A6C34878D82A}">
-                    <a16:rowId xmlns:a16="http://schemas.microsoft.com/office/drawing/2014/main" val="10005"/>
-                  </a:ext>
-                </a:extLst>
-              </a:tr>
-            </a:tbl>
-          </a:graphicData>
-        </a:graphic>
-      </p:graphicFrame>
-      <p:sp>
-        <p:nvSpPr>
-          <p:cNvPr id="7" name="Rectangle 6"/>
-          <p:cNvSpPr/>
-          <p:nvPr/>
-        </p:nvSpPr>
-        <p:spPr>
-          <a:xfrm>
-            <a:off x="777240" y="4085082"/>
-            <a:ext cx="2549575" cy="1051560"/>
-          </a:xfrm>
-          <a:prstGeom prst="rect">
-            <a:avLst/>
-          </a:prstGeom>
-          <a:solidFill>
-            <a:srgbClr val="FFFFFF"/>
-          </a:solidFill>
-          <a:ln w="9525">
-            <a:solidFill>
-              <a:srgbClr val="DCD8CF"/>
-            </a:solidFill>
-          </a:ln>
-          <a:effectLst/>
-        </p:spPr>
-        <p:style>
-          <a:lnRef idx="1">
-            <a:schemeClr val="accent1"/>
-          </a:lnRef>
-          <a:fillRef idx="3">
-            <a:schemeClr val="accent1"/>
-          </a:fillRef>
-          <a:effectRef idx="2">
-            <a:schemeClr val="accent1"/>
-          </a:effectRef>
-          <a:fontRef idx="minor">
-            <a:schemeClr val="lt1"/>
-          </a:fontRef>
-        </p:style>
-        <p:txBody>
-          <a:bodyPr rtlCol="0" anchor="ctr"/>
-          <a:lstStyle/>
-          <a:p>
-            <a:pPr algn="ctr"/>
-            <a:endParaRPr/>
-          </a:p>
-        </p:txBody>
-      </p:sp>
-      <p:sp>
-        <p:nvSpPr>
-          <p:cNvPr id="8" name="TextBox 7"/>
-          <p:cNvSpPr txBox="1"/>
-          <p:nvPr/>
-        </p:nvSpPr>
-        <p:spPr>
-          <a:xfrm>
-            <a:off x="941832" y="4213098"/>
-            <a:ext cx="2220391" cy="868680"/>
-          </a:xfrm>
-          <a:prstGeom prst="rect">
-            <a:avLst/>
-          </a:prstGeom>
-          <a:noFill/>
-        </p:spPr>
-        <p:txBody>
-          <a:bodyPr wrap="square" lIns="0" tIns="0" rIns="0" bIns="0">
-            <a:spAutoFit/>
-          </a:bodyPr>
-          <a:lstStyle/>
-          <a:p>
-            <a:pPr algn="l">
-              <a:lnSpc>
-                <a:spcPct val="122000"/>
-              </a:lnSpc>
-              <a:spcBef>
-                <a:spcPts val="0"/>
-              </a:spcBef>
-              <a:spcAft>
-                <a:spcPts val="300"/>
-              </a:spcAft>
-            </a:pPr>
-            <a:r>
-              <a:rPr sz="950" b="1">
-                <a:solidFill>
-                  <a:srgbClr val="8B8478"/>
-                </a:solidFill>
-                <a:latin typeface="Arial"/>
-              </a:rPr>
-              <a:t>OBSERVACIONES DIARIAS</a:t>
-            </a:r>
-          </a:p>
-          <a:p>
-            <a:pPr algn="l">
-              <a:lnSpc>
-                <a:spcPct val="100000"/>
-              </a:lnSpc>
-              <a:spcBef>
-                <a:spcPts val="0"/>
-              </a:spcBef>
-              <a:spcAft>
-                <a:spcPts val="300"/>
-              </a:spcAft>
-            </a:pPr>
-            <a:r>
-              <a:rPr sz="2500" b="1">
-                <a:solidFill>
-                  <a:srgbClr val="17150F"/>
-                </a:solidFill>
-                <a:latin typeface="Arial"/>
-              </a:rPr>
-              <a:t>14.560</a:t>
-            </a:r>
-          </a:p>
-          <a:p>
-            <a:pPr algn="l">
-              <a:lnSpc>
-                <a:spcPct val="120000"/>
-              </a:lnSpc>
-              <a:spcBef>
-                <a:spcPts val="0"/>
-              </a:spcBef>
-              <a:spcAft>
-                <a:spcPts val="0"/>
-              </a:spcAft>
-            </a:pPr>
-            <a:r>
-              <a:rPr sz="1050" b="0">
-                <a:solidFill>
-                  <a:srgbClr val="555045"/>
-                </a:solidFill>
-                <a:latin typeface="Arial"/>
-              </a:rPr>
-              <a:t>del 1 de enero al 31 de marzo</a:t>
-            </a:r>
-          </a:p>
-        </p:txBody>
-      </p:sp>
-      <p:sp>
-        <p:nvSpPr>
-          <p:cNvPr id="9" name="Rectangle 8"/>
-          <p:cNvSpPr/>
-          <p:nvPr/>
-        </p:nvSpPr>
-        <p:spPr>
-          <a:xfrm>
-            <a:off x="3473119" y="4085082"/>
-            <a:ext cx="2549575" cy="1051560"/>
-          </a:xfrm>
-          <a:prstGeom prst="rect">
-            <a:avLst/>
-          </a:prstGeom>
-          <a:solidFill>
-            <a:srgbClr val="FFFFFF"/>
-          </a:solidFill>
-          <a:ln w="9525">
-            <a:solidFill>
-              <a:srgbClr val="DCD8CF"/>
-            </a:solidFill>
-          </a:ln>
-          <a:effectLst/>
-        </p:spPr>
-        <p:style>
-          <a:lnRef idx="1">
-            <a:schemeClr val="accent1"/>
-          </a:lnRef>
-          <a:fillRef idx="3">
-            <a:schemeClr val="accent1"/>
-          </a:fillRef>
-          <a:effectRef idx="2">
-            <a:schemeClr val="accent1"/>
-          </a:effectRef>
-          <a:fontRef idx="minor">
-            <a:schemeClr val="lt1"/>
-          </a:fontRef>
-        </p:style>
-        <p:txBody>
-          <a:bodyPr rtlCol="0" anchor="ctr"/>
-          <a:lstStyle/>
-          <a:p>
-            <a:pPr algn="ctr"/>
-            <a:endParaRPr/>
-          </a:p>
-        </p:txBody>
-      </p:sp>
-      <p:sp>
-        <p:nvSpPr>
-          <p:cNvPr id="10" name="TextBox 9"/>
-          <p:cNvSpPr txBox="1"/>
-          <p:nvPr/>
-        </p:nvSpPr>
-        <p:spPr>
-          <a:xfrm>
-            <a:off x="3637711" y="4213098"/>
-            <a:ext cx="2220391" cy="868680"/>
-          </a:xfrm>
-          <a:prstGeom prst="rect">
-            <a:avLst/>
-          </a:prstGeom>
-          <a:noFill/>
-        </p:spPr>
-        <p:txBody>
-          <a:bodyPr wrap="square" lIns="0" tIns="0" rIns="0" bIns="0">
-            <a:spAutoFit/>
-          </a:bodyPr>
-          <a:lstStyle/>
-          <a:p>
-            <a:pPr algn="l">
-              <a:lnSpc>
-                <a:spcPct val="122000"/>
-              </a:lnSpc>
-              <a:spcBef>
-                <a:spcPts val="0"/>
-              </a:spcBef>
-              <a:spcAft>
-                <a:spcPts val="300"/>
-              </a:spcAft>
-            </a:pPr>
-            <a:r>
-              <a:rPr sz="950" b="1">
-                <a:solidFill>
-                  <a:srgbClr val="8B8478"/>
-                </a:solidFill>
-                <a:latin typeface="Arial"/>
-              </a:rPr>
-              <a:t>PANEL SEMANAL</a:t>
-            </a:r>
-          </a:p>
-          <a:p>
-            <a:pPr algn="l">
-              <a:lnSpc>
-                <a:spcPct val="100000"/>
-              </a:lnSpc>
-              <a:spcBef>
-                <a:spcPts val="0"/>
-              </a:spcBef>
-              <a:spcAft>
-                <a:spcPts val="300"/>
-              </a:spcAft>
-            </a:pPr>
-            <a:r>
-              <a:rPr sz="2500" b="1">
-                <a:solidFill>
-                  <a:srgbClr val="17150F"/>
-                </a:solidFill>
-                <a:latin typeface="Arial"/>
-              </a:rPr>
-              <a:t>2.080</a:t>
-            </a:r>
-          </a:p>
-          <a:p>
-            <a:pPr algn="l">
-              <a:lnSpc>
-                <a:spcPct val="120000"/>
-              </a:lnSpc>
-              <a:spcBef>
-                <a:spcPts val="0"/>
-              </a:spcBef>
-              <a:spcAft>
-                <a:spcPts val="0"/>
-              </a:spcAft>
-            </a:pPr>
-            <a:r>
-              <a:rPr sz="1050" b="0">
-                <a:solidFill>
-                  <a:srgbClr val="555045"/>
-                </a:solidFill>
-                <a:latin typeface="Arial"/>
-              </a:rPr>
-              <a:t>160 series × 13 semanas</a:t>
-            </a:r>
-          </a:p>
-        </p:txBody>
-      </p:sp>
-      <p:sp>
-        <p:nvSpPr>
-          <p:cNvPr id="11" name="Rectangle 10"/>
-          <p:cNvSpPr/>
-          <p:nvPr/>
-        </p:nvSpPr>
-        <p:spPr>
-          <a:xfrm>
-            <a:off x="6168998" y="4085082"/>
-            <a:ext cx="2549575" cy="1051560"/>
-          </a:xfrm>
-          <a:prstGeom prst="rect">
-            <a:avLst/>
-          </a:prstGeom>
-          <a:solidFill>
-            <a:srgbClr val="FFFFFF"/>
-          </a:solidFill>
-          <a:ln w="9525">
-            <a:solidFill>
-              <a:srgbClr val="DCD8CF"/>
-            </a:solidFill>
-          </a:ln>
-          <a:effectLst/>
-        </p:spPr>
-        <p:style>
-          <a:lnRef idx="1">
-            <a:schemeClr val="accent1"/>
-          </a:lnRef>
-          <a:fillRef idx="3">
-            <a:schemeClr val="accent1"/>
-          </a:fillRef>
-          <a:effectRef idx="2">
-            <a:schemeClr val="accent1"/>
-          </a:effectRef>
-          <a:fontRef idx="minor">
-            <a:schemeClr val="lt1"/>
-          </a:fontRef>
-        </p:style>
-        <p:txBody>
-          <a:bodyPr rtlCol="0" anchor="ctr"/>
-          <a:lstStyle/>
-          <a:p>
-            <a:pPr algn="ctr"/>
-            <a:endParaRPr/>
-          </a:p>
-        </p:txBody>
-      </p:sp>
-      <p:sp>
-        <p:nvSpPr>
-          <p:cNvPr id="12" name="TextBox 11"/>
-          <p:cNvSpPr txBox="1"/>
-          <p:nvPr/>
-        </p:nvSpPr>
-        <p:spPr>
-          <a:xfrm>
-            <a:off x="6333590" y="4213098"/>
-            <a:ext cx="2220391" cy="868680"/>
-          </a:xfrm>
-          <a:prstGeom prst="rect">
-            <a:avLst/>
-          </a:prstGeom>
-          <a:noFill/>
-        </p:spPr>
-        <p:txBody>
-          <a:bodyPr wrap="square" lIns="0" tIns="0" rIns="0" bIns="0">
-            <a:spAutoFit/>
-          </a:bodyPr>
-          <a:lstStyle/>
-          <a:p>
-            <a:pPr algn="l">
-              <a:lnSpc>
-                <a:spcPct val="122000"/>
-              </a:lnSpc>
-              <a:spcBef>
-                <a:spcPts val="0"/>
-              </a:spcBef>
-              <a:spcAft>
-                <a:spcPts val="300"/>
-              </a:spcAft>
-            </a:pPr>
-            <a:r>
-              <a:rPr sz="950" b="1">
-                <a:solidFill>
-                  <a:srgbClr val="8B8478"/>
-                </a:solidFill>
-                <a:latin typeface="Arial"/>
-              </a:rPr>
-              <a:t>SERIES ACTIVAS</a:t>
-            </a:r>
-          </a:p>
-          <a:p>
-            <a:pPr algn="l">
-              <a:lnSpc>
-                <a:spcPct val="100000"/>
-              </a:lnSpc>
-              <a:spcBef>
-                <a:spcPts val="0"/>
-              </a:spcBef>
-              <a:spcAft>
-                <a:spcPts val="300"/>
-              </a:spcAft>
-            </a:pPr>
-            <a:r>
-              <a:rPr sz="2500" b="1">
-                <a:solidFill>
-                  <a:srgbClr val="17150F"/>
-                </a:solidFill>
-                <a:latin typeface="Arial"/>
-              </a:rPr>
-              <a:t>160</a:t>
-            </a:r>
-          </a:p>
-          <a:p>
-            <a:pPr algn="l">
-              <a:lnSpc>
-                <a:spcPct val="120000"/>
-              </a:lnSpc>
-              <a:spcBef>
-                <a:spcPts val="0"/>
-              </a:spcBef>
-              <a:spcAft>
-                <a:spcPts val="0"/>
-              </a:spcAft>
-            </a:pPr>
-            <a:r>
-              <a:rPr sz="1050" b="0">
-                <a:solidFill>
-                  <a:srgbClr val="555045"/>
-                </a:solidFill>
-                <a:latin typeface="Arial"/>
-              </a:rPr>
-              <a:t>20 tiendas × 8 productos</a:t>
-            </a:r>
-          </a:p>
-        </p:txBody>
-      </p:sp>
-      <p:sp>
-        <p:nvSpPr>
-          <p:cNvPr id="13" name="Rectangle 12"/>
-          <p:cNvSpPr/>
-          <p:nvPr/>
-        </p:nvSpPr>
-        <p:spPr>
-          <a:xfrm>
-            <a:off x="8864877" y="4085082"/>
-            <a:ext cx="2549575" cy="1051560"/>
-          </a:xfrm>
-          <a:prstGeom prst="rect">
-            <a:avLst/>
-          </a:prstGeom>
-          <a:solidFill>
-            <a:srgbClr val="FFFFFF"/>
-          </a:solidFill>
-          <a:ln w="9525">
-            <a:solidFill>
-              <a:srgbClr val="DCD8CF"/>
-            </a:solidFill>
-          </a:ln>
-          <a:effectLst/>
-        </p:spPr>
-        <p:style>
-          <a:lnRef idx="1">
-            <a:schemeClr val="accent1"/>
-          </a:lnRef>
-          <a:fillRef idx="3">
-            <a:schemeClr val="accent1"/>
-          </a:fillRef>
-          <a:effectRef idx="2">
-            <a:schemeClr val="accent1"/>
-          </a:effectRef>
-          <a:fontRef idx="minor">
-            <a:schemeClr val="lt1"/>
-          </a:fontRef>
-        </p:style>
-        <p:txBody>
-          <a:bodyPr rtlCol="0" anchor="ctr"/>
-          <a:lstStyle/>
-          <a:p>
-            <a:pPr algn="ctr"/>
-            <a:endParaRPr/>
-          </a:p>
-        </p:txBody>
-      </p:sp>
-      <p:sp>
-        <p:nvSpPr>
-          <p:cNvPr id="14" name="TextBox 13"/>
-          <p:cNvSpPr txBox="1"/>
-          <p:nvPr/>
-        </p:nvSpPr>
-        <p:spPr>
-          <a:xfrm>
-            <a:off x="9029469" y="4213098"/>
-            <a:ext cx="2220391" cy="868680"/>
-          </a:xfrm>
-          <a:prstGeom prst="rect">
-            <a:avLst/>
-          </a:prstGeom>
-          <a:noFill/>
-        </p:spPr>
-        <p:txBody>
-          <a:bodyPr wrap="square" lIns="0" tIns="0" rIns="0" bIns="0">
-            <a:spAutoFit/>
-          </a:bodyPr>
-          <a:lstStyle/>
-          <a:p>
-            <a:pPr algn="l">
-              <a:lnSpc>
-                <a:spcPct val="122000"/>
-              </a:lnSpc>
-              <a:spcBef>
-                <a:spcPts val="0"/>
-              </a:spcBef>
-              <a:spcAft>
-                <a:spcPts val="300"/>
-              </a:spcAft>
-            </a:pPr>
-            <a:r>
-              <a:rPr sz="950" b="1">
-                <a:solidFill>
-                  <a:srgbClr val="8B8478"/>
-                </a:solidFill>
-                <a:latin typeface="Arial"/>
-              </a:rPr>
-              <a:t>SEMANAS COMPLETAS</a:t>
-            </a:r>
-          </a:p>
-          <a:p>
-            <a:pPr algn="l">
-              <a:lnSpc>
-                <a:spcPct val="100000"/>
-              </a:lnSpc>
-              <a:spcBef>
-                <a:spcPts val="0"/>
-              </a:spcBef>
-              <a:spcAft>
-                <a:spcPts val="300"/>
-              </a:spcAft>
-            </a:pPr>
-            <a:r>
-              <a:rPr sz="2500" b="1">
-                <a:solidFill>
-                  <a:srgbClr val="17150F"/>
-                </a:solidFill>
-                <a:latin typeface="Arial"/>
-              </a:rPr>
-              <a:t>13</a:t>
-            </a:r>
-          </a:p>
-          <a:p>
-            <a:pPr algn="l">
-              <a:lnSpc>
-                <a:spcPct val="120000"/>
-              </a:lnSpc>
-              <a:spcBef>
-                <a:spcPts val="0"/>
-              </a:spcBef>
-              <a:spcAft>
-                <a:spcPts val="0"/>
-              </a:spcAft>
-            </a:pPr>
-            <a:r>
-              <a:rPr sz="1050" b="0">
-                <a:solidFill>
-                  <a:srgbClr val="555045"/>
-                </a:solidFill>
-                <a:latin typeface="Arial"/>
-              </a:rPr>
-              <a:t>sin periodos parciales</a:t>
-            </a:r>
-          </a:p>
-        </p:txBody>
-      </p:sp>
-      <p:sp>
-        <p:nvSpPr>
-          <p:cNvPr id="15" name="Rectangle 14"/>
-          <p:cNvSpPr/>
-          <p:nvPr/>
-        </p:nvSpPr>
-        <p:spPr>
-          <a:xfrm>
-            <a:off x="777240" y="6327648"/>
-            <a:ext cx="10637215" cy="9525"/>
-          </a:xfrm>
-          <a:prstGeom prst="rect">
-            <a:avLst/>
-          </a:prstGeom>
-          <a:solidFill>
-            <a:srgbClr val="DCD8CF"/>
-          </a:solidFill>
-          <a:ln>
-            <a:noFill/>
-          </a:ln>
-          <a:effectLst/>
-        </p:spPr>
-        <p:style>
-          <a:lnRef idx="1">
-            <a:schemeClr val="accent1"/>
-          </a:lnRef>
-          <a:fillRef idx="3">
-            <a:schemeClr val="accent1"/>
-          </a:fillRef>
-          <a:effectRef idx="2">
-            <a:schemeClr val="accent1"/>
-          </a:effectRef>
-          <a:fontRef idx="minor">
-            <a:schemeClr val="lt1"/>
-          </a:fontRef>
-        </p:style>
-        <p:txBody>
-          <a:bodyPr rtlCol="0" anchor="ctr"/>
-          <a:lstStyle/>
-          <a:p>
-            <a:pPr algn="ctr"/>
-            <a:endParaRPr/>
-          </a:p>
-        </p:txBody>
-      </p:sp>
-      <p:sp>
-        <p:nvSpPr>
-          <p:cNvPr id="16" name="TextBox 15"/>
-          <p:cNvSpPr txBox="1"/>
-          <p:nvPr/>
-        </p:nvSpPr>
-        <p:spPr>
-          <a:xfrm>
-            <a:off x="777240" y="6428232"/>
-            <a:ext cx="8686800" cy="274320"/>
-          </a:xfrm>
-          <a:prstGeom prst="rect">
-            <a:avLst/>
-          </a:prstGeom>
-          <a:noFill/>
-        </p:spPr>
-        <p:txBody>
-          <a:bodyPr wrap="square" lIns="0" tIns="0" rIns="0" bIns="0">
-            <a:spAutoFit/>
-          </a:bodyPr>
-          <a:lstStyle/>
-          <a:p>
-            <a:pPr algn="l">
-              <a:lnSpc>
-                <a:spcPct val="122000"/>
-              </a:lnSpc>
-              <a:spcBef>
-                <a:spcPts val="0"/>
-              </a:spcBef>
-              <a:spcAft>
-                <a:spcPts val="0"/>
-              </a:spcAft>
-            </a:pPr>
-            <a:r>
-              <a:rPr sz="950" b="0">
-                <a:solidFill>
-                  <a:srgbClr val="8B8478"/>
-                </a:solidFill>
-                <a:latin typeface="Arial"/>
-              </a:rPr>
-              <a:t>Los datos de partida</a:t>
-            </a:r>
-          </a:p>
-        </p:txBody>
-      </p:sp>
-      <p:sp>
-        <p:nvSpPr>
-          <p:cNvPr id="17" name="TextBox 16"/>
-          <p:cNvSpPr txBox="1"/>
-          <p:nvPr/>
-        </p:nvSpPr>
-        <p:spPr>
-          <a:xfrm>
-            <a:off x="10500055" y="6428232"/>
-            <a:ext cx="914400" cy="274320"/>
-          </a:xfrm>
-          <a:prstGeom prst="rect">
-            <a:avLst/>
-          </a:prstGeom>
-          <a:noFill/>
-        </p:spPr>
-        <p:txBody>
-          <a:bodyPr wrap="square" lIns="0" tIns="0" rIns="0" bIns="0">
-            <a:spAutoFit/>
-          </a:bodyPr>
-          <a:lstStyle/>
-          <a:p>
-            <a:pPr algn="r">
-              <a:lnSpc>
-                <a:spcPct val="122000"/>
-              </a:lnSpc>
-              <a:spcBef>
-                <a:spcPts val="0"/>
-              </a:spcBef>
-              <a:spcAft>
-                <a:spcPts val="0"/>
-              </a:spcAft>
-            </a:pPr>
-            <a:r>
-              <a:rPr sz="950" b="0">
-                <a:solidFill>
-                  <a:srgbClr val="8B8478"/>
-                </a:solidFill>
-                <a:latin typeface="Arial"/>
-              </a:rPr>
-              <a:t>4</a:t>
-            </a:r>
-          </a:p>
-        </p:txBody>
-      </p:sp>
-    </p:spTree>
-  </p:cSld>
-  <p:clrMapOvr>
-    <a:masterClrMapping/>
-  </p:clrMapOvr>
-</p:sld>
-</file>
-
-<file path=ppt/slides/slide40.xml><?xml version="1.0" encoding="utf-8"?>
+<file path=ppt/slides/slide39.xml><?xml version="1.0" encoding="utf-8"?>
 <p:sld xmlns:a="http://schemas.openxmlformats.org/drawingml/2006/main" xmlns:r="http://schemas.openxmlformats.org/officeDocument/2006/relationships" xmlns:p="http://schemas.openxmlformats.org/presentationml/2006/main">
   <p:cSld>
     <p:spTree>
@@ -37734,7 +35402,7 @@
 </p:sld>
 </file>
 
-<file path=ppt/slides/slide41.xml><?xml version="1.0" encoding="utf-8"?>
+<file path=ppt/slides/slide4.xml><?xml version="1.0" encoding="utf-8"?>
 <p:sld xmlns:a="http://schemas.openxmlformats.org/drawingml/2006/main" xmlns:r="http://schemas.openxmlformats.org/officeDocument/2006/relationships" xmlns:p="http://schemas.openxmlformats.org/presentationml/2006/main">
   <p:cSld>
     <p:spTree>
@@ -37766,7 +35434,7 @@
             <a:avLst/>
           </a:prstGeom>
           <a:solidFill>
-            <a:srgbClr val="F4F2ED"/>
+            <a:srgbClr val="FFFFFF"/>
           </a:solidFill>
           <a:ln>
             <a:noFill/>
@@ -37798,14 +35466,59 @@
       </p:sp>
       <p:sp>
         <p:nvSpPr>
-          <p:cNvPr id="3" name="Rectangle 2"/>
+          <p:cNvPr id="3" name="TextBox 2"/>
+          <p:cNvSpPr txBox="1"/>
+          <p:nvPr/>
+        </p:nvSpPr>
+        <p:spPr>
+          <a:xfrm>
+            <a:off x="777240" y="475488"/>
+            <a:ext cx="10637215" cy="237744"/>
+          </a:xfrm>
+          <a:prstGeom prst="rect">
+            <a:avLst/>
+          </a:prstGeom>
+          <a:noFill/>
+        </p:spPr>
+        <p:txBody>
+          <a:bodyPr wrap="square" lIns="0" tIns="0" rIns="0" bIns="0">
+            <a:spAutoFit/>
+          </a:bodyPr>
+          <a:lstStyle/>
+          <a:p>
+            <a:pPr algn="l">
+              <a:lnSpc>
+                <a:spcPct val="122000"/>
+              </a:lnSpc>
+              <a:spcBef>
+                <a:spcPts val="0"/>
+              </a:spcBef>
+              <a:spcAft>
+                <a:spcPts val="0"/>
+              </a:spcAft>
+            </a:pPr>
+            <a:r>
+              <a:rPr sz="1050" b="1">
+                <a:solidFill>
+                  <a:srgbClr val="8C2F39"/>
+                </a:solidFill>
+                <a:latin typeface="Arial"/>
+              </a:rPr>
+              <a:t>LOS DATOS DE PARTIDA</a:t>
+            </a:r>
+          </a:p>
+        </p:txBody>
+      </p:sp>
+      <p:sp>
+        <p:nvSpPr>
+          <p:cNvPr id="4" name="Rectangle 3"/>
           <p:cNvSpPr/>
           <p:nvPr/>
         </p:nvSpPr>
         <p:spPr>
           <a:xfrm>
-            <a:off x="0" y="0"/>
-            <a:ext cx="114300" cy="6858000"/>
+            <a:off x="777240" y="768096"/>
+            <a:ext cx="502920" cy="30480"/>
           </a:xfrm>
           <a:prstGeom prst="rect">
             <a:avLst/>
@@ -37843,14 +35556,14 @@
       </p:sp>
       <p:sp>
         <p:nvSpPr>
-          <p:cNvPr id="4" name="TextBox 3"/>
+          <p:cNvPr id="5" name="TextBox 4"/>
           <p:cNvSpPr txBox="1"/>
           <p:nvPr/>
         </p:nvSpPr>
         <p:spPr>
           <a:xfrm>
-            <a:off x="777240" y="2651760"/>
-            <a:ext cx="9144000" cy="914400"/>
+            <a:off x="777240" y="914400"/>
+            <a:ext cx="10637215" cy="445770"/>
           </a:xfrm>
           <a:prstGeom prst="rect">
             <a:avLst/>
@@ -37865,52 +35578,1165 @@
           <a:p>
             <a:pPr algn="l">
               <a:lnSpc>
-                <a:spcPct val="105000"/>
+                <a:spcPct val="106000"/>
               </a:lnSpc>
               <a:spcBef>
                 <a:spcPts val="0"/>
               </a:spcBef>
               <a:spcAft>
-                <a:spcPts val="1000"/>
+                <a:spcPts val="0"/>
               </a:spcAft>
             </a:pPr>
             <a:r>
-              <a:rPr sz="3400" b="1">
+              <a:rPr sz="2700" b="1">
                 <a:solidFill>
                   <a:srgbClr val="17150F"/>
                 </a:solidFill>
                 <a:latin typeface="Arial"/>
               </a:rPr>
-              <a:t>La entrega</a:t>
-            </a:r>
-          </a:p>
+              <a:t>Cinco tablas, trece semanas, ciento sesenta series</a:t>
+            </a:r>
+          </a:p>
+        </p:txBody>
+      </p:sp>
+      <p:graphicFrame>
+        <p:nvGraphicFramePr>
+          <p:cNvPr id="6" name="Table 5"/>
+          <p:cNvGraphicFramePr>
+            <a:graphicFrameLocks noGrp="1"/>
+          </p:cNvGraphicFramePr>
+          <p:nvPr/>
+        </p:nvGraphicFramePr>
+        <p:xfrm>
+          <a:off x="777240" y="1506474"/>
+          <a:ext cx="10637214" cy="2267712"/>
+        </p:xfrm>
+        <a:graphic>
+          <a:graphicData uri="http://schemas.openxmlformats.org/drawingml/2006/table">
+            <a:tbl>
+              <a:tblPr bandRow="1">
+                <a:tableStyleId>{5C22544A-7EE6-4342-B048-85BDC9FD1C3A}</a:tableStyleId>
+              </a:tblPr>
+              <a:tblGrid>
+                <a:gridCol w="2765675">
+                  <a:extLst>
+                    <a:ext uri="{9D8B030D-6E8A-4147-A177-3AD203B41FA5}">
+                      <a16:colId xmlns:a16="http://schemas.microsoft.com/office/drawing/2014/main" val="20000"/>
+                    </a:ext>
+                  </a:extLst>
+                </a:gridCol>
+                <a:gridCol w="4254886">
+                  <a:extLst>
+                    <a:ext uri="{9D8B030D-6E8A-4147-A177-3AD203B41FA5}">
+                      <a16:colId xmlns:a16="http://schemas.microsoft.com/office/drawing/2014/main" val="20001"/>
+                    </a:ext>
+                  </a:extLst>
+                </a:gridCol>
+                <a:gridCol w="3616653">
+                  <a:extLst>
+                    <a:ext uri="{9D8B030D-6E8A-4147-A177-3AD203B41FA5}">
+                      <a16:colId xmlns:a16="http://schemas.microsoft.com/office/drawing/2014/main" val="20002"/>
+                    </a:ext>
+                  </a:extLst>
+                </a:gridCol>
+              </a:tblGrid>
+              <a:tr h="347472">
+                <a:tc>
+                  <a:txBody>
+                    <a:bodyPr/>
+                    <a:lstStyle/>
+                    <a:p>
+                      <a:pPr algn="l"/>
+                      <a:r>
+                        <a:rPr sz="1100" b="1">
+                          <a:solidFill>
+                            <a:srgbClr val="8B8478"/>
+                          </a:solidFill>
+                          <a:latin typeface="Arial"/>
+                        </a:rPr>
+                        <a:t>Tabla</a:t>
+                      </a:r>
+                    </a:p>
+                  </a:txBody>
+                  <a:tcPr marL="82296" marR="82296" anchor="ctr">
+                    <a:solidFill>
+                      <a:srgbClr val="F4F2ED"/>
+                    </a:solidFill>
+                  </a:tcPr>
+                </a:tc>
+                <a:tc>
+                  <a:txBody>
+                    <a:bodyPr/>
+                    <a:lstStyle/>
+                    <a:p>
+                      <a:pPr algn="r"/>
+                      <a:r>
+                        <a:rPr sz="1100" b="1">
+                          <a:solidFill>
+                            <a:srgbClr val="8B8478"/>
+                          </a:solidFill>
+                          <a:latin typeface="Arial"/>
+                        </a:rPr>
+                        <a:t>Contenido</a:t>
+                      </a:r>
+                    </a:p>
+                  </a:txBody>
+                  <a:tcPr marL="82296" marR="82296" anchor="ctr">
+                    <a:solidFill>
+                      <a:srgbClr val="F4F2ED"/>
+                    </a:solidFill>
+                  </a:tcPr>
+                </a:tc>
+                <a:tc>
+                  <a:txBody>
+                    <a:bodyPr/>
+                    <a:lstStyle/>
+                    <a:p>
+                      <a:pPr algn="r"/>
+                      <a:r>
+                        <a:rPr sz="1100" b="1">
+                          <a:solidFill>
+                            <a:srgbClr val="8B8478"/>
+                          </a:solidFill>
+                          <a:latin typeface="Arial"/>
+                        </a:rPr>
+                        <a:t>Uso en el proyecto</a:t>
+                      </a:r>
+                    </a:p>
+                  </a:txBody>
+                  <a:tcPr marL="82296" marR="82296" anchor="ctr">
+                    <a:solidFill>
+                      <a:srgbClr val="F4F2ED"/>
+                    </a:solidFill>
+                  </a:tcPr>
+                </a:tc>
+                <a:extLst>
+                  <a:ext uri="{0D108BD9-81ED-4DB2-BD59-A6C34878D82A}">
+                    <a16:rowId xmlns:a16="http://schemas.microsoft.com/office/drawing/2014/main" val="10000"/>
+                  </a:ext>
+                </a:extLst>
+              </a:tr>
+              <a:tr h="384048">
+                <a:tc>
+                  <a:txBody>
+                    <a:bodyPr/>
+                    <a:lstStyle/>
+                    <a:p>
+                      <a:pPr algn="l"/>
+                      <a:r>
+                        <a:rPr sz="1250" b="0">
+                          <a:solidFill>
+                            <a:srgbClr val="17150F"/>
+                          </a:solidFill>
+                          <a:latin typeface="Arial"/>
+                        </a:rPr>
+                        <a:t>ventas_historicas</a:t>
+                      </a:r>
+                    </a:p>
+                  </a:txBody>
+                  <a:tcPr marL="82296" marR="82296" anchor="ctr">
+                    <a:solidFill>
+                      <a:srgbClr val="FFFFFF"/>
+                    </a:solidFill>
+                  </a:tcPr>
+                </a:tc>
+                <a:tc>
+                  <a:txBody>
+                    <a:bodyPr/>
+                    <a:lstStyle/>
+                    <a:p>
+                      <a:pPr algn="r"/>
+                      <a:r>
+                        <a:rPr sz="1250" b="0">
+                          <a:solidFill>
+                            <a:srgbClr val="555045"/>
+                          </a:solidFill>
+                          <a:latin typeface="Arial"/>
+                        </a:rPr>
+                        <a:t>Ventas diarias por tienda y producto</a:t>
+                      </a:r>
+                    </a:p>
+                  </a:txBody>
+                  <a:tcPr marL="82296" marR="82296" anchor="ctr">
+                    <a:solidFill>
+                      <a:srgbClr val="FFFFFF"/>
+                    </a:solidFill>
+                  </a:tcPr>
+                </a:tc>
+                <a:tc>
+                  <a:txBody>
+                    <a:bodyPr/>
+                    <a:lstStyle/>
+                    <a:p>
+                      <a:pPr algn="r"/>
+                      <a:r>
+                        <a:rPr sz="1250" b="0">
+                          <a:solidFill>
+                            <a:srgbClr val="555045"/>
+                          </a:solidFill>
+                          <a:latin typeface="Arial"/>
+                        </a:rPr>
+                        <a:t>Objetivo a predecir</a:t>
+                      </a:r>
+                    </a:p>
+                  </a:txBody>
+                  <a:tcPr marL="82296" marR="82296" anchor="ctr">
+                    <a:solidFill>
+                      <a:srgbClr val="FFFFFF"/>
+                    </a:solidFill>
+                  </a:tcPr>
+                </a:tc>
+                <a:extLst>
+                  <a:ext uri="{0D108BD9-81ED-4DB2-BD59-A6C34878D82A}">
+                    <a16:rowId xmlns:a16="http://schemas.microsoft.com/office/drawing/2014/main" val="10001"/>
+                  </a:ext>
+                </a:extLst>
+              </a:tr>
+              <a:tr h="384048">
+                <a:tc>
+                  <a:txBody>
+                    <a:bodyPr/>
+                    <a:lstStyle/>
+                    <a:p>
+                      <a:pPr algn="l"/>
+                      <a:r>
+                        <a:rPr sz="1250" b="0">
+                          <a:solidFill>
+                            <a:srgbClr val="17150F"/>
+                          </a:solidFill>
+                          <a:latin typeface="Arial"/>
+                        </a:rPr>
+                        <a:t>catalogo_productos</a:t>
+                      </a:r>
+                    </a:p>
+                  </a:txBody>
+                  <a:tcPr marL="82296" marR="82296" anchor="ctr">
+                    <a:solidFill>
+                      <a:srgbClr val="FFFFFF"/>
+                    </a:solidFill>
+                  </a:tcPr>
+                </a:tc>
+                <a:tc>
+                  <a:txBody>
+                    <a:bodyPr/>
+                    <a:lstStyle/>
+                    <a:p>
+                      <a:pPr algn="r"/>
+                      <a:r>
+                        <a:rPr sz="1250" b="0">
+                          <a:solidFill>
+                            <a:srgbClr val="555045"/>
+                          </a:solidFill>
+                          <a:latin typeface="Arial"/>
+                        </a:rPr>
+                        <a:t>Precio, coste unitario y almacenaje</a:t>
+                      </a:r>
+                    </a:p>
+                  </a:txBody>
+                  <a:tcPr marL="82296" marR="82296" anchor="ctr">
+                    <a:solidFill>
+                      <a:srgbClr val="FFFFFF"/>
+                    </a:solidFill>
+                  </a:tcPr>
+                </a:tc>
+                <a:tc>
+                  <a:txBody>
+                    <a:bodyPr/>
+                    <a:lstStyle/>
+                    <a:p>
+                      <a:pPr algn="r"/>
+                      <a:r>
+                        <a:rPr sz="1250" b="0">
+                          <a:solidFill>
+                            <a:srgbClr val="555045"/>
+                          </a:solidFill>
+                          <a:latin typeface="Arial"/>
+                        </a:rPr>
+                        <a:t>Calcula el nivel de servicio</a:t>
+                      </a:r>
+                    </a:p>
+                  </a:txBody>
+                  <a:tcPr marL="82296" marR="82296" anchor="ctr">
+                    <a:solidFill>
+                      <a:srgbClr val="FFFFFF"/>
+                    </a:solidFill>
+                  </a:tcPr>
+                </a:tc>
+                <a:extLst>
+                  <a:ext uri="{0D108BD9-81ED-4DB2-BD59-A6C34878D82A}">
+                    <a16:rowId xmlns:a16="http://schemas.microsoft.com/office/drawing/2014/main" val="10002"/>
+                  </a:ext>
+                </a:extLst>
+              </a:tr>
+              <a:tr h="384048">
+                <a:tc>
+                  <a:txBody>
+                    <a:bodyPr/>
+                    <a:lstStyle/>
+                    <a:p>
+                      <a:pPr algn="l"/>
+                      <a:r>
+                        <a:rPr sz="1250" b="0">
+                          <a:solidFill>
+                            <a:srgbClr val="17150F"/>
+                          </a:solidFill>
+                          <a:latin typeface="Arial"/>
+                        </a:rPr>
+                        <a:t>inventario_actual</a:t>
+                      </a:r>
+                    </a:p>
+                  </a:txBody>
+                  <a:tcPr marL="82296" marR="82296" anchor="ctr">
+                    <a:solidFill>
+                      <a:srgbClr val="FFFFFF"/>
+                    </a:solidFill>
+                  </a:tcPr>
+                </a:tc>
+                <a:tc>
+                  <a:txBody>
+                    <a:bodyPr/>
+                    <a:lstStyle/>
+                    <a:p>
+                      <a:pPr algn="r"/>
+                      <a:r>
+                        <a:rPr sz="1250" b="0">
+                          <a:solidFill>
+                            <a:srgbClr val="555045"/>
+                          </a:solidFill>
+                          <a:latin typeface="Arial"/>
+                        </a:rPr>
+                        <a:t>Stock disponible por serie</a:t>
+                      </a:r>
+                    </a:p>
+                  </a:txBody>
+                  <a:tcPr marL="82296" marR="82296" anchor="ctr">
+                    <a:solidFill>
+                      <a:srgbClr val="FFFFFF"/>
+                    </a:solidFill>
+                  </a:tcPr>
+                </a:tc>
+                <a:tc>
+                  <a:txBody>
+                    <a:bodyPr/>
+                    <a:lstStyle/>
+                    <a:p>
+                      <a:pPr algn="r"/>
+                      <a:r>
+                        <a:rPr sz="1250" b="0">
+                          <a:solidFill>
+                            <a:srgbClr val="555045"/>
+                          </a:solidFill>
+                          <a:latin typeface="Arial"/>
+                        </a:rPr>
+                        <a:t>Se resta del objetivo</a:t>
+                      </a:r>
+                    </a:p>
+                  </a:txBody>
+                  <a:tcPr marL="82296" marR="82296" anchor="ctr">
+                    <a:solidFill>
+                      <a:srgbClr val="FFFFFF"/>
+                    </a:solidFill>
+                  </a:tcPr>
+                </a:tc>
+                <a:extLst>
+                  <a:ext uri="{0D108BD9-81ED-4DB2-BD59-A6C34878D82A}">
+                    <a16:rowId xmlns:a16="http://schemas.microsoft.com/office/drawing/2014/main" val="10003"/>
+                  </a:ext>
+                </a:extLst>
+              </a:tr>
+              <a:tr h="384048">
+                <a:tc>
+                  <a:txBody>
+                    <a:bodyPr/>
+                    <a:lstStyle/>
+                    <a:p>
+                      <a:pPr algn="l"/>
+                      <a:r>
+                        <a:rPr sz="1250" b="0">
+                          <a:solidFill>
+                            <a:srgbClr val="17150F"/>
+                          </a:solidFill>
+                          <a:latin typeface="Arial"/>
+                        </a:rPr>
+                        <a:t>maestro_tiendas</a:t>
+                      </a:r>
+                    </a:p>
+                  </a:txBody>
+                  <a:tcPr marL="82296" marR="82296" anchor="ctr">
+                    <a:solidFill>
+                      <a:srgbClr val="FFFFFF"/>
+                    </a:solidFill>
+                  </a:tcPr>
+                </a:tc>
+                <a:tc>
+                  <a:txBody>
+                    <a:bodyPr/>
+                    <a:lstStyle/>
+                    <a:p>
+                      <a:pPr algn="r"/>
+                      <a:r>
+                        <a:rPr sz="1250" b="0">
+                          <a:solidFill>
+                            <a:srgbClr val="555045"/>
+                          </a:solidFill>
+                          <a:latin typeface="Arial"/>
+                        </a:rPr>
+                        <a:t>Ciudad y superficie</a:t>
+                      </a:r>
+                    </a:p>
+                  </a:txBody>
+                  <a:tcPr marL="82296" marR="82296" anchor="ctr">
+                    <a:solidFill>
+                      <a:srgbClr val="FFFFFF"/>
+                    </a:solidFill>
+                  </a:tcPr>
+                </a:tc>
+                <a:tc>
+                  <a:txBody>
+                    <a:bodyPr/>
+                    <a:lstStyle/>
+                    <a:p>
+                      <a:pPr algn="r"/>
+                      <a:r>
+                        <a:rPr sz="1250" b="0">
+                          <a:solidFill>
+                            <a:srgbClr val="555045"/>
+                          </a:solidFill>
+                          <a:latin typeface="Arial"/>
+                        </a:rPr>
+                        <a:t>Superficie entra al modelo, ciudad no</a:t>
+                      </a:r>
+                    </a:p>
+                  </a:txBody>
+                  <a:tcPr marL="82296" marR="82296" anchor="ctr">
+                    <a:solidFill>
+                      <a:srgbClr val="FFFFFF"/>
+                    </a:solidFill>
+                  </a:tcPr>
+                </a:tc>
+                <a:extLst>
+                  <a:ext uri="{0D108BD9-81ED-4DB2-BD59-A6C34878D82A}">
+                    <a16:rowId xmlns:a16="http://schemas.microsoft.com/office/drawing/2014/main" val="10004"/>
+                  </a:ext>
+                </a:extLst>
+              </a:tr>
+              <a:tr h="384048">
+                <a:tc>
+                  <a:txBody>
+                    <a:bodyPr/>
+                    <a:lstStyle/>
+                    <a:p>
+                      <a:pPr algn="l"/>
+                      <a:r>
+                        <a:rPr sz="1250" b="0">
+                          <a:solidFill>
+                            <a:srgbClr val="17150F"/>
+                          </a:solidFill>
+                          <a:latin typeface="Arial"/>
+                        </a:rPr>
+                        <a:t>ground_truth_trends</a:t>
+                      </a:r>
+                    </a:p>
+                  </a:txBody>
+                  <a:tcPr marL="82296" marR="82296" anchor="ctr">
+                    <a:solidFill>
+                      <a:srgbClr val="FFFFFF"/>
+                    </a:solidFill>
+                  </a:tcPr>
+                </a:tc>
+                <a:tc>
+                  <a:txBody>
+                    <a:bodyPr/>
+                    <a:lstStyle/>
+                    <a:p>
+                      <a:pPr algn="r"/>
+                      <a:r>
+                        <a:rPr sz="1250" b="0">
+                          <a:solidFill>
+                            <a:srgbClr val="555045"/>
+                          </a:solidFill>
+                          <a:latin typeface="Arial"/>
+                        </a:rPr>
+                        <a:t>Patrón real de cada serie</a:t>
+                      </a:r>
+                    </a:p>
+                  </a:txBody>
+                  <a:tcPr marL="82296" marR="82296" anchor="ctr">
+                    <a:solidFill>
+                      <a:srgbClr val="FFFFFF"/>
+                    </a:solidFill>
+                  </a:tcPr>
+                </a:tc>
+                <a:tc>
+                  <a:txBody>
+                    <a:bodyPr/>
+                    <a:lstStyle/>
+                    <a:p>
+                      <a:pPr algn="r"/>
+                      <a:r>
+                        <a:rPr sz="1250" b="0">
+                          <a:solidFill>
+                            <a:srgbClr val="555045"/>
+                          </a:solidFill>
+                          <a:latin typeface="Arial"/>
+                        </a:rPr>
+                        <a:t>Solo contraste, nunca predictor</a:t>
+                      </a:r>
+                    </a:p>
+                  </a:txBody>
+                  <a:tcPr marL="82296" marR="82296" anchor="ctr">
+                    <a:solidFill>
+                      <a:srgbClr val="FFFFFF"/>
+                    </a:solidFill>
+                  </a:tcPr>
+                </a:tc>
+                <a:extLst>
+                  <a:ext uri="{0D108BD9-81ED-4DB2-BD59-A6C34878D82A}">
+                    <a16:rowId xmlns:a16="http://schemas.microsoft.com/office/drawing/2014/main" val="10005"/>
+                  </a:ext>
+                </a:extLst>
+              </a:tr>
+            </a:tbl>
+          </a:graphicData>
+        </a:graphic>
+      </p:graphicFrame>
+      <p:sp>
+        <p:nvSpPr>
+          <p:cNvPr id="7" name="Rectangle 6"/>
+          <p:cNvSpPr/>
+          <p:nvPr/>
+        </p:nvSpPr>
+        <p:spPr>
+          <a:xfrm>
+            <a:off x="777240" y="4085082"/>
+            <a:ext cx="2549575" cy="1051560"/>
+          </a:xfrm>
+          <a:prstGeom prst="rect">
+            <a:avLst/>
+          </a:prstGeom>
+          <a:solidFill>
+            <a:srgbClr val="FFFFFF"/>
+          </a:solidFill>
+          <a:ln w="9525">
+            <a:solidFill>
+              <a:srgbClr val="DCD8CF"/>
+            </a:solidFill>
+          </a:ln>
+          <a:effectLst/>
+        </p:spPr>
+        <p:style>
+          <a:lnRef idx="1">
+            <a:schemeClr val="accent1"/>
+          </a:lnRef>
+          <a:fillRef idx="3">
+            <a:schemeClr val="accent1"/>
+          </a:fillRef>
+          <a:effectRef idx="2">
+            <a:schemeClr val="accent1"/>
+          </a:effectRef>
+          <a:fontRef idx="minor">
+            <a:schemeClr val="lt1"/>
+          </a:fontRef>
+        </p:style>
+        <p:txBody>
+          <a:bodyPr rtlCol="0" anchor="ctr"/>
+          <a:lstStyle/>
+          <a:p>
+            <a:pPr algn="ctr"/>
+            <a:endParaRPr/>
+          </a:p>
+        </p:txBody>
+      </p:sp>
+      <p:sp>
+        <p:nvSpPr>
+          <p:cNvPr id="8" name="TextBox 7"/>
+          <p:cNvSpPr txBox="1"/>
+          <p:nvPr/>
+        </p:nvSpPr>
+        <p:spPr>
+          <a:xfrm>
+            <a:off x="941832" y="4213098"/>
+            <a:ext cx="2220391" cy="868680"/>
+          </a:xfrm>
+          <a:prstGeom prst="rect">
+            <a:avLst/>
+          </a:prstGeom>
+          <a:noFill/>
+        </p:spPr>
+        <p:txBody>
+          <a:bodyPr wrap="square" lIns="0" tIns="0" rIns="0" bIns="0">
+            <a:spAutoFit/>
+          </a:bodyPr>
+          <a:lstStyle/>
           <a:p>
             <a:pPr algn="l">
               <a:lnSpc>
-                <a:spcPct val="130000"/>
+                <a:spcPct val="122000"/>
               </a:lnSpc>
               <a:spcBef>
                 <a:spcPts val="0"/>
               </a:spcBef>
               <a:spcAft>
-                <a:spcPts val="600"/>
+                <a:spcPts val="300"/>
               </a:spcAft>
             </a:pPr>
             <a:r>
-              <a:rPr sz="1550" b="0">
-                <a:solidFill>
-                  <a:srgbClr val="555045"/>
-                </a:solidFill>
-                <a:latin typeface="Arial"/>
-              </a:rPr>
-              <a:t>Paso 16 · El pedido de la semana siguiente</a:t>
-            </a:r>
-          </a:p>
-        </p:txBody>
-      </p:sp>
-      <p:sp>
-        <p:nvSpPr>
-          <p:cNvPr id="5" name="TextBox 4"/>
+              <a:rPr sz="950" b="1">
+                <a:solidFill>
+                  <a:srgbClr val="8B8478"/>
+                </a:solidFill>
+                <a:latin typeface="Arial"/>
+              </a:rPr>
+              <a:t>OBSERVACIONES DIARIAS</a:t>
+            </a:r>
+          </a:p>
+          <a:p>
+            <a:pPr algn="l">
+              <a:lnSpc>
+                <a:spcPct val="100000"/>
+              </a:lnSpc>
+              <a:spcBef>
+                <a:spcPts val="0"/>
+              </a:spcBef>
+              <a:spcAft>
+                <a:spcPts val="300"/>
+              </a:spcAft>
+            </a:pPr>
+            <a:r>
+              <a:rPr sz="2500" b="1">
+                <a:solidFill>
+                  <a:srgbClr val="17150F"/>
+                </a:solidFill>
+                <a:latin typeface="Arial"/>
+              </a:rPr>
+              <a:t>14.560</a:t>
+            </a:r>
+          </a:p>
+          <a:p>
+            <a:pPr algn="l">
+              <a:lnSpc>
+                <a:spcPct val="120000"/>
+              </a:lnSpc>
+              <a:spcBef>
+                <a:spcPts val="0"/>
+              </a:spcBef>
+              <a:spcAft>
+                <a:spcPts val="0"/>
+              </a:spcAft>
+            </a:pPr>
+            <a:r>
+              <a:rPr sz="1050" b="0">
+                <a:solidFill>
+                  <a:srgbClr val="555045"/>
+                </a:solidFill>
+                <a:latin typeface="Arial"/>
+              </a:rPr>
+              <a:t>del 1 de enero al 31 de marzo</a:t>
+            </a:r>
+          </a:p>
+        </p:txBody>
+      </p:sp>
+      <p:sp>
+        <p:nvSpPr>
+          <p:cNvPr id="9" name="Rectangle 8"/>
+          <p:cNvSpPr/>
+          <p:nvPr/>
+        </p:nvSpPr>
+        <p:spPr>
+          <a:xfrm>
+            <a:off x="3473119" y="4085082"/>
+            <a:ext cx="2549575" cy="1051560"/>
+          </a:xfrm>
+          <a:prstGeom prst="rect">
+            <a:avLst/>
+          </a:prstGeom>
+          <a:solidFill>
+            <a:srgbClr val="FFFFFF"/>
+          </a:solidFill>
+          <a:ln w="9525">
+            <a:solidFill>
+              <a:srgbClr val="DCD8CF"/>
+            </a:solidFill>
+          </a:ln>
+          <a:effectLst/>
+        </p:spPr>
+        <p:style>
+          <a:lnRef idx="1">
+            <a:schemeClr val="accent1"/>
+          </a:lnRef>
+          <a:fillRef idx="3">
+            <a:schemeClr val="accent1"/>
+          </a:fillRef>
+          <a:effectRef idx="2">
+            <a:schemeClr val="accent1"/>
+          </a:effectRef>
+          <a:fontRef idx="minor">
+            <a:schemeClr val="lt1"/>
+          </a:fontRef>
+        </p:style>
+        <p:txBody>
+          <a:bodyPr rtlCol="0" anchor="ctr"/>
+          <a:lstStyle/>
+          <a:p>
+            <a:pPr algn="ctr"/>
+            <a:endParaRPr/>
+          </a:p>
+        </p:txBody>
+      </p:sp>
+      <p:sp>
+        <p:nvSpPr>
+          <p:cNvPr id="10" name="TextBox 9"/>
+          <p:cNvSpPr txBox="1"/>
+          <p:nvPr/>
+        </p:nvSpPr>
+        <p:spPr>
+          <a:xfrm>
+            <a:off x="3637711" y="4213098"/>
+            <a:ext cx="2220391" cy="868680"/>
+          </a:xfrm>
+          <a:prstGeom prst="rect">
+            <a:avLst/>
+          </a:prstGeom>
+          <a:noFill/>
+        </p:spPr>
+        <p:txBody>
+          <a:bodyPr wrap="square" lIns="0" tIns="0" rIns="0" bIns="0">
+            <a:spAutoFit/>
+          </a:bodyPr>
+          <a:lstStyle/>
+          <a:p>
+            <a:pPr algn="l">
+              <a:lnSpc>
+                <a:spcPct val="122000"/>
+              </a:lnSpc>
+              <a:spcBef>
+                <a:spcPts val="0"/>
+              </a:spcBef>
+              <a:spcAft>
+                <a:spcPts val="300"/>
+              </a:spcAft>
+            </a:pPr>
+            <a:r>
+              <a:rPr sz="950" b="1">
+                <a:solidFill>
+                  <a:srgbClr val="8B8478"/>
+                </a:solidFill>
+                <a:latin typeface="Arial"/>
+              </a:rPr>
+              <a:t>PANEL SEMANAL</a:t>
+            </a:r>
+          </a:p>
+          <a:p>
+            <a:pPr algn="l">
+              <a:lnSpc>
+                <a:spcPct val="100000"/>
+              </a:lnSpc>
+              <a:spcBef>
+                <a:spcPts val="0"/>
+              </a:spcBef>
+              <a:spcAft>
+                <a:spcPts val="300"/>
+              </a:spcAft>
+            </a:pPr>
+            <a:r>
+              <a:rPr sz="2500" b="1">
+                <a:solidFill>
+                  <a:srgbClr val="17150F"/>
+                </a:solidFill>
+                <a:latin typeface="Arial"/>
+              </a:rPr>
+              <a:t>2.080</a:t>
+            </a:r>
+          </a:p>
+          <a:p>
+            <a:pPr algn="l">
+              <a:lnSpc>
+                <a:spcPct val="120000"/>
+              </a:lnSpc>
+              <a:spcBef>
+                <a:spcPts val="0"/>
+              </a:spcBef>
+              <a:spcAft>
+                <a:spcPts val="0"/>
+              </a:spcAft>
+            </a:pPr>
+            <a:r>
+              <a:rPr sz="1050" b="0">
+                <a:solidFill>
+                  <a:srgbClr val="555045"/>
+                </a:solidFill>
+                <a:latin typeface="Arial"/>
+              </a:rPr>
+              <a:t>160 series × 13 semanas</a:t>
+            </a:r>
+          </a:p>
+        </p:txBody>
+      </p:sp>
+      <p:sp>
+        <p:nvSpPr>
+          <p:cNvPr id="11" name="Rectangle 10"/>
+          <p:cNvSpPr/>
+          <p:nvPr/>
+        </p:nvSpPr>
+        <p:spPr>
+          <a:xfrm>
+            <a:off x="6168998" y="4085082"/>
+            <a:ext cx="2549575" cy="1051560"/>
+          </a:xfrm>
+          <a:prstGeom prst="rect">
+            <a:avLst/>
+          </a:prstGeom>
+          <a:solidFill>
+            <a:srgbClr val="FFFFFF"/>
+          </a:solidFill>
+          <a:ln w="9525">
+            <a:solidFill>
+              <a:srgbClr val="DCD8CF"/>
+            </a:solidFill>
+          </a:ln>
+          <a:effectLst/>
+        </p:spPr>
+        <p:style>
+          <a:lnRef idx="1">
+            <a:schemeClr val="accent1"/>
+          </a:lnRef>
+          <a:fillRef idx="3">
+            <a:schemeClr val="accent1"/>
+          </a:fillRef>
+          <a:effectRef idx="2">
+            <a:schemeClr val="accent1"/>
+          </a:effectRef>
+          <a:fontRef idx="minor">
+            <a:schemeClr val="lt1"/>
+          </a:fontRef>
+        </p:style>
+        <p:txBody>
+          <a:bodyPr rtlCol="0" anchor="ctr"/>
+          <a:lstStyle/>
+          <a:p>
+            <a:pPr algn="ctr"/>
+            <a:endParaRPr/>
+          </a:p>
+        </p:txBody>
+      </p:sp>
+      <p:sp>
+        <p:nvSpPr>
+          <p:cNvPr id="12" name="TextBox 11"/>
+          <p:cNvSpPr txBox="1"/>
+          <p:nvPr/>
+        </p:nvSpPr>
+        <p:spPr>
+          <a:xfrm>
+            <a:off x="6333590" y="4213098"/>
+            <a:ext cx="2220391" cy="868680"/>
+          </a:xfrm>
+          <a:prstGeom prst="rect">
+            <a:avLst/>
+          </a:prstGeom>
+          <a:noFill/>
+        </p:spPr>
+        <p:txBody>
+          <a:bodyPr wrap="square" lIns="0" tIns="0" rIns="0" bIns="0">
+            <a:spAutoFit/>
+          </a:bodyPr>
+          <a:lstStyle/>
+          <a:p>
+            <a:pPr algn="l">
+              <a:lnSpc>
+                <a:spcPct val="122000"/>
+              </a:lnSpc>
+              <a:spcBef>
+                <a:spcPts val="0"/>
+              </a:spcBef>
+              <a:spcAft>
+                <a:spcPts val="300"/>
+              </a:spcAft>
+            </a:pPr>
+            <a:r>
+              <a:rPr sz="950" b="1">
+                <a:solidFill>
+                  <a:srgbClr val="8B8478"/>
+                </a:solidFill>
+                <a:latin typeface="Arial"/>
+              </a:rPr>
+              <a:t>SERIES ACTIVAS</a:t>
+            </a:r>
+          </a:p>
+          <a:p>
+            <a:pPr algn="l">
+              <a:lnSpc>
+                <a:spcPct val="100000"/>
+              </a:lnSpc>
+              <a:spcBef>
+                <a:spcPts val="0"/>
+              </a:spcBef>
+              <a:spcAft>
+                <a:spcPts val="300"/>
+              </a:spcAft>
+            </a:pPr>
+            <a:r>
+              <a:rPr sz="2500" b="1">
+                <a:solidFill>
+                  <a:srgbClr val="17150F"/>
+                </a:solidFill>
+                <a:latin typeface="Arial"/>
+              </a:rPr>
+              <a:t>160</a:t>
+            </a:r>
+          </a:p>
+          <a:p>
+            <a:pPr algn="l">
+              <a:lnSpc>
+                <a:spcPct val="120000"/>
+              </a:lnSpc>
+              <a:spcBef>
+                <a:spcPts val="0"/>
+              </a:spcBef>
+              <a:spcAft>
+                <a:spcPts val="0"/>
+              </a:spcAft>
+            </a:pPr>
+            <a:r>
+              <a:rPr sz="1050" b="0">
+                <a:solidFill>
+                  <a:srgbClr val="555045"/>
+                </a:solidFill>
+                <a:latin typeface="Arial"/>
+              </a:rPr>
+              <a:t>20 tiendas × 8 productos</a:t>
+            </a:r>
+          </a:p>
+        </p:txBody>
+      </p:sp>
+      <p:sp>
+        <p:nvSpPr>
+          <p:cNvPr id="13" name="Rectangle 12"/>
+          <p:cNvSpPr/>
+          <p:nvPr/>
+        </p:nvSpPr>
+        <p:spPr>
+          <a:xfrm>
+            <a:off x="8864877" y="4085082"/>
+            <a:ext cx="2549575" cy="1051560"/>
+          </a:xfrm>
+          <a:prstGeom prst="rect">
+            <a:avLst/>
+          </a:prstGeom>
+          <a:solidFill>
+            <a:srgbClr val="FFFFFF"/>
+          </a:solidFill>
+          <a:ln w="9525">
+            <a:solidFill>
+              <a:srgbClr val="DCD8CF"/>
+            </a:solidFill>
+          </a:ln>
+          <a:effectLst/>
+        </p:spPr>
+        <p:style>
+          <a:lnRef idx="1">
+            <a:schemeClr val="accent1"/>
+          </a:lnRef>
+          <a:fillRef idx="3">
+            <a:schemeClr val="accent1"/>
+          </a:fillRef>
+          <a:effectRef idx="2">
+            <a:schemeClr val="accent1"/>
+          </a:effectRef>
+          <a:fontRef idx="minor">
+            <a:schemeClr val="lt1"/>
+          </a:fontRef>
+        </p:style>
+        <p:txBody>
+          <a:bodyPr rtlCol="0" anchor="ctr"/>
+          <a:lstStyle/>
+          <a:p>
+            <a:pPr algn="ctr"/>
+            <a:endParaRPr/>
+          </a:p>
+        </p:txBody>
+      </p:sp>
+      <p:sp>
+        <p:nvSpPr>
+          <p:cNvPr id="14" name="TextBox 13"/>
+          <p:cNvSpPr txBox="1"/>
+          <p:nvPr/>
+        </p:nvSpPr>
+        <p:spPr>
+          <a:xfrm>
+            <a:off x="9029469" y="4213098"/>
+            <a:ext cx="2220391" cy="868680"/>
+          </a:xfrm>
+          <a:prstGeom prst="rect">
+            <a:avLst/>
+          </a:prstGeom>
+          <a:noFill/>
+        </p:spPr>
+        <p:txBody>
+          <a:bodyPr wrap="square" lIns="0" tIns="0" rIns="0" bIns="0">
+            <a:spAutoFit/>
+          </a:bodyPr>
+          <a:lstStyle/>
+          <a:p>
+            <a:pPr algn="l">
+              <a:lnSpc>
+                <a:spcPct val="122000"/>
+              </a:lnSpc>
+              <a:spcBef>
+                <a:spcPts val="0"/>
+              </a:spcBef>
+              <a:spcAft>
+                <a:spcPts val="300"/>
+              </a:spcAft>
+            </a:pPr>
+            <a:r>
+              <a:rPr sz="950" b="1">
+                <a:solidFill>
+                  <a:srgbClr val="8B8478"/>
+                </a:solidFill>
+                <a:latin typeface="Arial"/>
+              </a:rPr>
+              <a:t>SEMANAS COMPLETAS</a:t>
+            </a:r>
+          </a:p>
+          <a:p>
+            <a:pPr algn="l">
+              <a:lnSpc>
+                <a:spcPct val="100000"/>
+              </a:lnSpc>
+              <a:spcBef>
+                <a:spcPts val="0"/>
+              </a:spcBef>
+              <a:spcAft>
+                <a:spcPts val="300"/>
+              </a:spcAft>
+            </a:pPr>
+            <a:r>
+              <a:rPr sz="2500" b="1">
+                <a:solidFill>
+                  <a:srgbClr val="17150F"/>
+                </a:solidFill>
+                <a:latin typeface="Arial"/>
+              </a:rPr>
+              <a:t>13</a:t>
+            </a:r>
+          </a:p>
+          <a:p>
+            <a:pPr algn="l">
+              <a:lnSpc>
+                <a:spcPct val="120000"/>
+              </a:lnSpc>
+              <a:spcBef>
+                <a:spcPts val="0"/>
+              </a:spcBef>
+              <a:spcAft>
+                <a:spcPts val="0"/>
+              </a:spcAft>
+            </a:pPr>
+            <a:r>
+              <a:rPr sz="1050" b="0">
+                <a:solidFill>
+                  <a:srgbClr val="555045"/>
+                </a:solidFill>
+                <a:latin typeface="Arial"/>
+              </a:rPr>
+              <a:t>sin periodos parciales</a:t>
+            </a:r>
+          </a:p>
+        </p:txBody>
+      </p:sp>
+      <p:sp>
+        <p:nvSpPr>
+          <p:cNvPr id="15" name="Rectangle 14"/>
+          <p:cNvSpPr/>
+          <p:nvPr/>
+        </p:nvSpPr>
+        <p:spPr>
+          <a:xfrm>
+            <a:off x="777240" y="6327648"/>
+            <a:ext cx="10637215" cy="9525"/>
+          </a:xfrm>
+          <a:prstGeom prst="rect">
+            <a:avLst/>
+          </a:prstGeom>
+          <a:solidFill>
+            <a:srgbClr val="DCD8CF"/>
+          </a:solidFill>
+          <a:ln>
+            <a:noFill/>
+          </a:ln>
+          <a:effectLst/>
+        </p:spPr>
+        <p:style>
+          <a:lnRef idx="1">
+            <a:schemeClr val="accent1"/>
+          </a:lnRef>
+          <a:fillRef idx="3">
+            <a:schemeClr val="accent1"/>
+          </a:fillRef>
+          <a:effectRef idx="2">
+            <a:schemeClr val="accent1"/>
+          </a:effectRef>
+          <a:fontRef idx="minor">
+            <a:schemeClr val="lt1"/>
+          </a:fontRef>
+        </p:style>
+        <p:txBody>
+          <a:bodyPr rtlCol="0" anchor="ctr"/>
+          <a:lstStyle/>
+          <a:p>
+            <a:pPr algn="ctr"/>
+            <a:endParaRPr/>
+          </a:p>
+        </p:txBody>
+      </p:sp>
+      <p:sp>
+        <p:nvSpPr>
+          <p:cNvPr id="16" name="TextBox 15"/>
+          <p:cNvSpPr txBox="1"/>
+          <p:nvPr/>
+        </p:nvSpPr>
+        <p:spPr>
+          <a:xfrm>
+            <a:off x="777240" y="6428232"/>
+            <a:ext cx="8686800" cy="274320"/>
+          </a:xfrm>
+          <a:prstGeom prst="rect">
+            <a:avLst/>
+          </a:prstGeom>
+          <a:noFill/>
+        </p:spPr>
+        <p:txBody>
+          <a:bodyPr wrap="square" lIns="0" tIns="0" rIns="0" bIns="0">
+            <a:spAutoFit/>
+          </a:bodyPr>
+          <a:lstStyle/>
+          <a:p>
+            <a:pPr algn="l">
+              <a:lnSpc>
+                <a:spcPct val="122000"/>
+              </a:lnSpc>
+              <a:spcBef>
+                <a:spcPts val="0"/>
+              </a:spcBef>
+              <a:spcAft>
+                <a:spcPts val="0"/>
+              </a:spcAft>
+            </a:pPr>
+            <a:r>
+              <a:rPr sz="950" b="0">
+                <a:solidFill>
+                  <a:srgbClr val="8B8478"/>
+                </a:solidFill>
+                <a:latin typeface="Arial"/>
+              </a:rPr>
+              <a:t>Los datos de partida</a:t>
+            </a:r>
+          </a:p>
+        </p:txBody>
+      </p:sp>
+      <p:sp>
+        <p:nvSpPr>
+          <p:cNvPr id="17" name="TextBox 16"/>
           <p:cNvSpPr txBox="1"/>
           <p:nvPr/>
         </p:nvSpPr>
@@ -37948,7 +36774,7 @@
                 </a:solidFill>
                 <a:latin typeface="Arial"/>
               </a:rPr>
-              <a:t>46</a:t>
+              <a:t>4</a:t>
             </a:r>
           </a:p>
         </p:txBody>
@@ -37961,7 +36787,7 @@
 </p:sld>
 </file>
 
-<file path=ppt/slides/slide42.xml><?xml version="1.0" encoding="utf-8"?>
+<file path=ppt/slides/slide40.xml><?xml version="1.0" encoding="utf-8"?>
 <p:sld xmlns:a="http://schemas.openxmlformats.org/drawingml/2006/main" xmlns:r="http://schemas.openxmlformats.org/officeDocument/2006/relationships" xmlns:p="http://schemas.openxmlformats.org/presentationml/2006/main">
   <p:cSld>
     <p:spTree>
@@ -39854,7 +38680,7 @@
 </p:sld>
 </file>
 
-<file path=ppt/slides/slide43.xml><?xml version="1.0" encoding="utf-8"?>
+<file path=ppt/slides/slide41.xml><?xml version="1.0" encoding="utf-8"?>
 <p:sld xmlns:a="http://schemas.openxmlformats.org/drawingml/2006/main" xmlns:r="http://schemas.openxmlformats.org/officeDocument/2006/relationships" xmlns:p="http://schemas.openxmlformats.org/presentationml/2006/main">
   <p:cSld>
     <p:spTree>
@@ -40678,7 +39504,7 @@
 </p:sld>
 </file>
 
-<file path=ppt/slides/slide44.xml><?xml version="1.0" encoding="utf-8"?>
+<file path=ppt/slides/slide42.xml><?xml version="1.0" encoding="utf-8"?>
 <p:sld xmlns:a="http://schemas.openxmlformats.org/drawingml/2006/main" xmlns:r="http://schemas.openxmlformats.org/officeDocument/2006/relationships" xmlns:p="http://schemas.openxmlformats.org/presentationml/2006/main">
   <p:cSld>
     <p:spTree>
@@ -41543,7 +40369,7 @@
 </p:sld>
 </file>
 
-<file path=ppt/slides/slide45.xml><?xml version="1.0" encoding="utf-8"?>
+<file path=ppt/slides/slide43.xml><?xml version="1.0" encoding="utf-8"?>
 <p:sld xmlns:a="http://schemas.openxmlformats.org/drawingml/2006/main" xmlns:r="http://schemas.openxmlformats.org/officeDocument/2006/relationships" xmlns:p="http://schemas.openxmlformats.org/presentationml/2006/main">
   <p:cSld>
     <p:spTree>
@@ -42519,7 +41345,7 @@
 </p:sld>
 </file>
 
-<file path=ppt/slides/slide46.xml><?xml version="1.0" encoding="utf-8"?>
+<file path=ppt/slides/slide44.xml><?xml version="1.0" encoding="utf-8"?>
 <p:sld xmlns:a="http://schemas.openxmlformats.org/drawingml/2006/main" xmlns:r="http://schemas.openxmlformats.org/officeDocument/2006/relationships" xmlns:p="http://schemas.openxmlformats.org/presentationml/2006/main">
   <p:cSld>
     <p:spTree>
@@ -44188,7 +43014,7 @@
 </p:sld>
 </file>
 
-<file path=ppt/slides/slide47.xml><?xml version="1.0" encoding="utf-8"?>
+<file path=ppt/slides/slide45.xml><?xml version="1.0" encoding="utf-8"?>
 <p:sld xmlns:a="http://schemas.openxmlformats.org/drawingml/2006/main" xmlns:r="http://schemas.openxmlformats.org/officeDocument/2006/relationships" xmlns:p="http://schemas.openxmlformats.org/presentationml/2006/main">
   <p:cSld>
     <p:spTree>

--- a/Presentacion_Caso_A.pptx
+++ b/Presentacion_Caso_A.pptx
@@ -46,10 +46,9 @@
     <p:sldId id="301" r:id="rId40"/>
     <p:sldId id="303" r:id="rId41"/>
     <p:sldId id="304" r:id="rId42"/>
-    <p:sldId id="305" r:id="rId43"/>
-    <p:sldId id="306" r:id="rId44"/>
-    <p:sldId id="307" r:id="rId45"/>
-    <p:sldId id="308" r:id="rId46"/>
+    <p:sldId id="306" r:id="rId43"/>
+    <p:sldId id="307" r:id="rId44"/>
+    <p:sldId id="308" r:id="rId45"/>
   </p:sldIdLst>
   <p:sldSz cx="12192000" cy="6858000"/>
   <p:notesSz cx="6858000" cy="9144000"/>
@@ -30521,11 +30520,17 @@
           <p:cNvGraphicFramePr>
             <a:graphicFrameLocks noGrp="1"/>
           </p:cNvGraphicFramePr>
-          <p:nvPr/>
+          <p:nvPr>
+            <p:extLst>
+              <p:ext uri="{D42A27DB-BD31-4B8C-83A1-F6EECF244321}">
+                <p14:modId xmlns:p14="http://schemas.microsoft.com/office/powerpoint/2010/main" val="1992513278"/>
+              </p:ext>
+            </p:extLst>
+          </p:nvPr>
         </p:nvGraphicFramePr>
         <p:xfrm>
-          <a:off x="777240" y="1990979"/>
-          <a:ext cx="6766559" cy="1207008"/>
+          <a:off x="777240" y="2545713"/>
+          <a:ext cx="5093721" cy="1399503"/>
         </p:xfrm>
         <a:graphic>
           <a:graphicData uri="http://schemas.openxmlformats.org/drawingml/2006/table">
@@ -30534,21 +30539,21 @@
                 <a:tableStyleId>{5C22544A-7EE6-4342-B048-85BDC9FD1C3A}</a:tableStyleId>
               </a:tblPr>
               <a:tblGrid>
-                <a:gridCol w="2841955">
+                <a:gridCol w="2139363">
                   <a:extLst>
                     <a:ext uri="{9D8B030D-6E8A-4147-A177-3AD203B41FA5}">
                       <a16:colId xmlns:a16="http://schemas.microsoft.com/office/drawing/2014/main" val="20000"/>
                     </a:ext>
                   </a:extLst>
                 </a:gridCol>
-                <a:gridCol w="1759305">
+                <a:gridCol w="1324367">
                   <a:extLst>
                     <a:ext uri="{9D8B030D-6E8A-4147-A177-3AD203B41FA5}">
                       <a16:colId xmlns:a16="http://schemas.microsoft.com/office/drawing/2014/main" val="20001"/>
                     </a:ext>
                   </a:extLst>
                 </a:gridCol>
-                <a:gridCol w="2165299">
+                <a:gridCol w="1629991">
                   <a:extLst>
                     <a:ext uri="{9D8B030D-6E8A-4147-A177-3AD203B41FA5}">
                       <a16:colId xmlns:a16="http://schemas.microsoft.com/office/drawing/2014/main" val="20002"/>
@@ -30556,14 +30561,14 @@
                   </a:extLst>
                 </a:gridCol>
               </a:tblGrid>
-              <a:tr h="347472">
+              <a:tr h="457200">
                 <a:tc>
                   <a:txBody>
                     <a:bodyPr/>
                     <a:lstStyle/>
                     <a:p>
                       <a:pPr algn="l"/>
-                      <a:endParaRPr/>
+                      <a:endParaRPr dirty="0"/>
                     </a:p>
                   </a:txBody>
                   <a:tcPr marL="82296" marR="82296" anchor="ctr">
@@ -30577,16 +30582,49 @@
                     <a:bodyPr/>
                     <a:lstStyle/>
                     <a:p>
-                      <a:pPr algn="r"/>
+                      <a:pPr algn="ctr"/>
                       <a:r>
-                        <a:rPr sz="1150" b="1">
+                        <a:rPr sz="1150" b="1" dirty="0" err="1">
                           <a:solidFill>
                             <a:srgbClr val="8B8478"/>
                           </a:solidFill>
                           <a:latin typeface="Arial"/>
                         </a:rPr>
-                        <a:t>Pedir el centro</a:t>
+                        <a:t>Pedir</a:t>
                       </a:r>
+                      <a:r>
+                        <a:rPr sz="1150" b="1" dirty="0">
+                          <a:solidFill>
+                            <a:srgbClr val="8B8478"/>
+                          </a:solidFill>
+                          <a:latin typeface="Arial"/>
+                        </a:rPr>
+                        <a:t> el </a:t>
+                      </a:r>
+                      <a:r>
+                        <a:rPr sz="1150" b="1" dirty="0" err="1">
+                          <a:solidFill>
+                            <a:srgbClr val="8B8478"/>
+                          </a:solidFill>
+                          <a:latin typeface="Arial"/>
+                        </a:rPr>
+                        <a:t>centro</a:t>
+                      </a:r>
+                      <a:r>
+                        <a:rPr lang="es-419" sz="1150" b="1" dirty="0">
+                          <a:solidFill>
+                            <a:srgbClr val="8B8478"/>
+                          </a:solidFill>
+                          <a:latin typeface="Arial"/>
+                        </a:rPr>
+                        <a:t> (0.50) </a:t>
+                      </a:r>
+                      <a:endParaRPr sz="1150" b="1" dirty="0">
+                        <a:solidFill>
+                          <a:srgbClr val="8B8478"/>
+                        </a:solidFill>
+                        <a:latin typeface="Arial"/>
+                      </a:endParaRPr>
                     </a:p>
                   </a:txBody>
                   <a:tcPr marL="82296" marR="82296" anchor="ctr">
@@ -30600,16 +30638,58 @@
                     <a:bodyPr/>
                     <a:lstStyle/>
                     <a:p>
-                      <a:pPr algn="r"/>
+                      <a:pPr algn="ctr"/>
                       <a:r>
-                        <a:rPr sz="1150" b="1">
+                        <a:rPr sz="1150" b="1" dirty="0" err="1">
                           <a:solidFill>
                             <a:srgbClr val="8B8478"/>
                           </a:solidFill>
                           <a:latin typeface="Arial"/>
                         </a:rPr>
-                        <a:t>Pedir el nivel de servicio</a:t>
+                        <a:t>Pedir</a:t>
                       </a:r>
+                      <a:r>
+                        <a:rPr sz="1150" b="1" dirty="0">
+                          <a:solidFill>
+                            <a:srgbClr val="8B8478"/>
+                          </a:solidFill>
+                          <a:latin typeface="Arial"/>
+                        </a:rPr>
+                        <a:t> el </a:t>
+                      </a:r>
+                      <a:r>
+                        <a:rPr sz="1150" b="1" dirty="0" err="1">
+                          <a:solidFill>
+                            <a:srgbClr val="8B8478"/>
+                          </a:solidFill>
+                          <a:latin typeface="Arial"/>
+                        </a:rPr>
+                        <a:t>nivel</a:t>
+                      </a:r>
+                      <a:r>
+                        <a:rPr sz="1150" b="1" dirty="0">
+                          <a:solidFill>
+                            <a:srgbClr val="8B8478"/>
+                          </a:solidFill>
+                          <a:latin typeface="Arial"/>
+                        </a:rPr>
+                        <a:t> de </a:t>
+                      </a:r>
+                      <a:r>
+                        <a:rPr sz="1150" b="1" dirty="0" err="1">
+                          <a:solidFill>
+                            <a:srgbClr val="8B8478"/>
+                          </a:solidFill>
+                          <a:latin typeface="Arial"/>
+                        </a:rPr>
+                        <a:t>servicio</a:t>
+                      </a:r>
+                      <a:endParaRPr sz="1150" b="1" dirty="0">
+                        <a:solidFill>
+                          <a:srgbClr val="8B8478"/>
+                        </a:solidFill>
+                        <a:latin typeface="Arial"/>
+                      </a:endParaRPr>
                     </a:p>
                   </a:txBody>
                   <a:tcPr marL="82296" marR="82296" anchor="ctr">
@@ -30624,7 +30704,7 @@
                   </a:ext>
                 </a:extLst>
               </a:tr>
-              <a:tr h="420624">
+              <a:tr h="504497">
                 <a:tc>
                   <a:txBody>
                     <a:bodyPr/>
@@ -30655,7 +30735,7 @@
                     <a:p>
                       <a:pPr algn="r"/>
                       <a:r>
-                        <a:rPr sz="1300" b="0">
+                        <a:rPr sz="1300" b="0" dirty="0">
                           <a:solidFill>
                             <a:srgbClr val="555045"/>
                           </a:solidFill>
@@ -30700,7 +30780,7 @@
                   </a:ext>
                 </a:extLst>
               </a:tr>
-              <a:tr h="420624">
+              <a:tr h="437806">
                 <a:tc>
                   <a:txBody>
                     <a:bodyPr/>
@@ -30754,14 +30834,29 @@
                     <a:p>
                       <a:pPr algn="r"/>
                       <a:r>
-                        <a:rPr sz="1300" b="0">
+                        <a:rPr sz="1300" b="0" dirty="0">
                           <a:solidFill>
                             <a:srgbClr val="555045"/>
                           </a:solidFill>
                           <a:latin typeface="Arial"/>
                         </a:rPr>
-                        <a:t>P4 · la propuesta</a:t>
+                        <a:t>P4 · la </a:t>
                       </a:r>
+                      <a:r>
+                        <a:rPr sz="1300" b="0" dirty="0" err="1">
+                          <a:solidFill>
+                            <a:srgbClr val="555045"/>
+                          </a:solidFill>
+                          <a:latin typeface="Arial"/>
+                        </a:rPr>
+                        <a:t>propuesta</a:t>
+                      </a:r>
+                      <a:endParaRPr sz="1300" b="0" dirty="0">
+                        <a:solidFill>
+                          <a:srgbClr val="555045"/>
+                        </a:solidFill>
+                        <a:latin typeface="Arial"/>
+                      </a:endParaRPr>
                     </a:p>
                   </a:txBody>
                   <a:tcPr marL="82296" marR="82296" anchor="ctr">
@@ -30788,8 +30883,8 @@
         </p:nvSpPr>
         <p:spPr>
           <a:xfrm>
-            <a:off x="7863840" y="2148840"/>
-            <a:ext cx="3550615" cy="3108960"/>
+            <a:off x="6212793" y="2436654"/>
+            <a:ext cx="5201662" cy="1799852"/>
           </a:xfrm>
           <a:prstGeom prst="rect">
             <a:avLst/>
@@ -30814,13 +30909,103 @@
               </a:spcAft>
             </a:pPr>
             <a:r>
-              <a:rPr sz="1300" b="0">
-                <a:solidFill>
-                  <a:srgbClr val="555045"/>
-                </a:solidFill>
-                <a:latin typeface="Arial"/>
-              </a:rPr>
-              <a:t>Más P0, repetir lo de la semana anterior, que aproxima la práctica actual.</a:t>
+              <a:rPr sz="1300" b="0" dirty="0">
+                <a:solidFill>
+                  <a:srgbClr val="555045"/>
+                </a:solidFill>
+                <a:latin typeface="Arial"/>
+              </a:rPr>
+              <a:t>Más P0, </a:t>
+            </a:r>
+            <a:r>
+              <a:rPr sz="1300" b="0" dirty="0" err="1">
+                <a:solidFill>
+                  <a:srgbClr val="555045"/>
+                </a:solidFill>
+                <a:latin typeface="Arial"/>
+              </a:rPr>
+              <a:t>repetir</a:t>
+            </a:r>
+            <a:r>
+              <a:rPr sz="1300" b="0" dirty="0">
+                <a:solidFill>
+                  <a:srgbClr val="555045"/>
+                </a:solidFill>
+                <a:latin typeface="Arial"/>
+              </a:rPr>
+              <a:t> lo de la </a:t>
+            </a:r>
+            <a:r>
+              <a:rPr sz="1300" b="0" dirty="0" err="1">
+                <a:solidFill>
+                  <a:srgbClr val="555045"/>
+                </a:solidFill>
+                <a:latin typeface="Arial"/>
+              </a:rPr>
+              <a:t>semana</a:t>
+            </a:r>
+            <a:r>
+              <a:rPr sz="1300" b="0" dirty="0">
+                <a:solidFill>
+                  <a:srgbClr val="555045"/>
+                </a:solidFill>
+                <a:latin typeface="Arial"/>
+              </a:rPr>
+              <a:t> anterior, </a:t>
+            </a:r>
+            <a:r>
+              <a:rPr sz="1300" b="0" dirty="0" err="1">
+                <a:solidFill>
+                  <a:srgbClr val="555045"/>
+                </a:solidFill>
+                <a:latin typeface="Arial"/>
+              </a:rPr>
+              <a:t>que</a:t>
+            </a:r>
+            <a:r>
+              <a:rPr sz="1300" b="0" dirty="0">
+                <a:solidFill>
+                  <a:srgbClr val="555045"/>
+                </a:solidFill>
+                <a:latin typeface="Arial"/>
+              </a:rPr>
+              <a:t> </a:t>
+            </a:r>
+            <a:r>
+              <a:rPr sz="1300" b="0" dirty="0" err="1">
+                <a:solidFill>
+                  <a:srgbClr val="555045"/>
+                </a:solidFill>
+                <a:latin typeface="Arial"/>
+              </a:rPr>
+              <a:t>aproxima</a:t>
+            </a:r>
+            <a:r>
+              <a:rPr sz="1300" b="0" dirty="0">
+                <a:solidFill>
+                  <a:srgbClr val="555045"/>
+                </a:solidFill>
+                <a:latin typeface="Arial"/>
+              </a:rPr>
+              <a:t> la </a:t>
+            </a:r>
+            <a:r>
+              <a:rPr sz="1300" b="0" dirty="0" err="1">
+                <a:solidFill>
+                  <a:srgbClr val="555045"/>
+                </a:solidFill>
+                <a:latin typeface="Arial"/>
+              </a:rPr>
+              <a:t>práctica</a:t>
+            </a:r>
+            <a:r>
+              <a:rPr sz="1300" b="0" dirty="0">
+                <a:solidFill>
+                  <a:srgbClr val="555045"/>
+                </a:solidFill>
+                <a:latin typeface="Arial"/>
+              </a:rPr>
+              <a:t> actual.</a:t>
             </a:r>
           </a:p>
           <a:p>
@@ -30836,13 +31021,49 @@
               </a:spcAft>
             </a:pPr>
             <a:r>
-              <a:rPr sz="1350" b="1">
+              <a:rPr sz="1350" b="1" dirty="0">
                 <a:solidFill>
                   <a:srgbClr val="8C2F39"/>
                 </a:solidFill>
                 <a:latin typeface="Arial"/>
               </a:rPr>
-              <a:t>Por qué no bastan dos</a:t>
+              <a:t>Por </a:t>
+            </a:r>
+            <a:r>
+              <a:rPr sz="1350" b="1" dirty="0" err="1">
+                <a:solidFill>
+                  <a:srgbClr val="8C2F39"/>
+                </a:solidFill>
+                <a:latin typeface="Arial"/>
+              </a:rPr>
+              <a:t>qué</a:t>
+            </a:r>
+            <a:r>
+              <a:rPr sz="1350" b="1" dirty="0">
+                <a:solidFill>
+                  <a:srgbClr val="8C2F39"/>
+                </a:solidFill>
+                <a:latin typeface="Arial"/>
+              </a:rPr>
+              <a:t> no </a:t>
+            </a:r>
+            <a:r>
+              <a:rPr sz="1350" b="1" dirty="0" err="1">
+                <a:solidFill>
+                  <a:srgbClr val="8C2F39"/>
+                </a:solidFill>
+                <a:latin typeface="Arial"/>
+              </a:rPr>
+              <a:t>bastan</a:t>
+            </a:r>
+            <a:r>
+              <a:rPr sz="1350" b="1" dirty="0">
+                <a:solidFill>
+                  <a:srgbClr val="8C2F39"/>
+                </a:solidFill>
+                <a:latin typeface="Arial"/>
+              </a:rPr>
+              <a:t> dos</a:t>
             </a:r>
           </a:p>
           <a:p>
@@ -30858,131 +31079,364 @@
               </a:spcAft>
             </a:pPr>
             <a:r>
-              <a:rPr sz="1300" b="0">
-                <a:solidFill>
-                  <a:srgbClr val="555045"/>
-                </a:solidFill>
-                <a:latin typeface="Arial"/>
-              </a:rPr>
-              <a:t>Comparar solo P0 contra P4 daría un ahorro grande sin saber a qué atribuirlo. Con una asimetría de costes como la de este catálogo, casi cualquier regla que pida más gana esa comparación.</a:t>
-            </a:r>
-          </a:p>
-          <a:p>
-            <a:pPr algn="l">
-              <a:lnSpc>
-                <a:spcPct val="130000"/>
-              </a:lnSpc>
-              <a:spcBef>
-                <a:spcPts val="0"/>
-              </a:spcBef>
-              <a:spcAft>
-                <a:spcPts val="0"/>
-              </a:spcAft>
-            </a:pPr>
-            <a:r>
-              <a:rPr sz="1300" b="1">
-                <a:solidFill>
-                  <a:srgbClr val="17150F"/>
-                </a:solidFill>
-                <a:latin typeface="Arial"/>
-              </a:rPr>
-              <a:t>El diseño factorial permite cambiar un factor manteniendo el otro.</a:t>
-            </a:r>
-          </a:p>
-        </p:txBody>
-      </p:sp>
-      <p:sp>
-        <p:nvSpPr>
-          <p:cNvPr id="9" name="Rectangle 8"/>
-          <p:cNvSpPr/>
-          <p:nvPr/>
-        </p:nvSpPr>
-        <p:spPr>
-          <a:xfrm>
-            <a:off x="777240" y="3986784"/>
-            <a:ext cx="63500" cy="63500"/>
-          </a:xfrm>
-          <a:prstGeom prst="rect">
-            <a:avLst/>
-          </a:prstGeom>
-          <a:solidFill>
-            <a:srgbClr val="8C2F39"/>
-          </a:solidFill>
-          <a:ln>
-            <a:noFill/>
-          </a:ln>
-          <a:effectLst/>
-        </p:spPr>
-        <p:style>
-          <a:lnRef idx="1">
-            <a:schemeClr val="accent1"/>
-          </a:lnRef>
-          <a:fillRef idx="3">
-            <a:schemeClr val="accent1"/>
-          </a:fillRef>
-          <a:effectRef idx="2">
-            <a:schemeClr val="accent1"/>
-          </a:effectRef>
-          <a:fontRef idx="minor">
-            <a:schemeClr val="lt1"/>
-          </a:fontRef>
-        </p:style>
-        <p:txBody>
-          <a:bodyPr rtlCol="0" anchor="ctr"/>
-          <a:lstStyle/>
-          <a:p>
-            <a:pPr algn="ctr"/>
-            <a:endParaRPr/>
-          </a:p>
-        </p:txBody>
-      </p:sp>
-      <p:sp>
-        <p:nvSpPr>
-          <p:cNvPr id="10" name="TextBox 9"/>
-          <p:cNvSpPr txBox="1"/>
-          <p:nvPr/>
-        </p:nvSpPr>
-        <p:spPr>
-          <a:xfrm>
-            <a:off x="978408" y="3886200"/>
-            <a:ext cx="10436047" cy="530098"/>
-          </a:xfrm>
-          <a:prstGeom prst="rect">
-            <a:avLst/>
-          </a:prstGeom>
-          <a:noFill/>
-        </p:spPr>
-        <p:txBody>
-          <a:bodyPr wrap="square" lIns="0" tIns="0" rIns="0" bIns="0">
-            <a:spAutoFit/>
-          </a:bodyPr>
-          <a:lstStyle/>
-          <a:p>
-            <a:pPr>
-              <a:lnSpc>
-                <a:spcPct val="124000"/>
-              </a:lnSpc>
-              <a:spcAft>
-                <a:spcPts val="0"/>
-              </a:spcAft>
-            </a:pPr>
-            <a:r>
-              <a:rPr sz="1450" b="1">
-                <a:solidFill>
-                  <a:srgbClr val="17150F"/>
-                </a:solidFill>
-                <a:latin typeface="Arial"/>
-              </a:rPr>
-              <a:t>El supuesto que sostiene la cifra.</a:t>
-            </a:r>
-            <a:r>
-              <a:rPr sz="1450" b="0">
-                <a:solidFill>
-                  <a:srgbClr val="555045"/>
-                </a:solidFill>
-                <a:latin typeface="Arial"/>
-              </a:rPr>
-              <a:t> Las ventas registradas se tratan como demanda real. El univariado comprobó que los 26 días sin venta son baja rotación y no quiebres de stock, así que la demanda no está censurada.</a:t>
+              <a:rPr sz="1300" b="0" dirty="0" err="1">
+                <a:solidFill>
+                  <a:srgbClr val="555045"/>
+                </a:solidFill>
+                <a:latin typeface="Arial"/>
+              </a:rPr>
+              <a:t>Comparar</a:t>
+            </a:r>
+            <a:r>
+              <a:rPr sz="1300" b="0" dirty="0">
+                <a:solidFill>
+                  <a:srgbClr val="555045"/>
+                </a:solidFill>
+                <a:latin typeface="Arial"/>
+              </a:rPr>
+              <a:t> solo P0 contra P4 </a:t>
+            </a:r>
+            <a:r>
+              <a:rPr sz="1300" b="0" dirty="0" err="1">
+                <a:solidFill>
+                  <a:srgbClr val="555045"/>
+                </a:solidFill>
+                <a:latin typeface="Arial"/>
+              </a:rPr>
+              <a:t>daría</a:t>
+            </a:r>
+            <a:r>
+              <a:rPr sz="1300" b="0" dirty="0">
+                <a:solidFill>
+                  <a:srgbClr val="555045"/>
+                </a:solidFill>
+                <a:latin typeface="Arial"/>
+              </a:rPr>
+              <a:t> un </a:t>
+            </a:r>
+            <a:r>
+              <a:rPr sz="1300" b="0" dirty="0" err="1">
+                <a:solidFill>
+                  <a:srgbClr val="555045"/>
+                </a:solidFill>
+                <a:latin typeface="Arial"/>
+              </a:rPr>
+              <a:t>ahorro</a:t>
+            </a:r>
+            <a:r>
+              <a:rPr sz="1300" b="0" dirty="0">
+                <a:solidFill>
+                  <a:srgbClr val="555045"/>
+                </a:solidFill>
+                <a:latin typeface="Arial"/>
+              </a:rPr>
+              <a:t> grande sin saber a </a:t>
+            </a:r>
+            <a:r>
+              <a:rPr sz="1300" b="0" dirty="0" err="1">
+                <a:solidFill>
+                  <a:srgbClr val="555045"/>
+                </a:solidFill>
+                <a:latin typeface="Arial"/>
+              </a:rPr>
+              <a:t>qué</a:t>
+            </a:r>
+            <a:r>
+              <a:rPr sz="1300" b="0" dirty="0">
+                <a:solidFill>
+                  <a:srgbClr val="555045"/>
+                </a:solidFill>
+                <a:latin typeface="Arial"/>
+              </a:rPr>
+              <a:t> </a:t>
+            </a:r>
+            <a:r>
+              <a:rPr sz="1300" b="0" dirty="0" err="1">
+                <a:solidFill>
+                  <a:srgbClr val="555045"/>
+                </a:solidFill>
+                <a:latin typeface="Arial"/>
+              </a:rPr>
+              <a:t>atribuirlo</a:t>
+            </a:r>
+            <a:r>
+              <a:rPr sz="1300" b="0" dirty="0">
+                <a:solidFill>
+                  <a:srgbClr val="555045"/>
+                </a:solidFill>
+                <a:latin typeface="Arial"/>
+              </a:rPr>
+              <a:t>. Con </a:t>
+            </a:r>
+            <a:r>
+              <a:rPr sz="1300" b="0" dirty="0" err="1">
+                <a:solidFill>
+                  <a:srgbClr val="555045"/>
+                </a:solidFill>
+                <a:latin typeface="Arial"/>
+              </a:rPr>
+              <a:t>una</a:t>
+            </a:r>
+            <a:r>
+              <a:rPr sz="1300" b="0" dirty="0">
+                <a:solidFill>
+                  <a:srgbClr val="555045"/>
+                </a:solidFill>
+                <a:latin typeface="Arial"/>
+              </a:rPr>
+              <a:t> </a:t>
+            </a:r>
+            <a:r>
+              <a:rPr sz="1300" b="0" dirty="0" err="1">
+                <a:solidFill>
+                  <a:srgbClr val="555045"/>
+                </a:solidFill>
+                <a:latin typeface="Arial"/>
+              </a:rPr>
+              <a:t>asimetría</a:t>
+            </a:r>
+            <a:r>
+              <a:rPr sz="1300" b="0" dirty="0">
+                <a:solidFill>
+                  <a:srgbClr val="555045"/>
+                </a:solidFill>
+                <a:latin typeface="Arial"/>
+              </a:rPr>
+              <a:t> de </a:t>
+            </a:r>
+            <a:r>
+              <a:rPr sz="1300" b="0" dirty="0" err="1">
+                <a:solidFill>
+                  <a:srgbClr val="555045"/>
+                </a:solidFill>
+                <a:latin typeface="Arial"/>
+              </a:rPr>
+              <a:t>costes</a:t>
+            </a:r>
+            <a:r>
+              <a:rPr sz="1300" b="0" dirty="0">
+                <a:solidFill>
+                  <a:srgbClr val="555045"/>
+                </a:solidFill>
+                <a:latin typeface="Arial"/>
+              </a:rPr>
+              <a:t> </a:t>
+            </a:r>
+            <a:r>
+              <a:rPr sz="1300" b="0" dirty="0" err="1">
+                <a:solidFill>
+                  <a:srgbClr val="555045"/>
+                </a:solidFill>
+                <a:latin typeface="Arial"/>
+              </a:rPr>
+              <a:t>como</a:t>
+            </a:r>
+            <a:r>
+              <a:rPr sz="1300" b="0" dirty="0">
+                <a:solidFill>
+                  <a:srgbClr val="555045"/>
+                </a:solidFill>
+                <a:latin typeface="Arial"/>
+              </a:rPr>
+              <a:t> la de </a:t>
+            </a:r>
+            <a:r>
+              <a:rPr sz="1300" b="0" dirty="0" err="1">
+                <a:solidFill>
+                  <a:srgbClr val="555045"/>
+                </a:solidFill>
+                <a:latin typeface="Arial"/>
+              </a:rPr>
+              <a:t>este</a:t>
+            </a:r>
+            <a:r>
+              <a:rPr sz="1300" b="0" dirty="0">
+                <a:solidFill>
+                  <a:srgbClr val="555045"/>
+                </a:solidFill>
+                <a:latin typeface="Arial"/>
+              </a:rPr>
+              <a:t> </a:t>
+            </a:r>
+            <a:r>
+              <a:rPr sz="1300" b="0" dirty="0" err="1">
+                <a:solidFill>
+                  <a:srgbClr val="555045"/>
+                </a:solidFill>
+                <a:latin typeface="Arial"/>
+              </a:rPr>
+              <a:t>catálogo</a:t>
+            </a:r>
+            <a:r>
+              <a:rPr sz="1300" b="0" dirty="0">
+                <a:solidFill>
+                  <a:srgbClr val="555045"/>
+                </a:solidFill>
+                <a:latin typeface="Arial"/>
+              </a:rPr>
+              <a:t>, </a:t>
+            </a:r>
+            <a:r>
+              <a:rPr sz="1300" b="0" dirty="0" err="1">
+                <a:solidFill>
+                  <a:srgbClr val="555045"/>
+                </a:solidFill>
+                <a:latin typeface="Arial"/>
+              </a:rPr>
+              <a:t>casi</a:t>
+            </a:r>
+            <a:r>
+              <a:rPr sz="1300" b="0" dirty="0">
+                <a:solidFill>
+                  <a:srgbClr val="555045"/>
+                </a:solidFill>
+                <a:latin typeface="Arial"/>
+              </a:rPr>
+              <a:t> </a:t>
+            </a:r>
+            <a:r>
+              <a:rPr sz="1300" b="0" dirty="0" err="1">
+                <a:solidFill>
+                  <a:srgbClr val="555045"/>
+                </a:solidFill>
+                <a:latin typeface="Arial"/>
+              </a:rPr>
+              <a:t>cualquier</a:t>
+            </a:r>
+            <a:r>
+              <a:rPr sz="1300" b="0" dirty="0">
+                <a:solidFill>
+                  <a:srgbClr val="555045"/>
+                </a:solidFill>
+                <a:latin typeface="Arial"/>
+              </a:rPr>
+              <a:t> </a:t>
+            </a:r>
+            <a:r>
+              <a:rPr sz="1300" b="0" dirty="0" err="1">
+                <a:solidFill>
+                  <a:srgbClr val="555045"/>
+                </a:solidFill>
+                <a:latin typeface="Arial"/>
+              </a:rPr>
+              <a:t>regla</a:t>
+            </a:r>
+            <a:r>
+              <a:rPr sz="1300" b="0" dirty="0">
+                <a:solidFill>
+                  <a:srgbClr val="555045"/>
+                </a:solidFill>
+                <a:latin typeface="Arial"/>
+              </a:rPr>
+              <a:t> </a:t>
+            </a:r>
+            <a:r>
+              <a:rPr sz="1300" b="0" dirty="0" err="1">
+                <a:solidFill>
+                  <a:srgbClr val="555045"/>
+                </a:solidFill>
+                <a:latin typeface="Arial"/>
+              </a:rPr>
+              <a:t>que</a:t>
+            </a:r>
+            <a:r>
+              <a:rPr sz="1300" b="0" dirty="0">
+                <a:solidFill>
+                  <a:srgbClr val="555045"/>
+                </a:solidFill>
+                <a:latin typeface="Arial"/>
+              </a:rPr>
+              <a:t> </a:t>
+            </a:r>
+            <a:r>
+              <a:rPr sz="1300" b="0" dirty="0" err="1">
+                <a:solidFill>
+                  <a:srgbClr val="555045"/>
+                </a:solidFill>
+                <a:latin typeface="Arial"/>
+              </a:rPr>
+              <a:t>pida</a:t>
+            </a:r>
+            <a:r>
+              <a:rPr sz="1300" b="0" dirty="0">
+                <a:solidFill>
+                  <a:srgbClr val="555045"/>
+                </a:solidFill>
+                <a:latin typeface="Arial"/>
+              </a:rPr>
+              <a:t> </a:t>
+            </a:r>
+            <a:r>
+              <a:rPr sz="1300" b="0" dirty="0" err="1">
+                <a:solidFill>
+                  <a:srgbClr val="555045"/>
+                </a:solidFill>
+                <a:latin typeface="Arial"/>
+              </a:rPr>
+              <a:t>más</a:t>
+            </a:r>
+            <a:r>
+              <a:rPr sz="1300" b="0" dirty="0">
+                <a:solidFill>
+                  <a:srgbClr val="555045"/>
+                </a:solidFill>
+                <a:latin typeface="Arial"/>
+              </a:rPr>
+              <a:t> </a:t>
+            </a:r>
+            <a:r>
+              <a:rPr sz="1300" b="0" dirty="0" err="1">
+                <a:solidFill>
+                  <a:srgbClr val="555045"/>
+                </a:solidFill>
+                <a:latin typeface="Arial"/>
+              </a:rPr>
+              <a:t>gana</a:t>
+            </a:r>
+            <a:r>
+              <a:rPr sz="1300" b="0" dirty="0">
+                <a:solidFill>
+                  <a:srgbClr val="555045"/>
+                </a:solidFill>
+                <a:latin typeface="Arial"/>
+              </a:rPr>
+              <a:t> </a:t>
+            </a:r>
+            <a:r>
+              <a:rPr sz="1300" b="0" dirty="0" err="1">
+                <a:solidFill>
+                  <a:srgbClr val="555045"/>
+                </a:solidFill>
+                <a:latin typeface="Arial"/>
+              </a:rPr>
+              <a:t>esa</a:t>
+            </a:r>
+            <a:r>
+              <a:rPr sz="1300" b="0" dirty="0">
+                <a:solidFill>
+                  <a:srgbClr val="555045"/>
+                </a:solidFill>
+                <a:latin typeface="Arial"/>
+              </a:rPr>
+              <a:t> </a:t>
+            </a:r>
+            <a:r>
+              <a:rPr sz="1300" b="0" dirty="0" err="1">
+                <a:solidFill>
+                  <a:srgbClr val="555045"/>
+                </a:solidFill>
+                <a:latin typeface="Arial"/>
+              </a:rPr>
+              <a:t>comparación</a:t>
+            </a:r>
+            <a:r>
+              <a:rPr sz="1300" b="0" dirty="0">
+                <a:solidFill>
+                  <a:srgbClr val="555045"/>
+                </a:solidFill>
+                <a:latin typeface="Arial"/>
+              </a:rPr>
+              <a:t>.</a:t>
             </a:r>
           </a:p>
         </p:txBody>
@@ -31327,30 +31781,6 @@
           </a:p>
         </p:txBody>
       </p:sp>
-      <p:pic>
-        <p:nvPicPr>
-          <p:cNvPr id="6" name="Picture 5" descr="23_coste_politicas.png"/>
-          <p:cNvPicPr>
-            <a:picLocks noChangeAspect="1"/>
-          </p:cNvPicPr>
-          <p:nvPr/>
-        </p:nvPicPr>
-        <p:blipFill>
-          <a:blip r:embed="rId2"/>
-          <a:stretch>
-            <a:fillRect/>
-          </a:stretch>
-        </p:blipFill>
-        <p:spPr>
-          <a:xfrm>
-            <a:off x="777240" y="1897380"/>
-            <a:ext cx="5577840" cy="2788920"/>
-          </a:xfrm>
-          <a:prstGeom prst="rect">
-            <a:avLst/>
-          </a:prstGeom>
-        </p:spPr>
-      </p:pic>
       <p:graphicFrame>
         <p:nvGraphicFramePr>
           <p:cNvPr id="7" name="Table 6"/>
@@ -32076,6 +32506,36 @@
           </a:p>
         </p:txBody>
       </p:sp>
+      <p:pic>
+        <p:nvPicPr>
+          <p:cNvPr id="12" name="Picture 11">
+            <a:extLst>
+              <a:ext uri="{FF2B5EF4-FFF2-40B4-BE49-F238E27FC236}">
+                <a16:creationId xmlns:a16="http://schemas.microsoft.com/office/drawing/2014/main" id="{4D905A21-F304-DFE0-563B-78BAC7D9B9D8}"/>
+              </a:ext>
+            </a:extLst>
+          </p:cNvPr>
+          <p:cNvPicPr>
+            <a:picLocks noChangeAspect="1"/>
+          </p:cNvPicPr>
+          <p:nvPr/>
+        </p:nvPicPr>
+        <p:blipFill>
+          <a:blip r:embed="rId2"/>
+          <a:stretch>
+            <a:fillRect/>
+          </a:stretch>
+        </p:blipFill>
+        <p:spPr>
+          <a:xfrm>
+            <a:off x="453306" y="2219346"/>
+            <a:ext cx="5642694" cy="2821347"/>
+          </a:xfrm>
+          <a:prstGeom prst="rect">
+            <a:avLst/>
+          </a:prstGeom>
+        </p:spPr>
+      </p:pic>
     </p:spTree>
   </p:cSld>
   <p:clrMapOvr>
@@ -32739,7 +33199,7 @@
         <p:spPr>
           <a:xfrm>
             <a:off x="6675120" y="3589020"/>
-            <a:ext cx="4739335" cy="2743200"/>
+            <a:ext cx="4739335" cy="2252476"/>
           </a:xfrm>
           <a:prstGeom prst="rect">
             <a:avLst/>
@@ -32764,13 +33224,247 @@
               </a:spcAft>
             </a:pPr>
             <a:r>
-              <a:rPr sz="1250" b="0">
-                <a:solidFill>
-                  <a:srgbClr val="555045"/>
-                </a:solidFill>
-                <a:latin typeface="Arial"/>
-              </a:rPr>
-              <a:t>Es lo que la tesis del proyecto anticipaba desde el análisis exploratorio, y ahora está medido con un diseño que lo aísla.</a:t>
+              <a:rPr sz="1250" b="0" dirty="0">
+                <a:solidFill>
+                  <a:srgbClr val="555045"/>
+                </a:solidFill>
+                <a:latin typeface="Arial"/>
+              </a:rPr>
+              <a:t>Es lo </a:t>
+            </a:r>
+            <a:r>
+              <a:rPr sz="1250" b="0" dirty="0" err="1">
+                <a:solidFill>
+                  <a:srgbClr val="555045"/>
+                </a:solidFill>
+                <a:latin typeface="Arial"/>
+              </a:rPr>
+              <a:t>que</a:t>
+            </a:r>
+            <a:r>
+              <a:rPr sz="1250" b="0" dirty="0">
+                <a:solidFill>
+                  <a:srgbClr val="555045"/>
+                </a:solidFill>
+                <a:latin typeface="Arial"/>
+              </a:rPr>
+              <a:t> la </a:t>
+            </a:r>
+            <a:r>
+              <a:rPr sz="1250" b="0" dirty="0" err="1">
+                <a:solidFill>
+                  <a:srgbClr val="555045"/>
+                </a:solidFill>
+                <a:latin typeface="Arial"/>
+              </a:rPr>
+              <a:t>tesis</a:t>
+            </a:r>
+            <a:r>
+              <a:rPr sz="1250" b="0" dirty="0">
+                <a:solidFill>
+                  <a:srgbClr val="555045"/>
+                </a:solidFill>
+                <a:latin typeface="Arial"/>
+              </a:rPr>
+              <a:t> del </a:t>
+            </a:r>
+            <a:r>
+              <a:rPr sz="1250" b="0" dirty="0" err="1">
+                <a:solidFill>
+                  <a:srgbClr val="555045"/>
+                </a:solidFill>
+                <a:latin typeface="Arial"/>
+              </a:rPr>
+              <a:t>proyecto</a:t>
+            </a:r>
+            <a:r>
+              <a:rPr sz="1250" b="0" dirty="0">
+                <a:solidFill>
+                  <a:srgbClr val="555045"/>
+                </a:solidFill>
+                <a:latin typeface="Arial"/>
+              </a:rPr>
+              <a:t> </a:t>
+            </a:r>
+            <a:r>
+              <a:rPr sz="1250" b="0" dirty="0" err="1">
+                <a:solidFill>
+                  <a:srgbClr val="555045"/>
+                </a:solidFill>
+                <a:latin typeface="Arial"/>
+              </a:rPr>
+              <a:t>anticipaba</a:t>
+            </a:r>
+            <a:r>
+              <a:rPr sz="1250" b="0" dirty="0">
+                <a:solidFill>
+                  <a:srgbClr val="555045"/>
+                </a:solidFill>
+                <a:latin typeface="Arial"/>
+              </a:rPr>
+              <a:t> </a:t>
+            </a:r>
+            <a:r>
+              <a:rPr sz="1250" b="0" dirty="0" err="1">
+                <a:solidFill>
+                  <a:srgbClr val="555045"/>
+                </a:solidFill>
+                <a:latin typeface="Arial"/>
+              </a:rPr>
+              <a:t>desde</a:t>
+            </a:r>
+            <a:r>
+              <a:rPr sz="1250" b="0" dirty="0">
+                <a:solidFill>
+                  <a:srgbClr val="555045"/>
+                </a:solidFill>
+                <a:latin typeface="Arial"/>
+              </a:rPr>
+              <a:t> el </a:t>
+            </a:r>
+            <a:r>
+              <a:rPr sz="1250" b="0" dirty="0" err="1">
+                <a:solidFill>
+                  <a:srgbClr val="555045"/>
+                </a:solidFill>
+                <a:latin typeface="Arial"/>
+              </a:rPr>
+              <a:t>análisis</a:t>
+            </a:r>
+            <a:r>
+              <a:rPr sz="1250" b="0" dirty="0">
+                <a:solidFill>
+                  <a:srgbClr val="555045"/>
+                </a:solidFill>
+                <a:latin typeface="Arial"/>
+              </a:rPr>
+              <a:t> </a:t>
+            </a:r>
+            <a:r>
+              <a:rPr sz="1250" b="0" dirty="0" err="1">
+                <a:solidFill>
+                  <a:srgbClr val="555045"/>
+                </a:solidFill>
+                <a:latin typeface="Arial"/>
+              </a:rPr>
+              <a:t>exploratorio</a:t>
+            </a:r>
+            <a:r>
+              <a:rPr sz="1250" b="0" dirty="0">
+                <a:solidFill>
+                  <a:srgbClr val="555045"/>
+                </a:solidFill>
+                <a:latin typeface="Arial"/>
+              </a:rPr>
+              <a:t>, y </a:t>
+            </a:r>
+            <a:r>
+              <a:rPr sz="1250" b="0" dirty="0" err="1">
+                <a:solidFill>
+                  <a:srgbClr val="555045"/>
+                </a:solidFill>
+                <a:latin typeface="Arial"/>
+              </a:rPr>
+              <a:t>ahora</a:t>
+            </a:r>
+            <a:r>
+              <a:rPr sz="1250" b="0" dirty="0">
+                <a:solidFill>
+                  <a:srgbClr val="555045"/>
+                </a:solidFill>
+                <a:latin typeface="Arial"/>
+              </a:rPr>
+              <a:t> </a:t>
+            </a:r>
+            <a:r>
+              <a:rPr sz="1250" b="0" dirty="0" err="1">
+                <a:solidFill>
+                  <a:srgbClr val="555045"/>
+                </a:solidFill>
+                <a:latin typeface="Arial"/>
+              </a:rPr>
+              <a:t>está</a:t>
+            </a:r>
+            <a:r>
+              <a:rPr sz="1250" b="0" dirty="0">
+                <a:solidFill>
+                  <a:srgbClr val="555045"/>
+                </a:solidFill>
+                <a:latin typeface="Arial"/>
+              </a:rPr>
+              <a:t> </a:t>
+            </a:r>
+            <a:r>
+              <a:rPr sz="1250" b="0" dirty="0" err="1">
+                <a:solidFill>
+                  <a:srgbClr val="555045"/>
+                </a:solidFill>
+                <a:latin typeface="Arial"/>
+              </a:rPr>
+              <a:t>medido</a:t>
+            </a:r>
+            <a:r>
+              <a:rPr sz="1250" b="0" dirty="0">
+                <a:solidFill>
+                  <a:srgbClr val="555045"/>
+                </a:solidFill>
+                <a:latin typeface="Arial"/>
+              </a:rPr>
+              <a:t> con un </a:t>
+            </a:r>
+            <a:r>
+              <a:rPr sz="1250" b="0" dirty="0" err="1">
+                <a:solidFill>
+                  <a:srgbClr val="555045"/>
+                </a:solidFill>
+                <a:latin typeface="Arial"/>
+              </a:rPr>
+              <a:t>diseño</a:t>
+            </a:r>
+            <a:r>
+              <a:rPr sz="1250" b="0" dirty="0">
+                <a:solidFill>
+                  <a:srgbClr val="555045"/>
+                </a:solidFill>
+                <a:latin typeface="Arial"/>
+              </a:rPr>
+              <a:t> </a:t>
+            </a:r>
+            <a:r>
+              <a:rPr sz="1250" b="0" dirty="0" err="1">
+                <a:solidFill>
+                  <a:srgbClr val="555045"/>
+                </a:solidFill>
+                <a:latin typeface="Arial"/>
+              </a:rPr>
+              <a:t>que</a:t>
+            </a:r>
+            <a:r>
+              <a:rPr sz="1250" b="0" dirty="0">
+                <a:solidFill>
+                  <a:srgbClr val="555045"/>
+                </a:solidFill>
+                <a:latin typeface="Arial"/>
+              </a:rPr>
+              <a:t> lo </a:t>
+            </a:r>
+            <a:r>
+              <a:rPr sz="1250" b="0" dirty="0" err="1">
+                <a:solidFill>
+                  <a:srgbClr val="555045"/>
+                </a:solidFill>
+                <a:latin typeface="Arial"/>
+              </a:rPr>
+              <a:t>aísla</a:t>
+            </a:r>
+            <a:r>
+              <a:rPr sz="1250" b="0" dirty="0">
+                <a:solidFill>
+                  <a:srgbClr val="555045"/>
+                </a:solidFill>
+                <a:latin typeface="Arial"/>
+              </a:rPr>
+              <a:t>.</a:t>
             </a:r>
           </a:p>
           <a:p>
@@ -32786,13 +33480,184 @@
               </a:spcAft>
             </a:pPr>
             <a:r>
-              <a:rPr sz="1250" b="1">
+              <a:rPr sz="1250" b="1" dirty="0" err="1">
                 <a:solidFill>
                   <a:srgbClr val="17150F"/>
                 </a:solidFill>
                 <a:latin typeface="Arial"/>
               </a:rPr>
-              <a:t>Presentar los 499.000 pesos como logro del modelo sería atribuirle un mérito que no tiene. Por sí solo aporta 49.000.</a:t>
+              <a:t>Presentar</a:t>
+            </a:r>
+            <a:r>
+              <a:rPr sz="1250" b="1" dirty="0">
+                <a:solidFill>
+                  <a:srgbClr val="17150F"/>
+                </a:solidFill>
+                <a:latin typeface="Arial"/>
+              </a:rPr>
+              <a:t> </a:t>
+            </a:r>
+            <a:r>
+              <a:rPr sz="1250" b="1" dirty="0" err="1">
+                <a:solidFill>
+                  <a:srgbClr val="17150F"/>
+                </a:solidFill>
+                <a:latin typeface="Arial"/>
+              </a:rPr>
+              <a:t>los</a:t>
+            </a:r>
+            <a:r>
+              <a:rPr sz="1250" b="1" dirty="0">
+                <a:solidFill>
+                  <a:srgbClr val="17150F"/>
+                </a:solidFill>
+                <a:latin typeface="Arial"/>
+              </a:rPr>
+              <a:t> 499.000 pesos </a:t>
+            </a:r>
+            <a:r>
+              <a:rPr sz="1250" b="1" dirty="0" err="1">
+                <a:solidFill>
+                  <a:srgbClr val="17150F"/>
+                </a:solidFill>
+                <a:latin typeface="Arial"/>
+              </a:rPr>
+              <a:t>como</a:t>
+            </a:r>
+            <a:r>
+              <a:rPr sz="1250" b="1" dirty="0">
+                <a:solidFill>
+                  <a:srgbClr val="17150F"/>
+                </a:solidFill>
+                <a:latin typeface="Arial"/>
+              </a:rPr>
+              <a:t> </a:t>
+            </a:r>
+            <a:r>
+              <a:rPr sz="1250" b="1" dirty="0" err="1">
+                <a:solidFill>
+                  <a:srgbClr val="17150F"/>
+                </a:solidFill>
+                <a:latin typeface="Arial"/>
+              </a:rPr>
+              <a:t>logro</a:t>
+            </a:r>
+            <a:r>
+              <a:rPr sz="1250" b="1" dirty="0">
+                <a:solidFill>
+                  <a:srgbClr val="17150F"/>
+                </a:solidFill>
+                <a:latin typeface="Arial"/>
+              </a:rPr>
+              <a:t> del </a:t>
+            </a:r>
+            <a:r>
+              <a:rPr sz="1250" b="1" dirty="0" err="1">
+                <a:solidFill>
+                  <a:srgbClr val="17150F"/>
+                </a:solidFill>
+                <a:latin typeface="Arial"/>
+              </a:rPr>
+              <a:t>modelo</a:t>
+            </a:r>
+            <a:r>
+              <a:rPr sz="1250" b="1" dirty="0">
+                <a:solidFill>
+                  <a:srgbClr val="17150F"/>
+                </a:solidFill>
+                <a:latin typeface="Arial"/>
+              </a:rPr>
+              <a:t> </a:t>
+            </a:r>
+            <a:r>
+              <a:rPr sz="1250" b="1" dirty="0" err="1">
+                <a:solidFill>
+                  <a:srgbClr val="17150F"/>
+                </a:solidFill>
+                <a:latin typeface="Arial"/>
+              </a:rPr>
+              <a:t>sería</a:t>
+            </a:r>
+            <a:r>
+              <a:rPr sz="1250" b="1" dirty="0">
+                <a:solidFill>
+                  <a:srgbClr val="17150F"/>
+                </a:solidFill>
+                <a:latin typeface="Arial"/>
+              </a:rPr>
+              <a:t> </a:t>
+            </a:r>
+            <a:r>
+              <a:rPr sz="1250" b="1" dirty="0" err="1">
+                <a:solidFill>
+                  <a:srgbClr val="17150F"/>
+                </a:solidFill>
+                <a:latin typeface="Arial"/>
+              </a:rPr>
+              <a:t>atribuirle</a:t>
+            </a:r>
+            <a:r>
+              <a:rPr sz="1250" b="1" dirty="0">
+                <a:solidFill>
+                  <a:srgbClr val="17150F"/>
+                </a:solidFill>
+                <a:latin typeface="Arial"/>
+              </a:rPr>
+              <a:t> un </a:t>
+            </a:r>
+            <a:r>
+              <a:rPr sz="1250" b="1" dirty="0" err="1">
+                <a:solidFill>
+                  <a:srgbClr val="17150F"/>
+                </a:solidFill>
+                <a:latin typeface="Arial"/>
+              </a:rPr>
+              <a:t>mérito</a:t>
+            </a:r>
+            <a:r>
+              <a:rPr sz="1250" b="1" dirty="0">
+                <a:solidFill>
+                  <a:srgbClr val="17150F"/>
+                </a:solidFill>
+                <a:latin typeface="Arial"/>
+              </a:rPr>
+              <a:t> </a:t>
+            </a:r>
+            <a:r>
+              <a:rPr sz="1250" b="1" dirty="0" err="1">
+                <a:solidFill>
+                  <a:srgbClr val="17150F"/>
+                </a:solidFill>
+                <a:latin typeface="Arial"/>
+              </a:rPr>
+              <a:t>que</a:t>
+            </a:r>
+            <a:r>
+              <a:rPr sz="1250" b="1" dirty="0">
+                <a:solidFill>
+                  <a:srgbClr val="17150F"/>
+                </a:solidFill>
+                <a:latin typeface="Arial"/>
+              </a:rPr>
+              <a:t> no </a:t>
+            </a:r>
+            <a:r>
+              <a:rPr sz="1250" b="1" dirty="0" err="1">
+                <a:solidFill>
+                  <a:srgbClr val="17150F"/>
+                </a:solidFill>
+                <a:latin typeface="Arial"/>
+              </a:rPr>
+              <a:t>tiene</a:t>
+            </a:r>
+            <a:r>
+              <a:rPr sz="1250" b="1" dirty="0">
+                <a:solidFill>
+                  <a:srgbClr val="17150F"/>
+                </a:solidFill>
+                <a:latin typeface="Arial"/>
+              </a:rPr>
+              <a:t>.</a:t>
             </a:r>
           </a:p>
           <a:p>
@@ -32808,13 +33673,391 @@
               </a:spcAft>
             </a:pPr>
             <a:r>
-              <a:rPr sz="1250" b="0">
-                <a:solidFill>
-                  <a:srgbClr val="555045"/>
-                </a:solidFill>
-                <a:latin typeface="Arial"/>
-              </a:rPr>
-              <a:t>La interacción merece atención. Esos 145.000 salen de que el modelo, además de acertar el centro, gradúa el ancho del abanico por serie. Es lo que justifica haber elegido un modelo cuantílico y no uno puntual.</a:t>
+              <a:rPr sz="1250" b="0" dirty="0">
+                <a:solidFill>
+                  <a:srgbClr val="555045"/>
+                </a:solidFill>
+                <a:latin typeface="Arial"/>
+              </a:rPr>
+              <a:t>La </a:t>
+            </a:r>
+            <a:r>
+              <a:rPr sz="1250" b="0" dirty="0" err="1">
+                <a:solidFill>
+                  <a:srgbClr val="555045"/>
+                </a:solidFill>
+                <a:latin typeface="Arial"/>
+              </a:rPr>
+              <a:t>interacción</a:t>
+            </a:r>
+            <a:r>
+              <a:rPr sz="1250" b="0" dirty="0">
+                <a:solidFill>
+                  <a:srgbClr val="555045"/>
+                </a:solidFill>
+                <a:latin typeface="Arial"/>
+              </a:rPr>
+              <a:t> </a:t>
+            </a:r>
+            <a:r>
+              <a:rPr sz="1250" b="0" dirty="0" err="1">
+                <a:solidFill>
+                  <a:srgbClr val="555045"/>
+                </a:solidFill>
+                <a:latin typeface="Arial"/>
+              </a:rPr>
+              <a:t>merece</a:t>
+            </a:r>
+            <a:r>
+              <a:rPr sz="1250" b="0" dirty="0">
+                <a:solidFill>
+                  <a:srgbClr val="555045"/>
+                </a:solidFill>
+                <a:latin typeface="Arial"/>
+              </a:rPr>
+              <a:t> </a:t>
+            </a:r>
+            <a:r>
+              <a:rPr sz="1250" b="0" dirty="0" err="1">
+                <a:solidFill>
+                  <a:srgbClr val="555045"/>
+                </a:solidFill>
+                <a:latin typeface="Arial"/>
+              </a:rPr>
+              <a:t>atención</a:t>
+            </a:r>
+            <a:r>
+              <a:rPr sz="1250" b="0" dirty="0">
+                <a:solidFill>
+                  <a:srgbClr val="555045"/>
+                </a:solidFill>
+                <a:latin typeface="Arial"/>
+              </a:rPr>
+              <a:t>. </a:t>
+            </a:r>
+            <a:r>
+              <a:rPr sz="1250" b="0" dirty="0" err="1">
+                <a:solidFill>
+                  <a:srgbClr val="555045"/>
+                </a:solidFill>
+                <a:latin typeface="Arial"/>
+              </a:rPr>
+              <a:t>Esos</a:t>
+            </a:r>
+            <a:r>
+              <a:rPr sz="1250" b="0" dirty="0">
+                <a:solidFill>
+                  <a:srgbClr val="555045"/>
+                </a:solidFill>
+                <a:latin typeface="Arial"/>
+              </a:rPr>
+              <a:t> 145.000 </a:t>
+            </a:r>
+            <a:r>
+              <a:rPr sz="1250" b="0" dirty="0" err="1">
+                <a:solidFill>
+                  <a:srgbClr val="555045"/>
+                </a:solidFill>
+                <a:latin typeface="Arial"/>
+              </a:rPr>
+              <a:t>salen</a:t>
+            </a:r>
+            <a:r>
+              <a:rPr sz="1250" b="0" dirty="0">
+                <a:solidFill>
+                  <a:srgbClr val="555045"/>
+                </a:solidFill>
+                <a:latin typeface="Arial"/>
+              </a:rPr>
+              <a:t> de </a:t>
+            </a:r>
+            <a:r>
+              <a:rPr sz="1250" b="0" dirty="0" err="1">
+                <a:solidFill>
+                  <a:srgbClr val="555045"/>
+                </a:solidFill>
+                <a:latin typeface="Arial"/>
+              </a:rPr>
+              <a:t>que</a:t>
+            </a:r>
+            <a:r>
+              <a:rPr sz="1250" b="0" dirty="0">
+                <a:solidFill>
+                  <a:srgbClr val="555045"/>
+                </a:solidFill>
+                <a:latin typeface="Arial"/>
+              </a:rPr>
+              <a:t> el </a:t>
+            </a:r>
+            <a:r>
+              <a:rPr sz="1250" b="0" dirty="0" err="1">
+                <a:solidFill>
+                  <a:srgbClr val="555045"/>
+                </a:solidFill>
+                <a:latin typeface="Arial"/>
+              </a:rPr>
+              <a:t>modelo</a:t>
+            </a:r>
+            <a:r>
+              <a:rPr sz="1250" b="0" dirty="0">
+                <a:solidFill>
+                  <a:srgbClr val="555045"/>
+                </a:solidFill>
+                <a:latin typeface="Arial"/>
+              </a:rPr>
+              <a:t>, </a:t>
+            </a:r>
+            <a:r>
+              <a:rPr sz="1250" b="0" dirty="0" err="1">
+                <a:solidFill>
+                  <a:srgbClr val="555045"/>
+                </a:solidFill>
+                <a:latin typeface="Arial"/>
+              </a:rPr>
+              <a:t>además</a:t>
+            </a:r>
+            <a:r>
+              <a:rPr sz="1250" b="0" dirty="0">
+                <a:solidFill>
+                  <a:srgbClr val="555045"/>
+                </a:solidFill>
+                <a:latin typeface="Arial"/>
+              </a:rPr>
+              <a:t> de </a:t>
+            </a:r>
+            <a:r>
+              <a:rPr sz="1250" b="0" dirty="0" err="1">
+                <a:solidFill>
+                  <a:srgbClr val="555045"/>
+                </a:solidFill>
+                <a:latin typeface="Arial"/>
+              </a:rPr>
+              <a:t>acertar</a:t>
+            </a:r>
+            <a:r>
+              <a:rPr sz="1250" b="0" dirty="0">
+                <a:solidFill>
+                  <a:srgbClr val="555045"/>
+                </a:solidFill>
+                <a:latin typeface="Arial"/>
+              </a:rPr>
+              <a:t> el </a:t>
+            </a:r>
+            <a:r>
+              <a:rPr sz="1250" b="0" dirty="0" err="1">
+                <a:solidFill>
+                  <a:srgbClr val="555045"/>
+                </a:solidFill>
+                <a:latin typeface="Arial"/>
+              </a:rPr>
+              <a:t>centro</a:t>
+            </a:r>
+            <a:r>
+              <a:rPr sz="1250" b="0" dirty="0">
+                <a:solidFill>
+                  <a:srgbClr val="555045"/>
+                </a:solidFill>
+                <a:latin typeface="Arial"/>
+              </a:rPr>
+              <a:t>, </a:t>
+            </a:r>
+            <a:r>
+              <a:rPr sz="1250" b="0" dirty="0" err="1">
+                <a:solidFill>
+                  <a:srgbClr val="555045"/>
+                </a:solidFill>
+                <a:latin typeface="Arial"/>
+              </a:rPr>
+              <a:t>gradúa</a:t>
+            </a:r>
+            <a:r>
+              <a:rPr sz="1250" b="0" dirty="0">
+                <a:solidFill>
+                  <a:srgbClr val="555045"/>
+                </a:solidFill>
+                <a:latin typeface="Arial"/>
+              </a:rPr>
+              <a:t> el ancho del </a:t>
+            </a:r>
+            <a:r>
+              <a:rPr sz="1250" b="0" dirty="0" err="1">
+                <a:solidFill>
+                  <a:srgbClr val="555045"/>
+                </a:solidFill>
+                <a:latin typeface="Arial"/>
+              </a:rPr>
+              <a:t>abanico</a:t>
+            </a:r>
+            <a:r>
+              <a:rPr sz="1250" b="0" dirty="0">
+                <a:solidFill>
+                  <a:srgbClr val="555045"/>
+                </a:solidFill>
+                <a:latin typeface="Arial"/>
+              </a:rPr>
+              <a:t> </a:t>
+            </a:r>
+            <a:r>
+              <a:rPr sz="1250" b="0" dirty="0" err="1">
+                <a:solidFill>
+                  <a:srgbClr val="555045"/>
+                </a:solidFill>
+                <a:latin typeface="Arial"/>
+              </a:rPr>
+              <a:t>por</a:t>
+            </a:r>
+            <a:r>
+              <a:rPr sz="1250" b="0" dirty="0">
+                <a:solidFill>
+                  <a:srgbClr val="555045"/>
+                </a:solidFill>
+                <a:latin typeface="Arial"/>
+              </a:rPr>
+              <a:t> </a:t>
+            </a:r>
+            <a:r>
+              <a:rPr sz="1250" b="0" dirty="0" err="1">
+                <a:solidFill>
+                  <a:srgbClr val="555045"/>
+                </a:solidFill>
+                <a:latin typeface="Arial"/>
+              </a:rPr>
+              <a:t>serie</a:t>
+            </a:r>
+            <a:r>
+              <a:rPr sz="1250" b="0" dirty="0">
+                <a:solidFill>
+                  <a:srgbClr val="555045"/>
+                </a:solidFill>
+                <a:latin typeface="Arial"/>
+              </a:rPr>
+              <a:t>. Es lo </a:t>
+            </a:r>
+            <a:r>
+              <a:rPr sz="1250" b="0" dirty="0" err="1">
+                <a:solidFill>
+                  <a:srgbClr val="555045"/>
+                </a:solidFill>
+                <a:latin typeface="Arial"/>
+              </a:rPr>
+              <a:t>que</a:t>
+            </a:r>
+            <a:r>
+              <a:rPr sz="1250" b="0" dirty="0">
+                <a:solidFill>
+                  <a:srgbClr val="555045"/>
+                </a:solidFill>
+                <a:latin typeface="Arial"/>
+              </a:rPr>
+              <a:t> </a:t>
+            </a:r>
+            <a:r>
+              <a:rPr sz="1250" b="0" dirty="0" err="1">
+                <a:solidFill>
+                  <a:srgbClr val="555045"/>
+                </a:solidFill>
+                <a:latin typeface="Arial"/>
+              </a:rPr>
+              <a:t>justifica</a:t>
+            </a:r>
+            <a:r>
+              <a:rPr sz="1250" b="0" dirty="0">
+                <a:solidFill>
+                  <a:srgbClr val="555045"/>
+                </a:solidFill>
+                <a:latin typeface="Arial"/>
+              </a:rPr>
+              <a:t> </a:t>
+            </a:r>
+            <a:r>
+              <a:rPr sz="1250" b="0" dirty="0" err="1">
+                <a:solidFill>
+                  <a:srgbClr val="555045"/>
+                </a:solidFill>
+                <a:latin typeface="Arial"/>
+              </a:rPr>
+              <a:t>haber</a:t>
+            </a:r>
+            <a:r>
+              <a:rPr sz="1250" b="0" dirty="0">
+                <a:solidFill>
+                  <a:srgbClr val="555045"/>
+                </a:solidFill>
+                <a:latin typeface="Arial"/>
+              </a:rPr>
+              <a:t> </a:t>
+            </a:r>
+            <a:r>
+              <a:rPr sz="1250" b="0" dirty="0" err="1">
+                <a:solidFill>
+                  <a:srgbClr val="555045"/>
+                </a:solidFill>
+                <a:latin typeface="Arial"/>
+              </a:rPr>
+              <a:t>elegido</a:t>
+            </a:r>
+            <a:r>
+              <a:rPr sz="1250" b="0" dirty="0">
+                <a:solidFill>
+                  <a:srgbClr val="555045"/>
+                </a:solidFill>
+                <a:latin typeface="Arial"/>
+              </a:rPr>
+              <a:t> un </a:t>
+            </a:r>
+            <a:r>
+              <a:rPr sz="1250" b="0" dirty="0" err="1">
+                <a:solidFill>
+                  <a:srgbClr val="555045"/>
+                </a:solidFill>
+                <a:latin typeface="Arial"/>
+              </a:rPr>
+              <a:t>modelo</a:t>
+            </a:r>
+            <a:r>
+              <a:rPr sz="1250" b="0" dirty="0">
+                <a:solidFill>
+                  <a:srgbClr val="555045"/>
+                </a:solidFill>
+                <a:latin typeface="Arial"/>
+              </a:rPr>
+              <a:t> </a:t>
+            </a:r>
+            <a:r>
+              <a:rPr sz="1250" b="0" dirty="0" err="1">
+                <a:solidFill>
+                  <a:srgbClr val="555045"/>
+                </a:solidFill>
+                <a:latin typeface="Arial"/>
+              </a:rPr>
+              <a:t>cuantílico</a:t>
+            </a:r>
+            <a:r>
+              <a:rPr sz="1250" b="0" dirty="0">
+                <a:solidFill>
+                  <a:srgbClr val="555045"/>
+                </a:solidFill>
+                <a:latin typeface="Arial"/>
+              </a:rPr>
+              <a:t> y no uno </a:t>
+            </a:r>
+            <a:r>
+              <a:rPr sz="1250" b="0" dirty="0" err="1">
+                <a:solidFill>
+                  <a:srgbClr val="555045"/>
+                </a:solidFill>
+                <a:latin typeface="Arial"/>
+              </a:rPr>
+              <a:t>puntual</a:t>
+            </a:r>
+            <a:r>
+              <a:rPr sz="1250" b="0" dirty="0">
+                <a:solidFill>
+                  <a:srgbClr val="555045"/>
+                </a:solidFill>
+                <a:latin typeface="Arial"/>
+              </a:rPr>
+              <a:t>.</a:t>
             </a:r>
           </a:p>
         </p:txBody>
@@ -33557,14 +34800,65 @@
                     <a:p>
                       <a:pPr algn="l"/>
                       <a:r>
-                        <a:rPr sz="1250" b="0">
+                        <a:rPr sz="1250" b="0" dirty="0">
                           <a:solidFill>
                             <a:srgbClr val="17150F"/>
                           </a:solidFill>
                           <a:latin typeface="Arial"/>
                         </a:rPr>
-                        <a:t>P4 frente a P3 · aporte del modelo</a:t>
+                        <a:t>P4 </a:t>
                       </a:r>
+                      <a:r>
+                        <a:rPr sz="1250" b="0" dirty="0" err="1">
+                          <a:solidFill>
+                            <a:srgbClr val="17150F"/>
+                          </a:solidFill>
+                          <a:latin typeface="Arial"/>
+                        </a:rPr>
+                        <a:t>frente</a:t>
+                      </a:r>
+                      <a:r>
+                        <a:rPr sz="1250" b="0" dirty="0">
+                          <a:solidFill>
+                            <a:srgbClr val="17150F"/>
+                          </a:solidFill>
+                          <a:latin typeface="Arial"/>
+                        </a:rPr>
+                        <a:t> a P3 · </a:t>
+                      </a:r>
+                      <a:r>
+                        <a:rPr sz="1250" b="0" dirty="0" err="1">
+                          <a:solidFill>
+                            <a:srgbClr val="17150F"/>
+                          </a:solidFill>
+                          <a:latin typeface="Arial"/>
+                        </a:rPr>
+                        <a:t>aporte</a:t>
+                      </a:r>
+                      <a:r>
+                        <a:rPr sz="1250" b="0" dirty="0">
+                          <a:solidFill>
+                            <a:srgbClr val="17150F"/>
+                          </a:solidFill>
+                          <a:latin typeface="Arial"/>
+                        </a:rPr>
+                        <a:t> del </a:t>
+                      </a:r>
+                      <a:r>
+                        <a:rPr sz="1250" b="0" dirty="0" err="1">
+                          <a:solidFill>
+                            <a:srgbClr val="17150F"/>
+                          </a:solidFill>
+                          <a:latin typeface="Arial"/>
+                        </a:rPr>
+                        <a:t>modelo</a:t>
+                      </a:r>
+                      <a:endParaRPr sz="1250" b="0" dirty="0">
+                        <a:solidFill>
+                          <a:srgbClr val="17150F"/>
+                        </a:solidFill>
+                        <a:latin typeface="Arial"/>
+                      </a:endParaRPr>
                     </a:p>
                   </a:txBody>
                   <a:tcPr marL="82296" marR="82296" anchor="ctr">
@@ -33656,14 +34950,65 @@
                     <a:p>
                       <a:pPr algn="l"/>
                       <a:r>
-                        <a:rPr sz="1250" b="0">
+                        <a:rPr sz="1250" b="0" dirty="0">
                           <a:solidFill>
                             <a:srgbClr val="17150F"/>
                           </a:solidFill>
                           <a:latin typeface="Arial"/>
                         </a:rPr>
-                        <a:t>P3 frente a P1 · aporte de la regla</a:t>
+                        <a:t>P3 </a:t>
                       </a:r>
+                      <a:r>
+                        <a:rPr sz="1250" b="0" dirty="0" err="1">
+                          <a:solidFill>
+                            <a:srgbClr val="17150F"/>
+                          </a:solidFill>
+                          <a:latin typeface="Arial"/>
+                        </a:rPr>
+                        <a:t>frente</a:t>
+                      </a:r>
+                      <a:r>
+                        <a:rPr sz="1250" b="0" dirty="0">
+                          <a:solidFill>
+                            <a:srgbClr val="17150F"/>
+                          </a:solidFill>
+                          <a:latin typeface="Arial"/>
+                        </a:rPr>
+                        <a:t> a P1 · </a:t>
+                      </a:r>
+                      <a:r>
+                        <a:rPr sz="1250" b="0" dirty="0" err="1">
+                          <a:solidFill>
+                            <a:srgbClr val="17150F"/>
+                          </a:solidFill>
+                          <a:latin typeface="Arial"/>
+                        </a:rPr>
+                        <a:t>aporte</a:t>
+                      </a:r>
+                      <a:r>
+                        <a:rPr sz="1250" b="0" dirty="0">
+                          <a:solidFill>
+                            <a:srgbClr val="17150F"/>
+                          </a:solidFill>
+                          <a:latin typeface="Arial"/>
+                        </a:rPr>
+                        <a:t> de la </a:t>
+                      </a:r>
+                      <a:r>
+                        <a:rPr sz="1250" b="0" dirty="0" err="1">
+                          <a:solidFill>
+                            <a:srgbClr val="17150F"/>
+                          </a:solidFill>
+                          <a:latin typeface="Arial"/>
+                        </a:rPr>
+                        <a:t>regla</a:t>
+                      </a:r>
+                      <a:endParaRPr sz="1250" b="0" dirty="0">
+                        <a:solidFill>
+                          <a:srgbClr val="17150F"/>
+                        </a:solidFill>
+                        <a:latin typeface="Arial"/>
+                      </a:endParaRPr>
                     </a:p>
                   </a:txBody>
                   <a:tcPr marL="82296" marR="82296" anchor="ctr">
@@ -33725,7 +35070,7 @@
                     <a:p>
                       <a:pPr algn="r"/>
                       <a:r>
-                        <a:rPr sz="1250" b="0">
+                        <a:rPr sz="1250" b="0" dirty="0">
                           <a:solidFill>
                             <a:srgbClr val="555045"/>
                           </a:solidFill>
@@ -34207,7 +35552,7 @@
         </p:nvSpPr>
         <p:spPr>
           <a:xfrm>
-            <a:off x="0" y="0"/>
+            <a:off x="305" y="222190"/>
             <a:ext cx="12191695" cy="6858000"/>
           </a:xfrm>
           <a:prstGeom prst="rect">
@@ -34413,848 +35758,256 @@
               </a:spcAft>
             </a:pPr>
             <a:r>
-              <a:rPr sz="1450" b="0">
-                <a:solidFill>
-                  <a:srgbClr val="555045"/>
-                </a:solidFill>
-                <a:latin typeface="Arial"/>
-              </a:rPr>
-              <a:t>Mismos datos, mismo modelo, mismas predicciones. Lo único que cambia es qué se supone que pasa con el sobrante al cierre.</a:t>
-            </a:r>
-          </a:p>
-        </p:txBody>
-      </p:sp>
-      <p:graphicFrame>
-        <p:nvGraphicFramePr>
-          <p:cNvPr id="7" name="Table 6"/>
-          <p:cNvGraphicFramePr>
-            <a:graphicFrameLocks noGrp="1"/>
-          </p:cNvGraphicFramePr>
-          <p:nvPr/>
-        </p:nvGraphicFramePr>
-        <p:xfrm>
-          <a:off x="777240" y="2237740"/>
-          <a:ext cx="10637212" cy="1554480"/>
-        </p:xfrm>
-        <a:graphic>
-          <a:graphicData uri="http://schemas.openxmlformats.org/drawingml/2006/table">
-            <a:tbl>
-              <a:tblPr bandRow="1">
-                <a:tableStyleId>{5C22544A-7EE6-4342-B048-85BDC9FD1C3A}</a:tableStyleId>
-              </a:tblPr>
-              <a:tblGrid>
-                <a:gridCol w="3829397">
-                  <a:extLst>
-                    <a:ext uri="{9D8B030D-6E8A-4147-A177-3AD203B41FA5}">
-                      <a16:colId xmlns:a16="http://schemas.microsoft.com/office/drawing/2014/main" val="20000"/>
-                    </a:ext>
-                  </a:extLst>
-                </a:gridCol>
-                <a:gridCol w="1914698">
-                  <a:extLst>
-                    <a:ext uri="{9D8B030D-6E8A-4147-A177-3AD203B41FA5}">
-                      <a16:colId xmlns:a16="http://schemas.microsoft.com/office/drawing/2014/main" val="20001"/>
-                    </a:ext>
-                  </a:extLst>
-                </a:gridCol>
-                <a:gridCol w="1914698">
-                  <a:extLst>
-                    <a:ext uri="{9D8B030D-6E8A-4147-A177-3AD203B41FA5}">
-                      <a16:colId xmlns:a16="http://schemas.microsoft.com/office/drawing/2014/main" val="20002"/>
-                    </a:ext>
-                  </a:extLst>
-                </a:gridCol>
-                <a:gridCol w="1701954">
-                  <a:extLst>
-                    <a:ext uri="{9D8B030D-6E8A-4147-A177-3AD203B41FA5}">
-                      <a16:colId xmlns:a16="http://schemas.microsoft.com/office/drawing/2014/main" val="20003"/>
-                    </a:ext>
-                  </a:extLst>
-                </a:gridCol>
-                <a:gridCol w="1276465">
-                  <a:extLst>
-                    <a:ext uri="{9D8B030D-6E8A-4147-A177-3AD203B41FA5}">
-                      <a16:colId xmlns:a16="http://schemas.microsoft.com/office/drawing/2014/main" val="20004"/>
-                    </a:ext>
-                  </a:extLst>
-                </a:gridCol>
-              </a:tblGrid>
-              <a:tr h="347472">
-                <a:tc>
-                  <a:txBody>
-                    <a:bodyPr/>
-                    <a:lstStyle/>
-                    <a:p>
-                      <a:pPr algn="l"/>
-                      <a:r>
-                        <a:rPr sz="1100" b="1">
-                          <a:solidFill>
-                            <a:srgbClr val="8B8478"/>
-                          </a:solidFill>
-                          <a:latin typeface="Arial"/>
-                        </a:rPr>
-                        <a:t>Escenario</a:t>
-                      </a:r>
-                    </a:p>
-                  </a:txBody>
-                  <a:tcPr marL="82296" marR="82296" anchor="ctr">
-                    <a:solidFill>
-                      <a:srgbClr val="F4F2ED"/>
-                    </a:solidFill>
-                  </a:tcPr>
-                </a:tc>
-                <a:tc>
-                  <a:txBody>
-                    <a:bodyPr/>
-                    <a:lstStyle/>
-                    <a:p>
-                      <a:pPr algn="r"/>
-                      <a:r>
-                        <a:rPr sz="1100" b="1">
-                          <a:solidFill>
-                            <a:srgbClr val="8B8478"/>
-                          </a:solidFill>
-                          <a:latin typeface="Arial"/>
-                        </a:rPr>
-                        <a:t>Coste al pedir el centro</a:t>
-                      </a:r>
-                    </a:p>
-                  </a:txBody>
-                  <a:tcPr marL="82296" marR="82296" anchor="ctr">
-                    <a:solidFill>
-                      <a:srgbClr val="F4F2ED"/>
-                    </a:solidFill>
-                  </a:tcPr>
-                </a:tc>
-                <a:tc>
-                  <a:txBody>
-                    <a:bodyPr/>
-                    <a:lstStyle/>
-                    <a:p>
-                      <a:pPr algn="r"/>
-                      <a:r>
-                        <a:rPr sz="1100" b="1">
-                          <a:solidFill>
-                            <a:srgbClr val="8B8478"/>
-                          </a:solidFill>
-                          <a:latin typeface="Arial"/>
-                        </a:rPr>
-                        <a:t>Coste con la propuesta</a:t>
-                      </a:r>
-                    </a:p>
-                  </a:txBody>
-                  <a:tcPr marL="82296" marR="82296" anchor="ctr">
-                    <a:solidFill>
-                      <a:srgbClr val="F4F2ED"/>
-                    </a:solidFill>
-                  </a:tcPr>
-                </a:tc>
-                <a:tc>
-                  <a:txBody>
-                    <a:bodyPr/>
-                    <a:lstStyle/>
-                    <a:p>
-                      <a:pPr algn="r"/>
-                      <a:r>
-                        <a:rPr sz="1100" b="1">
-                          <a:solidFill>
-                            <a:srgbClr val="8B8478"/>
-                          </a:solidFill>
-                          <a:latin typeface="Arial"/>
-                        </a:rPr>
-                        <a:t>Ahorro</a:t>
-                      </a:r>
-                    </a:p>
-                  </a:txBody>
-                  <a:tcPr marL="82296" marR="82296" anchor="ctr">
-                    <a:solidFill>
-                      <a:srgbClr val="F4F2ED"/>
-                    </a:solidFill>
-                  </a:tcPr>
-                </a:tc>
-                <a:tc>
-                  <a:txBody>
-                    <a:bodyPr/>
-                    <a:lstStyle/>
-                    <a:p>
-                      <a:pPr algn="r"/>
-                      <a:r>
-                        <a:rPr sz="1100" b="1">
-                          <a:solidFill>
-                            <a:srgbClr val="8B8478"/>
-                          </a:solidFill>
-                          <a:latin typeface="Arial"/>
-                        </a:rPr>
-                        <a:t>Ahorro %</a:t>
-                      </a:r>
-                    </a:p>
-                  </a:txBody>
-                  <a:tcPr marL="82296" marR="82296" anchor="ctr">
-                    <a:solidFill>
-                      <a:srgbClr val="F4F2ED"/>
-                    </a:solidFill>
-                  </a:tcPr>
-                </a:tc>
-                <a:extLst>
-                  <a:ext uri="{0D108BD9-81ED-4DB2-BD59-A6C34878D82A}">
-                    <a16:rowId xmlns:a16="http://schemas.microsoft.com/office/drawing/2014/main" val="10000"/>
-                  </a:ext>
-                </a:extLst>
-              </a:tr>
-              <a:tr h="402336">
-                <a:tc>
-                  <a:txBody>
-                    <a:bodyPr/>
-                    <a:lstStyle/>
-                    <a:p>
-                      <a:pPr algn="l"/>
-                      <a:r>
-                        <a:rPr sz="1250" b="0">
-                          <a:solidFill>
-                            <a:srgbClr val="17150F"/>
-                          </a:solidFill>
-                          <a:latin typeface="Arial"/>
-                        </a:rPr>
-                        <a:t>Sin merma · el sobrante se guarda</a:t>
-                      </a:r>
-                    </a:p>
-                  </a:txBody>
-                  <a:tcPr marL="82296" marR="82296" anchor="ctr">
-                    <a:solidFill>
-                      <a:srgbClr val="FFFFFF"/>
-                    </a:solidFill>
-                  </a:tcPr>
-                </a:tc>
-                <a:tc>
-                  <a:txBody>
-                    <a:bodyPr/>
-                    <a:lstStyle/>
-                    <a:p>
-                      <a:pPr algn="r"/>
-                      <a:r>
-                        <a:rPr sz="1250" b="0">
-                          <a:solidFill>
-                            <a:srgbClr val="555045"/>
-                          </a:solidFill>
-                          <a:latin typeface="Arial"/>
-                        </a:rPr>
-                        <a:t>6.025.518</a:t>
-                      </a:r>
-                    </a:p>
-                  </a:txBody>
-                  <a:tcPr marL="82296" marR="82296" anchor="ctr">
-                    <a:solidFill>
-                      <a:srgbClr val="FFFFFF"/>
-                    </a:solidFill>
-                  </a:tcPr>
-                </a:tc>
-                <a:tc>
-                  <a:txBody>
-                    <a:bodyPr/>
-                    <a:lstStyle/>
-                    <a:p>
-                      <a:pPr algn="r"/>
-                      <a:r>
-                        <a:rPr sz="1250" b="0">
-                          <a:solidFill>
-                            <a:srgbClr val="555045"/>
-                          </a:solidFill>
-                          <a:latin typeface="Arial"/>
-                        </a:rPr>
-                        <a:t>448.551</a:t>
-                      </a:r>
-                    </a:p>
-                  </a:txBody>
-                  <a:tcPr marL="82296" marR="82296" anchor="ctr">
-                    <a:solidFill>
-                      <a:srgbClr val="FFFFFF"/>
-                    </a:solidFill>
-                  </a:tcPr>
-                </a:tc>
-                <a:tc>
-                  <a:txBody>
-                    <a:bodyPr/>
-                    <a:lstStyle/>
-                    <a:p>
-                      <a:pPr algn="r"/>
-                      <a:r>
-                        <a:rPr sz="1250" b="0">
-                          <a:solidFill>
-                            <a:srgbClr val="555045"/>
-                          </a:solidFill>
-                          <a:latin typeface="Arial"/>
-                        </a:rPr>
-                        <a:t>5.576.966</a:t>
-                      </a:r>
-                    </a:p>
-                  </a:txBody>
-                  <a:tcPr marL="82296" marR="82296" anchor="ctr">
-                    <a:solidFill>
-                      <a:srgbClr val="FFFFFF"/>
-                    </a:solidFill>
-                  </a:tcPr>
-                </a:tc>
-                <a:tc>
-                  <a:txBody>
-                    <a:bodyPr/>
-                    <a:lstStyle/>
-                    <a:p>
-                      <a:pPr algn="r"/>
-                      <a:r>
-                        <a:rPr sz="1250" b="0">
-                          <a:solidFill>
-                            <a:srgbClr val="555045"/>
-                          </a:solidFill>
-                          <a:latin typeface="Arial"/>
-                        </a:rPr>
-                        <a:t>92,6 %</a:t>
-                      </a:r>
-                    </a:p>
-                  </a:txBody>
-                  <a:tcPr marL="82296" marR="82296" anchor="ctr">
-                    <a:solidFill>
-                      <a:srgbClr val="FFFFFF"/>
-                    </a:solidFill>
-                  </a:tcPr>
-                </a:tc>
-                <a:extLst>
-                  <a:ext uri="{0D108BD9-81ED-4DB2-BD59-A6C34878D82A}">
-                    <a16:rowId xmlns:a16="http://schemas.microsoft.com/office/drawing/2014/main" val="10001"/>
-                  </a:ext>
-                </a:extLst>
-              </a:tr>
-              <a:tr h="402336">
-                <a:tc>
-                  <a:txBody>
-                    <a:bodyPr/>
-                    <a:lstStyle/>
-                    <a:p>
-                      <a:pPr algn="l"/>
-                      <a:r>
-                        <a:rPr sz="1250" b="0">
-                          <a:solidFill>
-                            <a:srgbClr val="17150F"/>
-                          </a:solidFill>
-                          <a:latin typeface="Arial"/>
-                        </a:rPr>
-                        <a:t>Merma parcial · se recupera la mitad</a:t>
-                      </a:r>
-                    </a:p>
-                  </a:txBody>
-                  <a:tcPr marL="82296" marR="82296" anchor="ctr">
-                    <a:solidFill>
-                      <a:srgbClr val="FFFFFF"/>
-                    </a:solidFill>
-                  </a:tcPr>
-                </a:tc>
-                <a:tc>
-                  <a:txBody>
-                    <a:bodyPr/>
-                    <a:lstStyle/>
-                    <a:p>
-                      <a:pPr algn="r"/>
-                      <a:r>
-                        <a:rPr sz="1250" b="0">
-                          <a:solidFill>
-                            <a:srgbClr val="555045"/>
-                          </a:solidFill>
-                          <a:latin typeface="Arial"/>
-                        </a:rPr>
-                        <a:t>7.793.518</a:t>
-                      </a:r>
-                    </a:p>
-                  </a:txBody>
-                  <a:tcPr marL="82296" marR="82296" anchor="ctr">
-                    <a:solidFill>
-                      <a:srgbClr val="FFFFFF"/>
-                    </a:solidFill>
-                  </a:tcPr>
-                </a:tc>
-                <a:tc>
-                  <a:txBody>
-                    <a:bodyPr/>
-                    <a:lstStyle/>
-                    <a:p>
-                      <a:pPr algn="r"/>
-                      <a:r>
-                        <a:rPr sz="1250" b="0">
-                          <a:solidFill>
-                            <a:srgbClr val="555045"/>
-                          </a:solidFill>
-                          <a:latin typeface="Arial"/>
-                        </a:rPr>
-                        <a:t>6.051.554</a:t>
-                      </a:r>
-                    </a:p>
-                  </a:txBody>
-                  <a:tcPr marL="82296" marR="82296" anchor="ctr">
-                    <a:solidFill>
-                      <a:srgbClr val="FFFFFF"/>
-                    </a:solidFill>
-                  </a:tcPr>
-                </a:tc>
-                <a:tc>
-                  <a:txBody>
-                    <a:bodyPr/>
-                    <a:lstStyle/>
-                    <a:p>
-                      <a:pPr algn="r"/>
-                      <a:r>
-                        <a:rPr sz="1250" b="0">
-                          <a:solidFill>
-                            <a:srgbClr val="555045"/>
-                          </a:solidFill>
-                          <a:latin typeface="Arial"/>
-                        </a:rPr>
-                        <a:t>1.741.964</a:t>
-                      </a:r>
-                    </a:p>
-                  </a:txBody>
-                  <a:tcPr marL="82296" marR="82296" anchor="ctr">
-                    <a:solidFill>
-                      <a:srgbClr val="FFFFFF"/>
-                    </a:solidFill>
-                  </a:tcPr>
-                </a:tc>
-                <a:tc>
-                  <a:txBody>
-                    <a:bodyPr/>
-                    <a:lstStyle/>
-                    <a:p>
-                      <a:pPr algn="r"/>
-                      <a:r>
-                        <a:rPr sz="1250" b="0">
-                          <a:solidFill>
-                            <a:srgbClr val="555045"/>
-                          </a:solidFill>
-                          <a:latin typeface="Arial"/>
-                        </a:rPr>
-                        <a:t>22,4 %</a:t>
-                      </a:r>
-                    </a:p>
-                  </a:txBody>
-                  <a:tcPr marL="82296" marR="82296" anchor="ctr">
-                    <a:solidFill>
-                      <a:srgbClr val="FFFFFF"/>
-                    </a:solidFill>
-                  </a:tcPr>
-                </a:tc>
-                <a:extLst>
-                  <a:ext uri="{0D108BD9-81ED-4DB2-BD59-A6C34878D82A}">
-                    <a16:rowId xmlns:a16="http://schemas.microsoft.com/office/drawing/2014/main" val="10002"/>
-                  </a:ext>
-                </a:extLst>
-              </a:tr>
-              <a:tr h="402336">
-                <a:tc>
-                  <a:txBody>
-                    <a:bodyPr/>
-                    <a:lstStyle/>
-                    <a:p>
-                      <a:pPr algn="l"/>
-                      <a:r>
-                        <a:rPr sz="1250" b="1">
-                          <a:solidFill>
-                            <a:srgbClr val="17150F"/>
-                          </a:solidFill>
-                          <a:latin typeface="Arial"/>
-                        </a:rPr>
-                        <a:t>Con merma · se descarta · recomendado</a:t>
-                      </a:r>
-                    </a:p>
-                  </a:txBody>
-                  <a:tcPr marL="82296" marR="82296" anchor="ctr">
-                    <a:solidFill>
-                      <a:srgbClr val="F7EEEF"/>
-                    </a:solidFill>
-                  </a:tcPr>
-                </a:tc>
-                <a:tc>
-                  <a:txBody>
-                    <a:bodyPr/>
-                    <a:lstStyle/>
-                    <a:p>
-                      <a:pPr algn="r"/>
-                      <a:r>
-                        <a:rPr sz="1250" b="1">
-                          <a:solidFill>
-                            <a:srgbClr val="17150F"/>
-                          </a:solidFill>
-                          <a:latin typeface="Arial"/>
-                        </a:rPr>
-                        <a:t>9.561.518</a:t>
-                      </a:r>
-                    </a:p>
-                  </a:txBody>
-                  <a:tcPr marL="82296" marR="82296" anchor="ctr">
-                    <a:solidFill>
-                      <a:srgbClr val="F7EEEF"/>
-                    </a:solidFill>
-                  </a:tcPr>
-                </a:tc>
-                <a:tc>
-                  <a:txBody>
-                    <a:bodyPr/>
-                    <a:lstStyle/>
-                    <a:p>
-                      <a:pPr algn="r"/>
-                      <a:r>
-                        <a:rPr sz="1250" b="1">
-                          <a:solidFill>
-                            <a:srgbClr val="17150F"/>
-                          </a:solidFill>
-                          <a:latin typeface="Arial"/>
-                        </a:rPr>
-                        <a:t>9.062.061</a:t>
-                      </a:r>
-                    </a:p>
-                  </a:txBody>
-                  <a:tcPr marL="82296" marR="82296" anchor="ctr">
-                    <a:solidFill>
-                      <a:srgbClr val="F7EEEF"/>
-                    </a:solidFill>
-                  </a:tcPr>
-                </a:tc>
-                <a:tc>
-                  <a:txBody>
-                    <a:bodyPr/>
-                    <a:lstStyle/>
-                    <a:p>
-                      <a:pPr algn="r"/>
-                      <a:r>
-                        <a:rPr sz="1250" b="1">
-                          <a:solidFill>
-                            <a:srgbClr val="17150F"/>
-                          </a:solidFill>
-                          <a:latin typeface="Arial"/>
-                        </a:rPr>
-                        <a:t>499.457</a:t>
-                      </a:r>
-                    </a:p>
-                  </a:txBody>
-                  <a:tcPr marL="82296" marR="82296" anchor="ctr">
-                    <a:solidFill>
-                      <a:srgbClr val="F7EEEF"/>
-                    </a:solidFill>
-                  </a:tcPr>
-                </a:tc>
-                <a:tc>
-                  <a:txBody>
-                    <a:bodyPr/>
-                    <a:lstStyle/>
-                    <a:p>
-                      <a:pPr algn="r"/>
-                      <a:r>
-                        <a:rPr sz="1250" b="1">
-                          <a:solidFill>
-                            <a:srgbClr val="17150F"/>
-                          </a:solidFill>
-                          <a:latin typeface="Arial"/>
-                        </a:rPr>
-                        <a:t>5,2 %</a:t>
-                      </a:r>
-                    </a:p>
-                  </a:txBody>
-                  <a:tcPr marL="82296" marR="82296" anchor="ctr">
-                    <a:solidFill>
-                      <a:srgbClr val="F7EEEF"/>
-                    </a:solidFill>
-                  </a:tcPr>
-                </a:tc>
-                <a:extLst>
-                  <a:ext uri="{0D108BD9-81ED-4DB2-BD59-A6C34878D82A}">
-                    <a16:rowId xmlns:a16="http://schemas.microsoft.com/office/drawing/2014/main" val="10003"/>
-                  </a:ext>
-                </a:extLst>
-              </a:tr>
-            </a:tbl>
-          </a:graphicData>
-        </a:graphic>
-      </p:graphicFrame>
-      <p:sp>
-        <p:nvSpPr>
-          <p:cNvPr id="8" name="Rectangle 7"/>
-          <p:cNvSpPr/>
-          <p:nvPr/>
-        </p:nvSpPr>
-        <p:spPr>
-          <a:xfrm>
-            <a:off x="777240" y="4258564"/>
-            <a:ext cx="63500" cy="63500"/>
-          </a:xfrm>
-          <a:prstGeom prst="rect">
-            <a:avLst/>
-          </a:prstGeom>
-          <a:solidFill>
-            <a:srgbClr val="8C2F39"/>
-          </a:solidFill>
-          <a:ln>
-            <a:noFill/>
-          </a:ln>
-          <a:effectLst/>
-        </p:spPr>
-        <p:style>
-          <a:lnRef idx="1">
-            <a:schemeClr val="accent1"/>
-          </a:lnRef>
-          <a:fillRef idx="3">
-            <a:schemeClr val="accent1"/>
-          </a:fillRef>
-          <a:effectRef idx="2">
-            <a:schemeClr val="accent1"/>
-          </a:effectRef>
-          <a:fontRef idx="minor">
-            <a:schemeClr val="lt1"/>
-          </a:fontRef>
-        </p:style>
-        <p:txBody>
-          <a:bodyPr rtlCol="0" anchor="ctr"/>
-          <a:lstStyle/>
-          <a:p>
-            <a:pPr algn="ctr"/>
-            <a:endParaRPr/>
-          </a:p>
-        </p:txBody>
-      </p:sp>
-      <p:sp>
-        <p:nvSpPr>
-          <p:cNvPr id="9" name="TextBox 8"/>
-          <p:cNvSpPr txBox="1"/>
-          <p:nvPr/>
-        </p:nvSpPr>
-        <p:spPr>
-          <a:xfrm>
-            <a:off x="978408" y="4157980"/>
-            <a:ext cx="10436047" cy="530098"/>
-          </a:xfrm>
-          <a:prstGeom prst="rect">
-            <a:avLst/>
-          </a:prstGeom>
-          <a:noFill/>
-        </p:spPr>
-        <p:txBody>
-          <a:bodyPr wrap="square" lIns="0" tIns="0" rIns="0" bIns="0">
-            <a:spAutoFit/>
-          </a:bodyPr>
-          <a:lstStyle/>
-          <a:p>
-            <a:pPr>
-              <a:lnSpc>
-                <a:spcPct val="124000"/>
-              </a:lnSpc>
-              <a:spcAft>
-                <a:spcPts val="0"/>
-              </a:spcAft>
-            </a:pPr>
-            <a:r>
-              <a:rPr sz="1450" b="1">
-                <a:solidFill>
-                  <a:srgbClr val="17150F"/>
-                </a:solidFill>
-                <a:latin typeface="Arial"/>
-              </a:rPr>
-              <a:t>Por qué pasa.</a:t>
-            </a:r>
-            <a:r>
-              <a:rPr sz="1450" b="0">
-                <a:solidFill>
-                  <a:srgbClr val="555045"/>
-                </a:solidFill>
-                <a:latin typeface="Arial"/>
-              </a:rPr>
-              <a:t> Cuando sobrar cuesta 10 pesos, pedir de más es casi gratis y la política de nivel arrasa. Cuando cuesta 810, protegerse sale caro y el margen se estrecha.</a:t>
-            </a:r>
-          </a:p>
-        </p:txBody>
-      </p:sp>
-      <p:sp>
-        <p:nvSpPr>
-          <p:cNvPr id="10" name="Rectangle 9"/>
-          <p:cNvSpPr/>
-          <p:nvPr/>
-        </p:nvSpPr>
-        <p:spPr>
-          <a:xfrm>
-            <a:off x="777240" y="4916678"/>
-            <a:ext cx="63500" cy="63500"/>
-          </a:xfrm>
-          <a:prstGeom prst="rect">
-            <a:avLst/>
-          </a:prstGeom>
-          <a:solidFill>
-            <a:srgbClr val="8C2F39"/>
-          </a:solidFill>
-          <a:ln>
-            <a:noFill/>
-          </a:ln>
-          <a:effectLst/>
-        </p:spPr>
-        <p:style>
-          <a:lnRef idx="1">
-            <a:schemeClr val="accent1"/>
-          </a:lnRef>
-          <a:fillRef idx="3">
-            <a:schemeClr val="accent1"/>
-          </a:fillRef>
-          <a:effectRef idx="2">
-            <a:schemeClr val="accent1"/>
-          </a:effectRef>
-          <a:fontRef idx="minor">
-            <a:schemeClr val="lt1"/>
-          </a:fontRef>
-        </p:style>
-        <p:txBody>
-          <a:bodyPr rtlCol="0" anchor="ctr"/>
-          <a:lstStyle/>
-          <a:p>
-            <a:pPr algn="ctr"/>
-            <a:endParaRPr/>
-          </a:p>
-        </p:txBody>
-      </p:sp>
-      <p:sp>
-        <p:nvSpPr>
-          <p:cNvPr id="11" name="TextBox 10"/>
-          <p:cNvSpPr txBox="1"/>
-          <p:nvPr/>
-        </p:nvSpPr>
-        <p:spPr>
-          <a:xfrm>
-            <a:off x="978408" y="4816094"/>
-            <a:ext cx="10436047" cy="776859"/>
-          </a:xfrm>
-          <a:prstGeom prst="rect">
-            <a:avLst/>
-          </a:prstGeom>
-          <a:noFill/>
-        </p:spPr>
-        <p:txBody>
-          <a:bodyPr wrap="square" lIns="0" tIns="0" rIns="0" bIns="0">
-            <a:spAutoFit/>
-          </a:bodyPr>
-          <a:lstStyle/>
-          <a:p>
-            <a:pPr>
-              <a:lnSpc>
-                <a:spcPct val="124000"/>
-              </a:lnSpc>
-              <a:spcAft>
-                <a:spcPts val="0"/>
-              </a:spcAft>
-            </a:pPr>
-            <a:r>
-              <a:rPr sz="1450" b="1">
-                <a:solidFill>
-                  <a:srgbClr val="17150F"/>
-                </a:solidFill>
-                <a:latin typeface="Arial"/>
-              </a:rPr>
-              <a:t>Recomendamos el escenario con merma</a:t>
-            </a:r>
-            <a:r>
-              <a:rPr sz="1450" b="0">
-                <a:solidFill>
-                  <a:srgbClr val="555045"/>
-                </a:solidFill>
-                <a:latin typeface="Arial"/>
-              </a:rPr>
-              <a:t> por tres razones: el catálogo son ocho referencias de cafetería y bollería que no se guardan; es el único donde los niveles se diferencian por margen, que es lo que pide el encargo; y da la cifra más baja de las tres.</a:t>
-            </a:r>
-          </a:p>
-        </p:txBody>
-      </p:sp>
-      <p:sp>
-        <p:nvSpPr>
-          <p:cNvPr id="12" name="Rectangle 11"/>
-          <p:cNvSpPr/>
-          <p:nvPr/>
-        </p:nvSpPr>
-        <p:spPr>
-          <a:xfrm>
-            <a:off x="777240" y="5821553"/>
-            <a:ext cx="63500" cy="63500"/>
-          </a:xfrm>
-          <a:prstGeom prst="rect">
-            <a:avLst/>
-          </a:prstGeom>
-          <a:solidFill>
-            <a:srgbClr val="8C2F39"/>
-          </a:solidFill>
-          <a:ln>
-            <a:noFill/>
-          </a:ln>
-          <a:effectLst/>
-        </p:spPr>
-        <p:style>
-          <a:lnRef idx="1">
-            <a:schemeClr val="accent1"/>
-          </a:lnRef>
-          <a:fillRef idx="3">
-            <a:schemeClr val="accent1"/>
-          </a:fillRef>
-          <a:effectRef idx="2">
-            <a:schemeClr val="accent1"/>
-          </a:effectRef>
-          <a:fontRef idx="minor">
-            <a:schemeClr val="lt1"/>
-          </a:fontRef>
-        </p:style>
-        <p:txBody>
-          <a:bodyPr rtlCol="0" anchor="ctr"/>
-          <a:lstStyle/>
-          <a:p>
-            <a:pPr algn="ctr"/>
-            <a:endParaRPr/>
-          </a:p>
-        </p:txBody>
-      </p:sp>
-      <p:sp>
-        <p:nvSpPr>
-          <p:cNvPr id="13" name="TextBox 12"/>
-          <p:cNvSpPr txBox="1"/>
-          <p:nvPr/>
-        </p:nvSpPr>
-        <p:spPr>
-          <a:xfrm>
-            <a:off x="978408" y="5720969"/>
-            <a:ext cx="10436047" cy="530098"/>
-          </a:xfrm>
-          <a:prstGeom prst="rect">
-            <a:avLst/>
-          </a:prstGeom>
-          <a:noFill/>
-        </p:spPr>
-        <p:txBody>
-          <a:bodyPr wrap="square" lIns="0" tIns="0" rIns="0" bIns="0">
-            <a:spAutoFit/>
-          </a:bodyPr>
-          <a:lstStyle/>
-          <a:p>
-            <a:pPr>
-              <a:lnSpc>
-                <a:spcPct val="124000"/>
-              </a:lnSpc>
-              <a:spcAft>
-                <a:spcPts val="0"/>
-              </a:spcAft>
-            </a:pPr>
-            <a:r>
-              <a:rPr sz="1450" b="1">
-                <a:solidFill>
-                  <a:srgbClr val="17150F"/>
-                </a:solidFill>
-                <a:latin typeface="Arial"/>
-              </a:rPr>
-              <a:t>Prometer un 92 % y entregar un 5 % destruiría la credibilidad del proyecto entero.</a:t>
-            </a:r>
-            <a:r>
-              <a:rPr sz="1450" b="0">
-                <a:solidFill>
-                  <a:srgbClr val="555045"/>
-                </a:solidFill>
-                <a:latin typeface="Arial"/>
-              </a:rPr>
-              <a:t> Al revés, si el piloto revela que se pierde menos producto del supuesto, el resultado solo puede mejorar.</a:t>
+              <a:rPr sz="1450" b="0" dirty="0" err="1">
+                <a:solidFill>
+                  <a:srgbClr val="555045"/>
+                </a:solidFill>
+                <a:latin typeface="Arial"/>
+              </a:rPr>
+              <a:t>Mismos</a:t>
+            </a:r>
+            <a:r>
+              <a:rPr sz="1450" b="0" dirty="0">
+                <a:solidFill>
+                  <a:srgbClr val="555045"/>
+                </a:solidFill>
+                <a:latin typeface="Arial"/>
+              </a:rPr>
+              <a:t> </a:t>
+            </a:r>
+            <a:r>
+              <a:rPr sz="1450" b="0" dirty="0" err="1">
+                <a:solidFill>
+                  <a:srgbClr val="555045"/>
+                </a:solidFill>
+                <a:latin typeface="Arial"/>
+              </a:rPr>
+              <a:t>datos</a:t>
+            </a:r>
+            <a:r>
+              <a:rPr sz="1450" b="0" dirty="0">
+                <a:solidFill>
+                  <a:srgbClr val="555045"/>
+                </a:solidFill>
+                <a:latin typeface="Arial"/>
+              </a:rPr>
+              <a:t>, </a:t>
+            </a:r>
+            <a:r>
+              <a:rPr sz="1450" b="0" dirty="0" err="1">
+                <a:solidFill>
+                  <a:srgbClr val="555045"/>
+                </a:solidFill>
+                <a:latin typeface="Arial"/>
+              </a:rPr>
+              <a:t>mismo</a:t>
+            </a:r>
+            <a:r>
+              <a:rPr sz="1450" b="0" dirty="0">
+                <a:solidFill>
+                  <a:srgbClr val="555045"/>
+                </a:solidFill>
+                <a:latin typeface="Arial"/>
+              </a:rPr>
+              <a:t> </a:t>
+            </a:r>
+            <a:r>
+              <a:rPr sz="1450" b="0" dirty="0" err="1">
+                <a:solidFill>
+                  <a:srgbClr val="555045"/>
+                </a:solidFill>
+                <a:latin typeface="Arial"/>
+              </a:rPr>
+              <a:t>modelo</a:t>
+            </a:r>
+            <a:r>
+              <a:rPr sz="1450" b="0" dirty="0">
+                <a:solidFill>
+                  <a:srgbClr val="555045"/>
+                </a:solidFill>
+                <a:latin typeface="Arial"/>
+              </a:rPr>
+              <a:t>, </a:t>
+            </a:r>
+            <a:r>
+              <a:rPr sz="1450" b="0" dirty="0" err="1">
+                <a:solidFill>
+                  <a:srgbClr val="555045"/>
+                </a:solidFill>
+                <a:latin typeface="Arial"/>
+              </a:rPr>
+              <a:t>mismas</a:t>
+            </a:r>
+            <a:r>
+              <a:rPr sz="1450" b="0" dirty="0">
+                <a:solidFill>
+                  <a:srgbClr val="555045"/>
+                </a:solidFill>
+                <a:latin typeface="Arial"/>
+              </a:rPr>
+              <a:t> </a:t>
+            </a:r>
+            <a:r>
+              <a:rPr sz="1450" b="0" dirty="0" err="1">
+                <a:solidFill>
+                  <a:srgbClr val="555045"/>
+                </a:solidFill>
+                <a:latin typeface="Arial"/>
+              </a:rPr>
+              <a:t>predicciones</a:t>
+            </a:r>
+            <a:r>
+              <a:rPr sz="1450" b="0" dirty="0">
+                <a:solidFill>
+                  <a:srgbClr val="555045"/>
+                </a:solidFill>
+                <a:latin typeface="Arial"/>
+              </a:rPr>
+              <a:t>. Lo </a:t>
+            </a:r>
+            <a:r>
+              <a:rPr sz="1450" b="0" dirty="0" err="1">
+                <a:solidFill>
+                  <a:srgbClr val="555045"/>
+                </a:solidFill>
+                <a:latin typeface="Arial"/>
+              </a:rPr>
+              <a:t>único</a:t>
+            </a:r>
+            <a:r>
+              <a:rPr sz="1450" b="0" dirty="0">
+                <a:solidFill>
+                  <a:srgbClr val="555045"/>
+                </a:solidFill>
+                <a:latin typeface="Arial"/>
+              </a:rPr>
+              <a:t> </a:t>
+            </a:r>
+            <a:r>
+              <a:rPr sz="1450" b="0" dirty="0" err="1">
+                <a:solidFill>
+                  <a:srgbClr val="555045"/>
+                </a:solidFill>
+                <a:latin typeface="Arial"/>
+              </a:rPr>
+              <a:t>que</a:t>
+            </a:r>
+            <a:r>
+              <a:rPr sz="1450" b="0" dirty="0">
+                <a:solidFill>
+                  <a:srgbClr val="555045"/>
+                </a:solidFill>
+                <a:latin typeface="Arial"/>
+              </a:rPr>
+              <a:t> cambia es </a:t>
+            </a:r>
+            <a:r>
+              <a:rPr sz="1450" b="0" dirty="0" err="1">
+                <a:solidFill>
+                  <a:srgbClr val="555045"/>
+                </a:solidFill>
+                <a:latin typeface="Arial"/>
+              </a:rPr>
+              <a:t>qué</a:t>
+            </a:r>
+            <a:r>
+              <a:rPr sz="1450" b="0" dirty="0">
+                <a:solidFill>
+                  <a:srgbClr val="555045"/>
+                </a:solidFill>
+                <a:latin typeface="Arial"/>
+              </a:rPr>
+              <a:t> se </a:t>
+            </a:r>
+            <a:r>
+              <a:rPr sz="1450" b="0" dirty="0" err="1">
+                <a:solidFill>
+                  <a:srgbClr val="555045"/>
+                </a:solidFill>
+                <a:latin typeface="Arial"/>
+              </a:rPr>
+              <a:t>supone</a:t>
+            </a:r>
+            <a:r>
+              <a:rPr sz="1450" b="0" dirty="0">
+                <a:solidFill>
+                  <a:srgbClr val="555045"/>
+                </a:solidFill>
+                <a:latin typeface="Arial"/>
+              </a:rPr>
+              <a:t> </a:t>
+            </a:r>
+            <a:r>
+              <a:rPr sz="1450" b="0" dirty="0" err="1">
+                <a:solidFill>
+                  <a:srgbClr val="555045"/>
+                </a:solidFill>
+                <a:latin typeface="Arial"/>
+              </a:rPr>
+              <a:t>que</a:t>
+            </a:r>
+            <a:r>
+              <a:rPr sz="1450" b="0" dirty="0">
+                <a:solidFill>
+                  <a:srgbClr val="555045"/>
+                </a:solidFill>
+                <a:latin typeface="Arial"/>
+              </a:rPr>
+              <a:t> </a:t>
+            </a:r>
+            <a:r>
+              <a:rPr sz="1450" b="0" dirty="0" err="1">
+                <a:solidFill>
+                  <a:srgbClr val="555045"/>
+                </a:solidFill>
+                <a:latin typeface="Arial"/>
+              </a:rPr>
+              <a:t>pasa</a:t>
+            </a:r>
+            <a:r>
+              <a:rPr sz="1450" b="0" dirty="0">
+                <a:solidFill>
+                  <a:srgbClr val="555045"/>
+                </a:solidFill>
+                <a:latin typeface="Arial"/>
+              </a:rPr>
+              <a:t> con el </a:t>
+            </a:r>
+            <a:r>
+              <a:rPr sz="1450" b="0" dirty="0" err="1">
+                <a:solidFill>
+                  <a:srgbClr val="555045"/>
+                </a:solidFill>
+                <a:latin typeface="Arial"/>
+              </a:rPr>
+              <a:t>sobrante</a:t>
+            </a:r>
+            <a:r>
+              <a:rPr sz="1450" b="0" dirty="0">
+                <a:solidFill>
+                  <a:srgbClr val="555045"/>
+                </a:solidFill>
+                <a:latin typeface="Arial"/>
+              </a:rPr>
+              <a:t> al </a:t>
+            </a:r>
+            <a:r>
+              <a:rPr sz="1450" b="0" dirty="0" err="1">
+                <a:solidFill>
+                  <a:srgbClr val="555045"/>
+                </a:solidFill>
+                <a:latin typeface="Arial"/>
+              </a:rPr>
+              <a:t>cierre</a:t>
+            </a:r>
+            <a:r>
+              <a:rPr sz="1450" b="0" dirty="0">
+                <a:solidFill>
+                  <a:srgbClr val="555045"/>
+                </a:solidFill>
+                <a:latin typeface="Arial"/>
+              </a:rPr>
+              <a:t>.</a:t>
             </a:r>
           </a:p>
         </p:txBody>
@@ -35391,6 +36144,849 @@
               </a:rPr>
               <a:t>45</a:t>
             </a:r>
+          </a:p>
+        </p:txBody>
+      </p:sp>
+      <p:pic>
+        <p:nvPicPr>
+          <p:cNvPr id="21" name="Picture 20">
+            <a:extLst>
+              <a:ext uri="{FF2B5EF4-FFF2-40B4-BE49-F238E27FC236}">
+                <a16:creationId xmlns:a16="http://schemas.microsoft.com/office/drawing/2014/main" id="{9F41FD98-7E2B-A4CC-DC14-4F7690F55049}"/>
+              </a:ext>
+            </a:extLst>
+          </p:cNvPr>
+          <p:cNvPicPr>
+            <a:picLocks noChangeAspect="1"/>
+          </p:cNvPicPr>
+          <p:nvPr/>
+        </p:nvPicPr>
+        <p:blipFill>
+          <a:blip r:embed="rId2"/>
+          <a:stretch>
+            <a:fillRect/>
+          </a:stretch>
+        </p:blipFill>
+        <p:spPr>
+          <a:xfrm>
+            <a:off x="849414" y="2152397"/>
+            <a:ext cx="9005389" cy="2028240"/>
+          </a:xfrm>
+          <a:prstGeom prst="rect">
+            <a:avLst/>
+          </a:prstGeom>
+        </p:spPr>
+      </p:pic>
+      <p:sp>
+        <p:nvSpPr>
+          <p:cNvPr id="22" name="TextBox 21">
+            <a:extLst>
+              <a:ext uri="{FF2B5EF4-FFF2-40B4-BE49-F238E27FC236}">
+                <a16:creationId xmlns:a16="http://schemas.microsoft.com/office/drawing/2014/main" id="{5CB0B64C-6B09-1876-8E6A-943E54679106}"/>
+              </a:ext>
+            </a:extLst>
+          </p:cNvPr>
+          <p:cNvSpPr txBox="1"/>
+          <p:nvPr/>
+        </p:nvSpPr>
+        <p:spPr>
+          <a:xfrm>
+            <a:off x="777240" y="4340254"/>
+            <a:ext cx="9966960" cy="1130181"/>
+          </a:xfrm>
+          <a:prstGeom prst="rect">
+            <a:avLst/>
+          </a:prstGeom>
+          <a:noFill/>
+        </p:spPr>
+        <p:txBody>
+          <a:bodyPr wrap="square" lIns="0" tIns="0" rIns="0" bIns="0">
+            <a:spAutoFit/>
+          </a:bodyPr>
+          <a:lstStyle/>
+          <a:p>
+            <a:pPr algn="l">
+              <a:lnSpc>
+                <a:spcPct val="130000"/>
+              </a:lnSpc>
+              <a:spcBef>
+                <a:spcPts val="0"/>
+              </a:spcBef>
+              <a:spcAft>
+                <a:spcPts val="0"/>
+              </a:spcAft>
+            </a:pPr>
+            <a:r>
+              <a:rPr lang="en-US" sz="1450" b="0" dirty="0">
+                <a:solidFill>
+                  <a:srgbClr val="555045"/>
+                </a:solidFill>
+                <a:latin typeface="Arial"/>
+              </a:rPr>
+              <a:t>La </a:t>
+            </a:r>
+            <a:r>
+              <a:rPr lang="en-US" sz="1450" b="0" dirty="0" err="1">
+                <a:solidFill>
+                  <a:srgbClr val="555045"/>
+                </a:solidFill>
+                <a:latin typeface="Arial"/>
+              </a:rPr>
+              <a:t>misma</a:t>
+            </a:r>
+            <a:r>
+              <a:rPr lang="en-US" sz="1450" b="0" dirty="0">
+                <a:solidFill>
+                  <a:srgbClr val="555045"/>
+                </a:solidFill>
+                <a:latin typeface="Arial"/>
+              </a:rPr>
+              <a:t> </a:t>
+            </a:r>
+            <a:r>
+              <a:rPr lang="en-US" sz="1450" b="0" dirty="0" err="1">
+                <a:solidFill>
+                  <a:srgbClr val="555045"/>
+                </a:solidFill>
+                <a:latin typeface="Arial"/>
+              </a:rPr>
+              <a:t>propuesta</a:t>
+            </a:r>
+            <a:r>
+              <a:rPr lang="en-US" sz="1450" b="0" dirty="0">
+                <a:solidFill>
+                  <a:srgbClr val="555045"/>
+                </a:solidFill>
+                <a:latin typeface="Arial"/>
+              </a:rPr>
+              <a:t> </a:t>
+            </a:r>
+            <a:r>
+              <a:rPr lang="en-US" sz="1450" b="0" dirty="0" err="1">
+                <a:solidFill>
+                  <a:srgbClr val="555045"/>
+                </a:solidFill>
+                <a:latin typeface="Arial"/>
+              </a:rPr>
+              <a:t>ahorra</a:t>
+            </a:r>
+            <a:r>
+              <a:rPr lang="en-US" sz="1450" b="0" dirty="0">
+                <a:solidFill>
+                  <a:srgbClr val="555045"/>
+                </a:solidFill>
+                <a:latin typeface="Arial"/>
+              </a:rPr>
+              <a:t> entre un 18 % y un 94 % </a:t>
+            </a:r>
+            <a:r>
+              <a:rPr lang="en-US" sz="1450" b="0" dirty="0" err="1">
+                <a:solidFill>
+                  <a:srgbClr val="555045"/>
+                </a:solidFill>
+                <a:latin typeface="Arial"/>
+              </a:rPr>
+              <a:t>según</a:t>
+            </a:r>
+            <a:r>
+              <a:rPr lang="en-US" sz="1450" b="0" dirty="0">
+                <a:solidFill>
+                  <a:srgbClr val="555045"/>
+                </a:solidFill>
+                <a:latin typeface="Arial"/>
+              </a:rPr>
+              <a:t> </a:t>
+            </a:r>
+            <a:r>
+              <a:rPr lang="en-US" sz="1450" b="0" dirty="0" err="1">
+                <a:solidFill>
+                  <a:srgbClr val="555045"/>
+                </a:solidFill>
+                <a:latin typeface="Arial"/>
+              </a:rPr>
+              <a:t>qué</a:t>
+            </a:r>
+            <a:r>
+              <a:rPr lang="en-US" sz="1450" b="0" dirty="0">
+                <a:solidFill>
+                  <a:srgbClr val="555045"/>
+                </a:solidFill>
+                <a:latin typeface="Arial"/>
+              </a:rPr>
+              <a:t> se </a:t>
+            </a:r>
+            <a:r>
+              <a:rPr lang="en-US" sz="1450" b="0" dirty="0" err="1">
+                <a:solidFill>
+                  <a:srgbClr val="555045"/>
+                </a:solidFill>
+                <a:latin typeface="Arial"/>
+              </a:rPr>
+              <a:t>suponga</a:t>
+            </a:r>
+            <a:r>
+              <a:rPr lang="en-US" sz="1450" b="0" dirty="0">
+                <a:solidFill>
+                  <a:srgbClr val="555045"/>
+                </a:solidFill>
+                <a:latin typeface="Arial"/>
+              </a:rPr>
+              <a:t> </a:t>
+            </a:r>
+            <a:r>
+              <a:rPr lang="en-US" sz="1450" b="0" dirty="0" err="1">
+                <a:solidFill>
+                  <a:srgbClr val="555045"/>
+                </a:solidFill>
+                <a:latin typeface="Arial"/>
+              </a:rPr>
+              <a:t>que</a:t>
+            </a:r>
+            <a:r>
+              <a:rPr lang="en-US" sz="1450" b="0" dirty="0">
+                <a:solidFill>
+                  <a:srgbClr val="555045"/>
+                </a:solidFill>
+                <a:latin typeface="Arial"/>
+              </a:rPr>
+              <a:t> </a:t>
+            </a:r>
+            <a:r>
+              <a:rPr lang="en-US" sz="1450" b="0" dirty="0" err="1">
+                <a:solidFill>
+                  <a:srgbClr val="555045"/>
+                </a:solidFill>
+                <a:latin typeface="Arial"/>
+              </a:rPr>
+              <a:t>pasa</a:t>
+            </a:r>
+            <a:r>
+              <a:rPr lang="en-US" sz="1450" b="0" dirty="0">
+                <a:solidFill>
+                  <a:srgbClr val="555045"/>
+                </a:solidFill>
+                <a:latin typeface="Arial"/>
+              </a:rPr>
+              <a:t> con el </a:t>
+            </a:r>
+            <a:r>
+              <a:rPr lang="en-US" sz="1450" b="0" dirty="0" err="1">
+                <a:solidFill>
+                  <a:srgbClr val="555045"/>
+                </a:solidFill>
+                <a:latin typeface="Arial"/>
+              </a:rPr>
+              <a:t>producto</a:t>
+            </a:r>
+            <a:r>
+              <a:rPr lang="en-US" sz="1450" b="0" dirty="0">
+                <a:solidFill>
+                  <a:srgbClr val="555045"/>
+                </a:solidFill>
+                <a:latin typeface="Arial"/>
+              </a:rPr>
+              <a:t> </a:t>
+            </a:r>
+            <a:r>
+              <a:rPr lang="en-US" sz="1450" b="0" dirty="0" err="1">
+                <a:solidFill>
+                  <a:srgbClr val="555045"/>
+                </a:solidFill>
+                <a:latin typeface="Arial"/>
+              </a:rPr>
+              <a:t>que</a:t>
+            </a:r>
+            <a:r>
+              <a:rPr lang="en-US" sz="1450" b="0" dirty="0">
+                <a:solidFill>
+                  <a:srgbClr val="555045"/>
+                </a:solidFill>
+                <a:latin typeface="Arial"/>
+              </a:rPr>
+              <a:t> </a:t>
+            </a:r>
+            <a:r>
+              <a:rPr lang="en-US" sz="1450" b="0" dirty="0" err="1">
+                <a:solidFill>
+                  <a:srgbClr val="555045"/>
+                </a:solidFill>
+                <a:latin typeface="Arial"/>
+              </a:rPr>
+              <a:t>sobra</a:t>
+            </a:r>
+            <a:r>
+              <a:rPr lang="en-US" sz="1450" b="0" dirty="0">
+                <a:solidFill>
+                  <a:srgbClr val="555045"/>
+                </a:solidFill>
+                <a:latin typeface="Arial"/>
+              </a:rPr>
+              <a:t> al </a:t>
+            </a:r>
+            <a:r>
+              <a:rPr lang="en-US" sz="1450" b="0" dirty="0" err="1">
+                <a:solidFill>
+                  <a:srgbClr val="555045"/>
+                </a:solidFill>
+                <a:latin typeface="Arial"/>
+              </a:rPr>
+              <a:t>cierre</a:t>
+            </a:r>
+            <a:r>
+              <a:rPr lang="en-US" sz="1450" b="0" dirty="0">
+                <a:solidFill>
+                  <a:srgbClr val="555045"/>
+                </a:solidFill>
+                <a:latin typeface="Arial"/>
+              </a:rPr>
+              <a:t>. Si se </a:t>
+            </a:r>
+            <a:r>
+              <a:rPr lang="en-US" sz="1450" b="0" dirty="0" err="1">
+                <a:solidFill>
+                  <a:srgbClr val="555045"/>
+                </a:solidFill>
+                <a:latin typeface="Arial"/>
+              </a:rPr>
+              <a:t>guarda</a:t>
+            </a:r>
+            <a:r>
+              <a:rPr lang="en-US" sz="1450" b="0" dirty="0">
+                <a:solidFill>
+                  <a:srgbClr val="555045"/>
+                </a:solidFill>
+                <a:latin typeface="Arial"/>
+              </a:rPr>
+              <a:t> y se </a:t>
+            </a:r>
+            <a:r>
+              <a:rPr lang="en-US" sz="1450" b="0" dirty="0" err="1">
+                <a:solidFill>
+                  <a:srgbClr val="555045"/>
+                </a:solidFill>
+                <a:latin typeface="Arial"/>
+              </a:rPr>
+              <a:t>vende</a:t>
+            </a:r>
+            <a:r>
+              <a:rPr lang="en-US" sz="1450" b="0" dirty="0">
+                <a:solidFill>
+                  <a:srgbClr val="555045"/>
+                </a:solidFill>
+                <a:latin typeface="Arial"/>
+              </a:rPr>
+              <a:t> </a:t>
+            </a:r>
+            <a:r>
+              <a:rPr lang="en-US" sz="1450" b="0" dirty="0" err="1">
+                <a:solidFill>
+                  <a:srgbClr val="555045"/>
+                </a:solidFill>
+                <a:latin typeface="Arial"/>
+              </a:rPr>
+              <a:t>después</a:t>
+            </a:r>
+            <a:r>
+              <a:rPr lang="en-US" sz="1450" b="0" dirty="0">
+                <a:solidFill>
+                  <a:srgbClr val="555045"/>
+                </a:solidFill>
+                <a:latin typeface="Arial"/>
+              </a:rPr>
+              <a:t>, </a:t>
+            </a:r>
+            <a:r>
+              <a:rPr lang="en-US" sz="1450" b="0" dirty="0" err="1">
+                <a:solidFill>
+                  <a:srgbClr val="555045"/>
+                </a:solidFill>
+                <a:latin typeface="Arial"/>
+              </a:rPr>
+              <a:t>sobrar</a:t>
+            </a:r>
+            <a:r>
+              <a:rPr lang="en-US" sz="1450" b="0" dirty="0">
+                <a:solidFill>
+                  <a:srgbClr val="555045"/>
+                </a:solidFill>
+                <a:latin typeface="Arial"/>
+              </a:rPr>
+              <a:t> </a:t>
+            </a:r>
+            <a:r>
+              <a:rPr lang="en-US" sz="1450" b="0" dirty="0" err="1">
+                <a:solidFill>
+                  <a:srgbClr val="555045"/>
+                </a:solidFill>
+                <a:latin typeface="Arial"/>
+              </a:rPr>
+              <a:t>casi</a:t>
+            </a:r>
+            <a:r>
+              <a:rPr lang="en-US" sz="1450" b="0" dirty="0">
+                <a:solidFill>
+                  <a:srgbClr val="555045"/>
+                </a:solidFill>
+                <a:latin typeface="Arial"/>
+              </a:rPr>
+              <a:t> no cuesta, la </a:t>
+            </a:r>
+            <a:r>
+              <a:rPr lang="en-US" sz="1450" b="0" dirty="0" err="1">
+                <a:solidFill>
+                  <a:srgbClr val="555045"/>
+                </a:solidFill>
+                <a:latin typeface="Arial"/>
+              </a:rPr>
+              <a:t>política</a:t>
+            </a:r>
+            <a:r>
+              <a:rPr lang="en-US" sz="1450" b="0" dirty="0">
+                <a:solidFill>
+                  <a:srgbClr val="555045"/>
+                </a:solidFill>
+                <a:latin typeface="Arial"/>
+              </a:rPr>
+              <a:t> </a:t>
+            </a:r>
+            <a:r>
+              <a:rPr lang="en-US" sz="1450" b="0" dirty="0" err="1">
+                <a:solidFill>
+                  <a:srgbClr val="555045"/>
+                </a:solidFill>
+                <a:latin typeface="Arial"/>
+              </a:rPr>
+              <a:t>pide</a:t>
+            </a:r>
+            <a:r>
+              <a:rPr lang="en-US" sz="1450" b="0" dirty="0">
+                <a:solidFill>
+                  <a:srgbClr val="555045"/>
+                </a:solidFill>
+                <a:latin typeface="Arial"/>
+              </a:rPr>
+              <a:t> con </a:t>
+            </a:r>
+            <a:r>
+              <a:rPr lang="en-US" sz="1450" b="0" dirty="0" err="1">
+                <a:solidFill>
+                  <a:srgbClr val="555045"/>
+                </a:solidFill>
+                <a:latin typeface="Arial"/>
+              </a:rPr>
+              <a:t>holgura</a:t>
+            </a:r>
+            <a:r>
+              <a:rPr lang="en-US" sz="1450" b="0" dirty="0">
+                <a:solidFill>
+                  <a:srgbClr val="555045"/>
+                </a:solidFill>
+                <a:latin typeface="Arial"/>
+              </a:rPr>
+              <a:t> y el </a:t>
+            </a:r>
+            <a:r>
+              <a:rPr lang="en-US" sz="1450" b="0" dirty="0" err="1">
+                <a:solidFill>
+                  <a:srgbClr val="555045"/>
+                </a:solidFill>
+                <a:latin typeface="Arial"/>
+              </a:rPr>
+              <a:t>coste</a:t>
+            </a:r>
+            <a:r>
+              <a:rPr lang="en-US" sz="1450" b="0" dirty="0">
+                <a:solidFill>
+                  <a:srgbClr val="555045"/>
+                </a:solidFill>
+                <a:latin typeface="Arial"/>
+              </a:rPr>
+              <a:t> se </a:t>
+            </a:r>
+            <a:r>
+              <a:rPr lang="en-US" sz="1450" b="0" dirty="0" err="1">
+                <a:solidFill>
+                  <a:srgbClr val="555045"/>
+                </a:solidFill>
+                <a:latin typeface="Arial"/>
+              </a:rPr>
+              <a:t>desploma</a:t>
+            </a:r>
+            <a:r>
+              <a:rPr lang="en-US" sz="1450" b="0" dirty="0">
+                <a:solidFill>
+                  <a:srgbClr val="555045"/>
+                </a:solidFill>
+                <a:latin typeface="Arial"/>
+              </a:rPr>
+              <a:t>. Si se </a:t>
+            </a:r>
+            <a:r>
+              <a:rPr lang="en-US" sz="1450" b="0" dirty="0" err="1">
+                <a:solidFill>
+                  <a:srgbClr val="555045"/>
+                </a:solidFill>
+                <a:latin typeface="Arial"/>
+              </a:rPr>
+              <a:t>descarta</a:t>
+            </a:r>
+            <a:r>
+              <a:rPr lang="en-US" sz="1450" b="0" dirty="0">
+                <a:solidFill>
+                  <a:srgbClr val="555045"/>
+                </a:solidFill>
+                <a:latin typeface="Arial"/>
+              </a:rPr>
+              <a:t>, </a:t>
+            </a:r>
+            <a:r>
+              <a:rPr lang="en-US" sz="1450" b="0" dirty="0" err="1">
+                <a:solidFill>
+                  <a:srgbClr val="555045"/>
+                </a:solidFill>
+                <a:latin typeface="Arial"/>
+              </a:rPr>
+              <a:t>sobrar</a:t>
+            </a:r>
+            <a:r>
+              <a:rPr lang="en-US" sz="1450" b="0" dirty="0">
+                <a:solidFill>
+                  <a:srgbClr val="555045"/>
+                </a:solidFill>
+                <a:latin typeface="Arial"/>
+              </a:rPr>
+              <a:t> cuesta lo </a:t>
+            </a:r>
+            <a:r>
+              <a:rPr lang="en-US" sz="1450" b="0" dirty="0" err="1">
+                <a:solidFill>
+                  <a:srgbClr val="555045"/>
+                </a:solidFill>
+                <a:latin typeface="Arial"/>
+              </a:rPr>
+              <a:t>que</a:t>
+            </a:r>
+            <a:r>
+              <a:rPr lang="en-US" sz="1450" b="0" dirty="0">
+                <a:solidFill>
+                  <a:srgbClr val="555045"/>
+                </a:solidFill>
+                <a:latin typeface="Arial"/>
+              </a:rPr>
+              <a:t> </a:t>
+            </a:r>
+            <a:r>
+              <a:rPr lang="en-US" sz="1450" b="0" dirty="0" err="1">
+                <a:solidFill>
+                  <a:srgbClr val="555045"/>
+                </a:solidFill>
+                <a:latin typeface="Arial"/>
+              </a:rPr>
+              <a:t>costó</a:t>
+            </a:r>
+            <a:r>
+              <a:rPr lang="en-US" sz="1450" b="0" dirty="0">
+                <a:solidFill>
+                  <a:srgbClr val="555045"/>
+                </a:solidFill>
+                <a:latin typeface="Arial"/>
+              </a:rPr>
+              <a:t> </a:t>
+            </a:r>
+            <a:r>
+              <a:rPr lang="en-US" sz="1450" b="0" dirty="0" err="1">
+                <a:solidFill>
+                  <a:srgbClr val="555045"/>
+                </a:solidFill>
+                <a:latin typeface="Arial"/>
+              </a:rPr>
+              <a:t>producirlo</a:t>
+            </a:r>
+            <a:r>
+              <a:rPr lang="en-US" sz="1450" b="0" dirty="0">
+                <a:solidFill>
+                  <a:srgbClr val="555045"/>
+                </a:solidFill>
+                <a:latin typeface="Arial"/>
+              </a:rPr>
+              <a:t>, la </a:t>
+            </a:r>
+            <a:r>
+              <a:rPr lang="en-US" sz="1450" b="0" dirty="0" err="1">
+                <a:solidFill>
+                  <a:srgbClr val="555045"/>
+                </a:solidFill>
+                <a:latin typeface="Arial"/>
+              </a:rPr>
+              <a:t>política</a:t>
+            </a:r>
+            <a:r>
+              <a:rPr lang="en-US" sz="1450" b="0" dirty="0">
+                <a:solidFill>
+                  <a:srgbClr val="555045"/>
+                </a:solidFill>
+                <a:latin typeface="Arial"/>
+              </a:rPr>
+              <a:t> </a:t>
+            </a:r>
+            <a:r>
+              <a:rPr lang="en-US" sz="1450" b="0" dirty="0" err="1">
+                <a:solidFill>
+                  <a:srgbClr val="555045"/>
+                </a:solidFill>
+                <a:latin typeface="Arial"/>
+              </a:rPr>
+              <a:t>pide</a:t>
+            </a:r>
+            <a:r>
+              <a:rPr lang="en-US" sz="1450" b="0" dirty="0">
+                <a:solidFill>
+                  <a:srgbClr val="555045"/>
+                </a:solidFill>
+                <a:latin typeface="Arial"/>
+              </a:rPr>
+              <a:t> con </a:t>
+            </a:r>
+            <a:r>
+              <a:rPr lang="en-US" sz="1450" b="0" dirty="0" err="1">
+                <a:solidFill>
+                  <a:srgbClr val="555045"/>
+                </a:solidFill>
+                <a:latin typeface="Arial"/>
+              </a:rPr>
+              <a:t>cuidado</a:t>
+            </a:r>
+            <a:r>
+              <a:rPr lang="en-US" sz="1450" b="0" dirty="0">
+                <a:solidFill>
+                  <a:srgbClr val="555045"/>
+                </a:solidFill>
+                <a:latin typeface="Arial"/>
+              </a:rPr>
+              <a:t> y el </a:t>
+            </a:r>
+            <a:r>
+              <a:rPr lang="en-US" sz="1450" b="0" dirty="0" err="1">
+                <a:solidFill>
+                  <a:srgbClr val="555045"/>
+                </a:solidFill>
+                <a:latin typeface="Arial"/>
+              </a:rPr>
+              <a:t>ahorro</a:t>
+            </a:r>
+            <a:r>
+              <a:rPr lang="en-US" sz="1450" b="0" dirty="0">
+                <a:solidFill>
+                  <a:srgbClr val="555045"/>
+                </a:solidFill>
+                <a:latin typeface="Arial"/>
+              </a:rPr>
+              <a:t> </a:t>
+            </a:r>
+            <a:r>
+              <a:rPr lang="en-US" sz="1450" b="0" dirty="0" err="1">
+                <a:solidFill>
+                  <a:srgbClr val="555045"/>
+                </a:solidFill>
+                <a:latin typeface="Arial"/>
+              </a:rPr>
+              <a:t>frente</a:t>
+            </a:r>
+            <a:r>
+              <a:rPr lang="en-US" sz="1450" b="0" dirty="0">
+                <a:solidFill>
+                  <a:srgbClr val="555045"/>
+                </a:solidFill>
+                <a:latin typeface="Arial"/>
+              </a:rPr>
+              <a:t> a la </a:t>
+            </a:r>
+            <a:r>
+              <a:rPr lang="en-US" sz="1450" b="0" dirty="0" err="1">
+                <a:solidFill>
+                  <a:srgbClr val="555045"/>
+                </a:solidFill>
+                <a:latin typeface="Arial"/>
+              </a:rPr>
+              <a:t>práctica</a:t>
+            </a:r>
+            <a:r>
+              <a:rPr lang="en-US" sz="1450" b="0" dirty="0">
+                <a:solidFill>
+                  <a:srgbClr val="555045"/>
+                </a:solidFill>
+                <a:latin typeface="Arial"/>
+              </a:rPr>
+              <a:t> actual </a:t>
+            </a:r>
+            <a:r>
+              <a:rPr lang="en-US" sz="1450" b="0" dirty="0" err="1">
+                <a:solidFill>
+                  <a:srgbClr val="555045"/>
+                </a:solidFill>
+                <a:latin typeface="Arial"/>
+              </a:rPr>
+              <a:t>queda</a:t>
+            </a:r>
+            <a:r>
+              <a:rPr lang="en-US" sz="1450" b="0" dirty="0">
+                <a:solidFill>
+                  <a:srgbClr val="555045"/>
+                </a:solidFill>
+                <a:latin typeface="Arial"/>
+              </a:rPr>
+              <a:t> </a:t>
+            </a:r>
+            <a:r>
+              <a:rPr lang="en-US" sz="1450" b="0" dirty="0" err="1">
+                <a:solidFill>
+                  <a:srgbClr val="555045"/>
+                </a:solidFill>
+                <a:latin typeface="Arial"/>
+              </a:rPr>
+              <a:t>en</a:t>
+            </a:r>
+            <a:r>
+              <a:rPr lang="en-US" sz="1450" b="0" dirty="0">
+                <a:solidFill>
+                  <a:srgbClr val="555045"/>
+                </a:solidFill>
+                <a:latin typeface="Arial"/>
+              </a:rPr>
+              <a:t> un 17,8 %, y </a:t>
+            </a:r>
+            <a:r>
+              <a:rPr lang="en-US" sz="1450" b="0" dirty="0" err="1">
+                <a:solidFill>
+                  <a:srgbClr val="555045"/>
+                </a:solidFill>
+                <a:latin typeface="Arial"/>
+              </a:rPr>
+              <a:t>en</a:t>
+            </a:r>
+            <a:r>
+              <a:rPr lang="en-US" sz="1450" b="0" dirty="0">
+                <a:solidFill>
+                  <a:srgbClr val="555045"/>
+                </a:solidFill>
+                <a:latin typeface="Arial"/>
+              </a:rPr>
+              <a:t> un 5,2 % </a:t>
+            </a:r>
+            <a:r>
+              <a:rPr lang="en-US" sz="1450" b="0" dirty="0" err="1">
+                <a:solidFill>
+                  <a:srgbClr val="555045"/>
+                </a:solidFill>
+                <a:latin typeface="Arial"/>
+              </a:rPr>
+              <a:t>frente</a:t>
+            </a:r>
+            <a:r>
+              <a:rPr lang="en-US" sz="1450" b="0" dirty="0">
+                <a:solidFill>
+                  <a:srgbClr val="555045"/>
+                </a:solidFill>
+                <a:latin typeface="Arial"/>
+              </a:rPr>
+              <a:t> a </a:t>
+            </a:r>
+            <a:r>
+              <a:rPr lang="en-US" sz="1450" b="0" dirty="0" err="1">
+                <a:solidFill>
+                  <a:srgbClr val="555045"/>
+                </a:solidFill>
+                <a:latin typeface="Arial"/>
+              </a:rPr>
+              <a:t>quien</a:t>
+            </a:r>
+            <a:r>
+              <a:rPr lang="en-US" sz="1450" b="0" dirty="0">
+                <a:solidFill>
+                  <a:srgbClr val="555045"/>
+                </a:solidFill>
+                <a:latin typeface="Arial"/>
+              </a:rPr>
+              <a:t> </a:t>
+            </a:r>
+            <a:r>
+              <a:rPr lang="en-US" sz="1450" b="0" dirty="0" err="1">
+                <a:solidFill>
+                  <a:srgbClr val="555045"/>
+                </a:solidFill>
+                <a:latin typeface="Arial"/>
+              </a:rPr>
+              <a:t>ya</a:t>
+            </a:r>
+            <a:r>
+              <a:rPr lang="en-US" sz="1450" b="0" dirty="0">
+                <a:solidFill>
+                  <a:srgbClr val="555045"/>
+                </a:solidFill>
+                <a:latin typeface="Arial"/>
+              </a:rPr>
+              <a:t> </a:t>
+            </a:r>
+            <a:r>
+              <a:rPr lang="en-US" sz="1450" b="0" dirty="0" err="1">
+                <a:solidFill>
+                  <a:srgbClr val="555045"/>
+                </a:solidFill>
+                <a:latin typeface="Arial"/>
+              </a:rPr>
+              <a:t>pide</a:t>
+            </a:r>
+            <a:r>
+              <a:rPr lang="en-US" sz="1450" b="0" dirty="0">
+                <a:solidFill>
+                  <a:srgbClr val="555045"/>
+                </a:solidFill>
+                <a:latin typeface="Arial"/>
+              </a:rPr>
+              <a:t> bien con </a:t>
+            </a:r>
+            <a:r>
+              <a:rPr lang="en-US" sz="1450" b="0" dirty="0" err="1">
+                <a:solidFill>
+                  <a:srgbClr val="555045"/>
+                </a:solidFill>
+                <a:latin typeface="Arial"/>
+              </a:rPr>
+              <a:t>una</a:t>
+            </a:r>
+            <a:r>
+              <a:rPr lang="en-US" sz="1450" b="0" dirty="0">
+                <a:solidFill>
+                  <a:srgbClr val="555045"/>
+                </a:solidFill>
+                <a:latin typeface="Arial"/>
+              </a:rPr>
+              <a:t> media </a:t>
+            </a:r>
+            <a:r>
+              <a:rPr lang="en-US" sz="1450" b="0" dirty="0" err="1">
+                <a:solidFill>
+                  <a:srgbClr val="555045"/>
+                </a:solidFill>
+                <a:latin typeface="Arial"/>
+              </a:rPr>
+              <a:t>móvil</a:t>
+            </a:r>
+            <a:r>
+              <a:rPr lang="en-US" sz="1450" b="0" dirty="0">
+                <a:solidFill>
+                  <a:srgbClr val="555045"/>
+                </a:solidFill>
+                <a:latin typeface="Arial"/>
+              </a:rPr>
+              <a:t>.</a:t>
+            </a:r>
+            <a:endParaRPr sz="1450" b="0" dirty="0">
+              <a:solidFill>
+                <a:srgbClr val="555045"/>
+              </a:solidFill>
+              <a:latin typeface="Arial"/>
+            </a:endParaRPr>
           </a:p>
         </p:txBody>
       </p:sp>
@@ -38488,57 +40084,6 @@
       </p:graphicFrame>
       <p:sp>
         <p:nvSpPr>
-          <p:cNvPr id="16" name="TextBox 15"/>
-          <p:cNvSpPr txBox="1"/>
-          <p:nvPr/>
-        </p:nvSpPr>
-        <p:spPr>
-          <a:xfrm>
-            <a:off x="777240" y="5701157"/>
-            <a:ext cx="10637215" cy="445008"/>
-          </a:xfrm>
-          <a:prstGeom prst="rect">
-            <a:avLst/>
-          </a:prstGeom>
-          <a:noFill/>
-        </p:spPr>
-        <p:txBody>
-          <a:bodyPr wrap="square" lIns="0" tIns="0" rIns="0" bIns="0">
-            <a:spAutoFit/>
-          </a:bodyPr>
-          <a:lstStyle/>
-          <a:p>
-            <a:pPr>
-              <a:lnSpc>
-                <a:spcPct val="126000"/>
-              </a:lnSpc>
-              <a:spcAft>
-                <a:spcPts val="0"/>
-              </a:spcAft>
-            </a:pPr>
-            <a:r>
-              <a:rPr sz="1200" b="1">
-                <a:solidFill>
-                  <a:srgbClr val="17150F"/>
-                </a:solidFill>
-                <a:latin typeface="Arial"/>
-              </a:rPr>
-              <a:t>Este paso no lleva métricas de error, y es correcto.</a:t>
-            </a:r>
-            <a:r>
-              <a:rPr sz="1200" b="0">
-                <a:solidFill>
-                  <a:srgbClr val="8B8478"/>
-                </a:solidFill>
-                <a:latin typeface="Arial"/>
-              </a:rPr>
-              <a:t> La semana entregada todavía no ha ocurrido, así que no hay demanda con la que compararse. El error esperado es el que se midió en semanas retenidas; cualquier otra cifra sería medir sobre los mismos datos del ajuste.</a:t>
-            </a:r>
-          </a:p>
-        </p:txBody>
-      </p:sp>
-      <p:sp>
-        <p:nvSpPr>
           <p:cNvPr id="17" name="Rectangle 16"/>
           <p:cNvSpPr/>
           <p:nvPr/>
@@ -39606,871 +41151,6 @@
                 </a:solidFill>
                 <a:latin typeface="Arial"/>
               </a:rPr>
-              <a:t>EL DESARROLLO</a:t>
-            </a:r>
-          </a:p>
-        </p:txBody>
-      </p:sp>
-      <p:sp>
-        <p:nvSpPr>
-          <p:cNvPr id="4" name="Rectangle 3"/>
-          <p:cNvSpPr/>
-          <p:nvPr/>
-        </p:nvSpPr>
-        <p:spPr>
-          <a:xfrm>
-            <a:off x="777240" y="768096"/>
-            <a:ext cx="502920" cy="30480"/>
-          </a:xfrm>
-          <a:prstGeom prst="rect">
-            <a:avLst/>
-          </a:prstGeom>
-          <a:solidFill>
-            <a:srgbClr val="8C2F39"/>
-          </a:solidFill>
-          <a:ln>
-            <a:noFill/>
-          </a:ln>
-          <a:effectLst/>
-        </p:spPr>
-        <p:style>
-          <a:lnRef idx="1">
-            <a:schemeClr val="accent1"/>
-          </a:lnRef>
-          <a:fillRef idx="3">
-            <a:schemeClr val="accent1"/>
-          </a:fillRef>
-          <a:effectRef idx="2">
-            <a:schemeClr val="accent1"/>
-          </a:effectRef>
-          <a:fontRef idx="minor">
-            <a:schemeClr val="lt1"/>
-          </a:fontRef>
-        </p:style>
-        <p:txBody>
-          <a:bodyPr rtlCol="0" anchor="ctr"/>
-          <a:lstStyle/>
-          <a:p>
-            <a:pPr algn="ctr"/>
-            <a:endParaRPr/>
-          </a:p>
-        </p:txBody>
-      </p:sp>
-      <p:sp>
-        <p:nvSpPr>
-          <p:cNvPr id="5" name="TextBox 4"/>
-          <p:cNvSpPr txBox="1"/>
-          <p:nvPr/>
-        </p:nvSpPr>
-        <p:spPr>
-          <a:xfrm>
-            <a:off x="777240" y="914400"/>
-            <a:ext cx="10637215" cy="445770"/>
-          </a:xfrm>
-          <a:prstGeom prst="rect">
-            <a:avLst/>
-          </a:prstGeom>
-          <a:noFill/>
-        </p:spPr>
-        <p:txBody>
-          <a:bodyPr wrap="square" lIns="0" tIns="0" rIns="0" bIns="0">
-            <a:spAutoFit/>
-          </a:bodyPr>
-          <a:lstStyle/>
-          <a:p>
-            <a:pPr algn="l">
-              <a:lnSpc>
-                <a:spcPct val="106000"/>
-              </a:lnSpc>
-              <a:spcBef>
-                <a:spcPts val="0"/>
-              </a:spcBef>
-              <a:spcAft>
-                <a:spcPts val="0"/>
-              </a:spcAft>
-            </a:pPr>
-            <a:r>
-              <a:rPr sz="2700" b="1">
-                <a:solidFill>
-                  <a:srgbClr val="17150F"/>
-                </a:solidFill>
-                <a:latin typeface="Arial"/>
-              </a:rPr>
-              <a:t>Cómo evitamos engañarnos</a:t>
-            </a:r>
-          </a:p>
-        </p:txBody>
-      </p:sp>
-      <p:sp>
-        <p:nvSpPr>
-          <p:cNvPr id="6" name="TextBox 5"/>
-          <p:cNvSpPr txBox="1"/>
-          <p:nvPr/>
-        </p:nvSpPr>
-        <p:spPr>
-          <a:xfrm>
-            <a:off x="777240" y="1506474"/>
-            <a:ext cx="9966960" cy="283337"/>
-          </a:xfrm>
-          <a:prstGeom prst="rect">
-            <a:avLst/>
-          </a:prstGeom>
-          <a:noFill/>
-        </p:spPr>
-        <p:txBody>
-          <a:bodyPr wrap="square" lIns="0" tIns="0" rIns="0" bIns="0">
-            <a:spAutoFit/>
-          </a:bodyPr>
-          <a:lstStyle/>
-          <a:p>
-            <a:pPr algn="l">
-              <a:lnSpc>
-                <a:spcPct val="130000"/>
-              </a:lnSpc>
-              <a:spcBef>
-                <a:spcPts val="0"/>
-              </a:spcBef>
-              <a:spcAft>
-                <a:spcPts val="0"/>
-              </a:spcAft>
-            </a:pPr>
-            <a:r>
-              <a:rPr sz="1450" b="0">
-                <a:solidFill>
-                  <a:srgbClr val="555045"/>
-                </a:solidFill>
-                <a:latin typeface="Arial"/>
-              </a:rPr>
-              <a:t>Es la parte del proyecto que más código tiene, porque es donde se pierden estos ejercicios.</a:t>
-            </a:r>
-          </a:p>
-        </p:txBody>
-      </p:sp>
-      <p:sp>
-        <p:nvSpPr>
-          <p:cNvPr id="7" name="Rectangle 6"/>
-          <p:cNvSpPr/>
-          <p:nvPr/>
-        </p:nvSpPr>
-        <p:spPr>
-          <a:xfrm>
-            <a:off x="777240" y="2091563"/>
-            <a:ext cx="63500" cy="63500"/>
-          </a:xfrm>
-          <a:prstGeom prst="rect">
-            <a:avLst/>
-          </a:prstGeom>
-          <a:solidFill>
-            <a:srgbClr val="8C2F39"/>
-          </a:solidFill>
-          <a:ln>
-            <a:noFill/>
-          </a:ln>
-          <a:effectLst/>
-        </p:spPr>
-        <p:style>
-          <a:lnRef idx="1">
-            <a:schemeClr val="accent1"/>
-          </a:lnRef>
-          <a:fillRef idx="3">
-            <a:schemeClr val="accent1"/>
-          </a:fillRef>
-          <a:effectRef idx="2">
-            <a:schemeClr val="accent1"/>
-          </a:effectRef>
-          <a:fontRef idx="minor">
-            <a:schemeClr val="lt1"/>
-          </a:fontRef>
-        </p:style>
-        <p:txBody>
-          <a:bodyPr rtlCol="0" anchor="ctr"/>
-          <a:lstStyle/>
-          <a:p>
-            <a:pPr algn="ctr"/>
-            <a:endParaRPr/>
-          </a:p>
-        </p:txBody>
-      </p:sp>
-      <p:sp>
-        <p:nvSpPr>
-          <p:cNvPr id="8" name="TextBox 7"/>
-          <p:cNvSpPr txBox="1"/>
-          <p:nvPr/>
-        </p:nvSpPr>
-        <p:spPr>
-          <a:xfrm>
-            <a:off x="978408" y="1990979"/>
-            <a:ext cx="10436047" cy="530098"/>
-          </a:xfrm>
-          <a:prstGeom prst="rect">
-            <a:avLst/>
-          </a:prstGeom>
-          <a:noFill/>
-        </p:spPr>
-        <p:txBody>
-          <a:bodyPr wrap="square" lIns="0" tIns="0" rIns="0" bIns="0">
-            <a:spAutoFit/>
-          </a:bodyPr>
-          <a:lstStyle/>
-          <a:p>
-            <a:pPr>
-              <a:lnSpc>
-                <a:spcPct val="124000"/>
-              </a:lnSpc>
-              <a:spcAft>
-                <a:spcPts val="0"/>
-              </a:spcAft>
-            </a:pPr>
-            <a:r>
-              <a:rPr sz="1450" b="1">
-                <a:solidFill>
-                  <a:srgbClr val="17150F"/>
-                </a:solidFill>
-                <a:latin typeface="Arial"/>
-              </a:rPr>
-              <a:t>Las semanas de evaluación no se tocaron hasta el final.</a:t>
-            </a:r>
-            <a:r>
-              <a:rPr sz="1450" b="0">
-                <a:solidFill>
-                  <a:srgbClr val="555045"/>
-                </a:solidFill>
-                <a:latin typeface="Arial"/>
-              </a:rPr>
-              <a:t> Toda decisión, incluidos los hiperparámetros y la longitud de la media móvil, se tomó en validación.</a:t>
-            </a:r>
-          </a:p>
-        </p:txBody>
-      </p:sp>
-      <p:sp>
-        <p:nvSpPr>
-          <p:cNvPr id="9" name="Rectangle 8"/>
-          <p:cNvSpPr/>
-          <p:nvPr/>
-        </p:nvSpPr>
-        <p:spPr>
-          <a:xfrm>
-            <a:off x="777240" y="2749677"/>
-            <a:ext cx="63500" cy="63500"/>
-          </a:xfrm>
-          <a:prstGeom prst="rect">
-            <a:avLst/>
-          </a:prstGeom>
-          <a:solidFill>
-            <a:srgbClr val="8C2F39"/>
-          </a:solidFill>
-          <a:ln>
-            <a:noFill/>
-          </a:ln>
-          <a:effectLst/>
-        </p:spPr>
-        <p:style>
-          <a:lnRef idx="1">
-            <a:schemeClr val="accent1"/>
-          </a:lnRef>
-          <a:fillRef idx="3">
-            <a:schemeClr val="accent1"/>
-          </a:fillRef>
-          <a:effectRef idx="2">
-            <a:schemeClr val="accent1"/>
-          </a:effectRef>
-          <a:fontRef idx="minor">
-            <a:schemeClr val="lt1"/>
-          </a:fontRef>
-        </p:style>
-        <p:txBody>
-          <a:bodyPr rtlCol="0" anchor="ctr"/>
-          <a:lstStyle/>
-          <a:p>
-            <a:pPr algn="ctr"/>
-            <a:endParaRPr/>
-          </a:p>
-        </p:txBody>
-      </p:sp>
-      <p:sp>
-        <p:nvSpPr>
-          <p:cNvPr id="10" name="TextBox 9"/>
-          <p:cNvSpPr txBox="1"/>
-          <p:nvPr/>
-        </p:nvSpPr>
-        <p:spPr>
-          <a:xfrm>
-            <a:off x="978408" y="2649093"/>
-            <a:ext cx="10436047" cy="776859"/>
-          </a:xfrm>
-          <a:prstGeom prst="rect">
-            <a:avLst/>
-          </a:prstGeom>
-          <a:noFill/>
-        </p:spPr>
-        <p:txBody>
-          <a:bodyPr wrap="square" lIns="0" tIns="0" rIns="0" bIns="0">
-            <a:spAutoFit/>
-          </a:bodyPr>
-          <a:lstStyle/>
-          <a:p>
-            <a:pPr>
-              <a:lnSpc>
-                <a:spcPct val="124000"/>
-              </a:lnSpc>
-              <a:spcAft>
-                <a:spcPts val="0"/>
-              </a:spcAft>
-            </a:pPr>
-            <a:r>
-              <a:rPr sz="1450" b="1">
-                <a:solidFill>
-                  <a:srgbClr val="17150F"/>
-                </a:solidFill>
-                <a:latin typeface="Arial"/>
-              </a:rPr>
-              <a:t>Veinte verificaciones automáticas en cada ejecución.</a:t>
-            </a:r>
-            <a:r>
-              <a:rPr sz="1450" b="0">
-                <a:solidFill>
-                  <a:srgbClr val="555045"/>
-                </a:solidFill>
-                <a:latin typeface="Arial"/>
-              </a:rPr>
-              <a:t> Doce de aislamiento temporal, entre ellas una instrumentada que registra cada semana que toca la búsqueda de hiperparámetros y un control negativo que exige que más datos sí cambien el modelo. Ocho del optimizador con casos de respuesta conocida.</a:t>
-            </a:r>
-          </a:p>
-        </p:txBody>
-      </p:sp>
-      <p:sp>
-        <p:nvSpPr>
-          <p:cNvPr id="11" name="Rectangle 10"/>
-          <p:cNvSpPr/>
-          <p:nvPr/>
-        </p:nvSpPr>
-        <p:spPr>
-          <a:xfrm>
-            <a:off x="777240" y="3654552"/>
-            <a:ext cx="63500" cy="63500"/>
-          </a:xfrm>
-          <a:prstGeom prst="rect">
-            <a:avLst/>
-          </a:prstGeom>
-          <a:solidFill>
-            <a:srgbClr val="8C2F39"/>
-          </a:solidFill>
-          <a:ln>
-            <a:noFill/>
-          </a:ln>
-          <a:effectLst/>
-        </p:spPr>
-        <p:style>
-          <a:lnRef idx="1">
-            <a:schemeClr val="accent1"/>
-          </a:lnRef>
-          <a:fillRef idx="3">
-            <a:schemeClr val="accent1"/>
-          </a:fillRef>
-          <a:effectRef idx="2">
-            <a:schemeClr val="accent1"/>
-          </a:effectRef>
-          <a:fontRef idx="minor">
-            <a:schemeClr val="lt1"/>
-          </a:fontRef>
-        </p:style>
-        <p:txBody>
-          <a:bodyPr rtlCol="0" anchor="ctr"/>
-          <a:lstStyle/>
-          <a:p>
-            <a:pPr algn="ctr"/>
-            <a:endParaRPr/>
-          </a:p>
-        </p:txBody>
-      </p:sp>
-      <p:sp>
-        <p:nvSpPr>
-          <p:cNvPr id="12" name="TextBox 11"/>
-          <p:cNvSpPr txBox="1"/>
-          <p:nvPr/>
-        </p:nvSpPr>
-        <p:spPr>
-          <a:xfrm>
-            <a:off x="978408" y="3553968"/>
-            <a:ext cx="10436047" cy="530098"/>
-          </a:xfrm>
-          <a:prstGeom prst="rect">
-            <a:avLst/>
-          </a:prstGeom>
-          <a:noFill/>
-        </p:spPr>
-        <p:txBody>
-          <a:bodyPr wrap="square" lIns="0" tIns="0" rIns="0" bIns="0">
-            <a:spAutoFit/>
-          </a:bodyPr>
-          <a:lstStyle/>
-          <a:p>
-            <a:pPr>
-              <a:lnSpc>
-                <a:spcPct val="124000"/>
-              </a:lnSpc>
-              <a:spcAft>
-                <a:spcPts val="0"/>
-              </a:spcAft>
-            </a:pPr>
-            <a:r>
-              <a:rPr sz="1450" b="1">
-                <a:solidFill>
-                  <a:srgbClr val="17150F"/>
-                </a:solidFill>
-                <a:latin typeface="Arial"/>
-              </a:rPr>
-              <a:t>Las variables se reconstruyen ocultando el futuro</a:t>
-            </a:r>
-            <a:r>
-              <a:rPr sz="1450" b="0">
-                <a:solidFill>
-                  <a:srgbClr val="555045"/>
-                </a:solidFill>
-                <a:latin typeface="Arial"/>
-              </a:rPr>
-              <a:t> y se exige que salgan idénticas. Y al revés: añadir la fila de la semana a entregar no puede mover ninguna variable del pasado.</a:t>
-            </a:r>
-          </a:p>
-        </p:txBody>
-      </p:sp>
-      <p:sp>
-        <p:nvSpPr>
-          <p:cNvPr id="13" name="Rectangle 12"/>
-          <p:cNvSpPr/>
-          <p:nvPr/>
-        </p:nvSpPr>
-        <p:spPr>
-          <a:xfrm>
-            <a:off x="777240" y="4312666"/>
-            <a:ext cx="63500" cy="63500"/>
-          </a:xfrm>
-          <a:prstGeom prst="rect">
-            <a:avLst/>
-          </a:prstGeom>
-          <a:solidFill>
-            <a:srgbClr val="8C2F39"/>
-          </a:solidFill>
-          <a:ln>
-            <a:noFill/>
-          </a:ln>
-          <a:effectLst/>
-        </p:spPr>
-        <p:style>
-          <a:lnRef idx="1">
-            <a:schemeClr val="accent1"/>
-          </a:lnRef>
-          <a:fillRef idx="3">
-            <a:schemeClr val="accent1"/>
-          </a:fillRef>
-          <a:effectRef idx="2">
-            <a:schemeClr val="accent1"/>
-          </a:effectRef>
-          <a:fontRef idx="minor">
-            <a:schemeClr val="lt1"/>
-          </a:fontRef>
-        </p:style>
-        <p:txBody>
-          <a:bodyPr rtlCol="0" anchor="ctr"/>
-          <a:lstStyle/>
-          <a:p>
-            <a:pPr algn="ctr"/>
-            <a:endParaRPr/>
-          </a:p>
-        </p:txBody>
-      </p:sp>
-      <p:sp>
-        <p:nvSpPr>
-          <p:cNvPr id="14" name="TextBox 13"/>
-          <p:cNvSpPr txBox="1"/>
-          <p:nvPr/>
-        </p:nvSpPr>
-        <p:spPr>
-          <a:xfrm>
-            <a:off x="978408" y="4212082"/>
-            <a:ext cx="10436047" cy="530098"/>
-          </a:xfrm>
-          <a:prstGeom prst="rect">
-            <a:avLst/>
-          </a:prstGeom>
-          <a:noFill/>
-        </p:spPr>
-        <p:txBody>
-          <a:bodyPr wrap="square" lIns="0" tIns="0" rIns="0" bIns="0">
-            <a:spAutoFit/>
-          </a:bodyPr>
-          <a:lstStyle/>
-          <a:p>
-            <a:pPr>
-              <a:lnSpc>
-                <a:spcPct val="124000"/>
-              </a:lnSpc>
-              <a:spcAft>
-                <a:spcPts val="0"/>
-              </a:spcAft>
-            </a:pPr>
-            <a:r>
-              <a:rPr sz="1450" b="1">
-                <a:solidFill>
-                  <a:srgbClr val="17150F"/>
-                </a:solidFill>
-                <a:latin typeface="Arial"/>
-              </a:rPr>
-              <a:t>Los informes no contienen una sola cifra escrita a mano.</a:t>
-            </a:r>
-            <a:r>
-              <a:rPr sz="1450" b="0">
-                <a:solidFill>
-                  <a:srgbClr val="555045"/>
-                </a:solidFill>
-                <a:latin typeface="Arial"/>
-              </a:rPr>
-              <a:t> Se regeneran enteros en cada ejecución, y dos ejecuciones seguidas producen ficheros idénticos byte a byte.</a:t>
-            </a:r>
-          </a:p>
-        </p:txBody>
-      </p:sp>
-      <p:sp>
-        <p:nvSpPr>
-          <p:cNvPr id="15" name="Rectangle 14"/>
-          <p:cNvSpPr/>
-          <p:nvPr/>
-        </p:nvSpPr>
-        <p:spPr>
-          <a:xfrm>
-            <a:off x="777240" y="4970780"/>
-            <a:ext cx="63500" cy="63500"/>
-          </a:xfrm>
-          <a:prstGeom prst="rect">
-            <a:avLst/>
-          </a:prstGeom>
-          <a:solidFill>
-            <a:srgbClr val="8C2F39"/>
-          </a:solidFill>
-          <a:ln>
-            <a:noFill/>
-          </a:ln>
-          <a:effectLst/>
-        </p:spPr>
-        <p:style>
-          <a:lnRef idx="1">
-            <a:schemeClr val="accent1"/>
-          </a:lnRef>
-          <a:fillRef idx="3">
-            <a:schemeClr val="accent1"/>
-          </a:fillRef>
-          <a:effectRef idx="2">
-            <a:schemeClr val="accent1"/>
-          </a:effectRef>
-          <a:fontRef idx="minor">
-            <a:schemeClr val="lt1"/>
-          </a:fontRef>
-        </p:style>
-        <p:txBody>
-          <a:bodyPr rtlCol="0" anchor="ctr"/>
-          <a:lstStyle/>
-          <a:p>
-            <a:pPr algn="ctr"/>
-            <a:endParaRPr/>
-          </a:p>
-        </p:txBody>
-      </p:sp>
-      <p:sp>
-        <p:nvSpPr>
-          <p:cNvPr id="16" name="TextBox 15"/>
-          <p:cNvSpPr txBox="1"/>
-          <p:nvPr/>
-        </p:nvSpPr>
-        <p:spPr>
-          <a:xfrm>
-            <a:off x="978408" y="4870196"/>
-            <a:ext cx="10436047" cy="530098"/>
-          </a:xfrm>
-          <a:prstGeom prst="rect">
-            <a:avLst/>
-          </a:prstGeom>
-          <a:noFill/>
-        </p:spPr>
-        <p:txBody>
-          <a:bodyPr wrap="square" lIns="0" tIns="0" rIns="0" bIns="0">
-            <a:spAutoFit/>
-          </a:bodyPr>
-          <a:lstStyle/>
-          <a:p>
-            <a:pPr>
-              <a:lnSpc>
-                <a:spcPct val="124000"/>
-              </a:lnSpc>
-              <a:spcAft>
-                <a:spcPts val="0"/>
-              </a:spcAft>
-            </a:pPr>
-            <a:r>
-              <a:rPr sz="1450" b="1">
-                <a:solidFill>
-                  <a:srgbClr val="17150F"/>
-                </a:solidFill>
-                <a:latin typeface="Arial"/>
-              </a:rPr>
-              <a:t>Tres errores propios quedaron corregidos y documentados</a:t>
-            </a:r>
-            <a:r>
-              <a:rPr sz="1450" b="0">
-                <a:solidFill>
-                  <a:srgbClr val="555045"/>
-                </a:solidFill>
-                <a:latin typeface="Arial"/>
-              </a:rPr>
-              <a:t>, entre ellos elegir la ventana de la media móvil mirando el conjunto de evaluación. Están escritos en la memoria técnica en vez de disimularse.</a:t>
-            </a:r>
-          </a:p>
-        </p:txBody>
-      </p:sp>
-      <p:sp>
-        <p:nvSpPr>
-          <p:cNvPr id="17" name="Rectangle 16"/>
-          <p:cNvSpPr/>
-          <p:nvPr/>
-        </p:nvSpPr>
-        <p:spPr>
-          <a:xfrm>
-            <a:off x="777240" y="6327648"/>
-            <a:ext cx="10637215" cy="9525"/>
-          </a:xfrm>
-          <a:prstGeom prst="rect">
-            <a:avLst/>
-          </a:prstGeom>
-          <a:solidFill>
-            <a:srgbClr val="DCD8CF"/>
-          </a:solidFill>
-          <a:ln>
-            <a:noFill/>
-          </a:ln>
-          <a:effectLst/>
-        </p:spPr>
-        <p:style>
-          <a:lnRef idx="1">
-            <a:schemeClr val="accent1"/>
-          </a:lnRef>
-          <a:fillRef idx="3">
-            <a:schemeClr val="accent1"/>
-          </a:fillRef>
-          <a:effectRef idx="2">
-            <a:schemeClr val="accent1"/>
-          </a:effectRef>
-          <a:fontRef idx="minor">
-            <a:schemeClr val="lt1"/>
-          </a:fontRef>
-        </p:style>
-        <p:txBody>
-          <a:bodyPr rtlCol="0" anchor="ctr"/>
-          <a:lstStyle/>
-          <a:p>
-            <a:pPr algn="ctr"/>
-            <a:endParaRPr/>
-          </a:p>
-        </p:txBody>
-      </p:sp>
-      <p:sp>
-        <p:nvSpPr>
-          <p:cNvPr id="18" name="TextBox 17"/>
-          <p:cNvSpPr txBox="1"/>
-          <p:nvPr/>
-        </p:nvSpPr>
-        <p:spPr>
-          <a:xfrm>
-            <a:off x="777240" y="6428232"/>
-            <a:ext cx="8686800" cy="274320"/>
-          </a:xfrm>
-          <a:prstGeom prst="rect">
-            <a:avLst/>
-          </a:prstGeom>
-          <a:noFill/>
-        </p:spPr>
-        <p:txBody>
-          <a:bodyPr wrap="square" lIns="0" tIns="0" rIns="0" bIns="0">
-            <a:spAutoFit/>
-          </a:bodyPr>
-          <a:lstStyle/>
-          <a:p>
-            <a:pPr algn="l">
-              <a:lnSpc>
-                <a:spcPct val="122000"/>
-              </a:lnSpc>
-              <a:spcBef>
-                <a:spcPts val="0"/>
-              </a:spcBef>
-              <a:spcAft>
-                <a:spcPts val="0"/>
-              </a:spcAft>
-            </a:pPr>
-            <a:r>
-              <a:rPr sz="950" b="0">
-                <a:solidFill>
-                  <a:srgbClr val="8B8478"/>
-                </a:solidFill>
-                <a:latin typeface="Arial"/>
-              </a:rPr>
-              <a:t>El desarrollo</a:t>
-            </a:r>
-          </a:p>
-        </p:txBody>
-      </p:sp>
-      <p:sp>
-        <p:nvSpPr>
-          <p:cNvPr id="19" name="TextBox 18"/>
-          <p:cNvSpPr txBox="1"/>
-          <p:nvPr/>
-        </p:nvSpPr>
-        <p:spPr>
-          <a:xfrm>
-            <a:off x="10500055" y="6428232"/>
-            <a:ext cx="914400" cy="274320"/>
-          </a:xfrm>
-          <a:prstGeom prst="rect">
-            <a:avLst/>
-          </a:prstGeom>
-          <a:noFill/>
-        </p:spPr>
-        <p:txBody>
-          <a:bodyPr wrap="square" lIns="0" tIns="0" rIns="0" bIns="0">
-            <a:spAutoFit/>
-          </a:bodyPr>
-          <a:lstStyle/>
-          <a:p>
-            <a:pPr algn="r">
-              <a:lnSpc>
-                <a:spcPct val="122000"/>
-              </a:lnSpc>
-              <a:spcBef>
-                <a:spcPts val="0"/>
-              </a:spcBef>
-              <a:spcAft>
-                <a:spcPts val="0"/>
-              </a:spcAft>
-            </a:pPr>
-            <a:r>
-              <a:rPr sz="950" b="0">
-                <a:solidFill>
-                  <a:srgbClr val="8B8478"/>
-                </a:solidFill>
-                <a:latin typeface="Arial"/>
-              </a:rPr>
-              <a:t>49</a:t>
-            </a:r>
-          </a:p>
-        </p:txBody>
-      </p:sp>
-    </p:spTree>
-  </p:cSld>
-  <p:clrMapOvr>
-    <a:masterClrMapping/>
-  </p:clrMapOvr>
-</p:sld>
-</file>
-
-<file path=ppt/slides/slide43.xml><?xml version="1.0" encoding="utf-8"?>
-<p:sld xmlns:a="http://schemas.openxmlformats.org/drawingml/2006/main" xmlns:r="http://schemas.openxmlformats.org/officeDocument/2006/relationships" xmlns:p="http://schemas.openxmlformats.org/presentationml/2006/main">
-  <p:cSld>
-    <p:spTree>
-      <p:nvGrpSpPr>
-        <p:cNvPr id="1" name=""/>
-        <p:cNvGrpSpPr/>
-        <p:nvPr/>
-      </p:nvGrpSpPr>
-      <p:grpSpPr>
-        <a:xfrm>
-          <a:off x="0" y="0"/>
-          <a:ext cx="0" cy="0"/>
-          <a:chOff x="0" y="0"/>
-          <a:chExt cx="0" cy="0"/>
-        </a:xfrm>
-      </p:grpSpPr>
-      <p:sp>
-        <p:nvSpPr>
-          <p:cNvPr id="2" name="Rectangle 1"/>
-          <p:cNvSpPr/>
-          <p:nvPr/>
-        </p:nvSpPr>
-        <p:spPr>
-          <a:xfrm>
-            <a:off x="0" y="0"/>
-            <a:ext cx="12191695" cy="6858000"/>
-          </a:xfrm>
-          <a:prstGeom prst="rect">
-            <a:avLst/>
-          </a:prstGeom>
-          <a:solidFill>
-            <a:srgbClr val="FFFFFF"/>
-          </a:solidFill>
-          <a:ln>
-            <a:noFill/>
-          </a:ln>
-          <a:effectLst/>
-        </p:spPr>
-        <p:style>
-          <a:lnRef idx="1">
-            <a:schemeClr val="accent1"/>
-          </a:lnRef>
-          <a:fillRef idx="3">
-            <a:schemeClr val="accent1"/>
-          </a:fillRef>
-          <a:effectRef idx="2">
-            <a:schemeClr val="accent1"/>
-          </a:effectRef>
-          <a:fontRef idx="minor">
-            <a:schemeClr val="lt1"/>
-          </a:fontRef>
-        </p:style>
-        <p:txBody>
-          <a:bodyPr rtlCol="0" anchor="ctr"/>
-          <a:lstStyle/>
-          <a:p>
-            <a:pPr algn="ctr"/>
-            <a:endParaRPr/>
-          </a:p>
-        </p:txBody>
-      </p:sp>
-      <p:sp>
-        <p:nvSpPr>
-          <p:cNvPr id="3" name="TextBox 2"/>
-          <p:cNvSpPr txBox="1"/>
-          <p:nvPr/>
-        </p:nvSpPr>
-        <p:spPr>
-          <a:xfrm>
-            <a:off x="777240" y="475488"/>
-            <a:ext cx="10637215" cy="237744"/>
-          </a:xfrm>
-          <a:prstGeom prst="rect">
-            <a:avLst/>
-          </a:prstGeom>
-          <a:noFill/>
-        </p:spPr>
-        <p:txBody>
-          <a:bodyPr wrap="square" lIns="0" tIns="0" rIns="0" bIns="0">
-            <a:spAutoFit/>
-          </a:bodyPr>
-          <a:lstStyle/>
-          <a:p>
-            <a:pPr algn="l">
-              <a:lnSpc>
-                <a:spcPct val="122000"/>
-              </a:lnSpc>
-              <a:spcBef>
-                <a:spcPts val="0"/>
-              </a:spcBef>
-              <a:spcAft>
-                <a:spcPts val="0"/>
-              </a:spcAft>
-            </a:pPr>
-            <a:r>
-              <a:rPr sz="1050" b="1">
-                <a:solidFill>
-                  <a:srgbClr val="8C2F39"/>
-                </a:solidFill>
-                <a:latin typeface="Arial"/>
-              </a:rPr>
               <a:t>PRÓXIMOS PASOS · FRENTE 1</a:t>
             </a:r>
           </a:p>
@@ -41345,7 +42025,7 @@
 </p:sld>
 </file>
 
-<file path=ppt/slides/slide44.xml><?xml version="1.0" encoding="utf-8"?>
+<file path=ppt/slides/slide43.xml><?xml version="1.0" encoding="utf-8"?>
 <p:sld xmlns:a="http://schemas.openxmlformats.org/drawingml/2006/main" xmlns:r="http://schemas.openxmlformats.org/officeDocument/2006/relationships" xmlns:p="http://schemas.openxmlformats.org/presentationml/2006/main">
   <p:cSld>
     <p:spTree>
@@ -43014,7 +43694,7 @@
 </p:sld>
 </file>
 
-<file path=ppt/slides/slide45.xml><?xml version="1.0" encoding="utf-8"?>
+<file path=ppt/slides/slide44.xml><?xml version="1.0" encoding="utf-8"?>
 <p:sld xmlns:a="http://schemas.openxmlformats.org/drawingml/2006/main" xmlns:r="http://schemas.openxmlformats.org/officeDocument/2006/relationships" xmlns:p="http://schemas.openxmlformats.org/presentationml/2006/main">
   <p:cSld>
     <p:spTree>

--- a/Presentacion_Caso_A.pptx
+++ b/Presentacion_Caso_A.pptx
@@ -4645,7 +4645,7 @@
                 </a:solidFill>
                 <a:latin typeface="Arial"/>
               </a:rPr>
-              <a:t>11</a:t>
+              <a:t>10</a:t>
             </a:r>
           </a:p>
         </p:txBody>
@@ -5393,7 +5393,7 @@
                 </a:solidFill>
                 <a:latin typeface="Arial"/>
               </a:rPr>
-              <a:t>12</a:t>
+              <a:t>11</a:t>
             </a:r>
           </a:p>
         </p:txBody>
@@ -6249,7 +6249,7 @@
                 </a:solidFill>
                 <a:latin typeface="Arial"/>
               </a:rPr>
-              <a:t>13</a:t>
+              <a:t>12</a:t>
             </a:r>
           </a:p>
         </p:txBody>
@@ -7592,7 +7592,7 @@
                 </a:solidFill>
                 <a:latin typeface="Arial"/>
               </a:rPr>
-              <a:t>15</a:t>
+              <a:t>13</a:t>
             </a:r>
           </a:p>
         </p:txBody>
@@ -8721,7 +8721,7 @@
                 </a:solidFill>
                 <a:latin typeface="Arial"/>
               </a:rPr>
-              <a:t>16</a:t>
+              <a:t>14</a:t>
             </a:r>
           </a:p>
         </p:txBody>
@@ -10275,7 +10275,7 @@
                 </a:solidFill>
                 <a:latin typeface="Arial"/>
               </a:rPr>
-              <a:t>17</a:t>
+              <a:t>15</a:t>
             </a:r>
           </a:p>
         </p:txBody>
@@ -11161,7 +11161,7 @@
                 </a:solidFill>
                 <a:latin typeface="Arial"/>
               </a:rPr>
-              <a:t>18</a:t>
+              <a:t>16</a:t>
             </a:r>
           </a:p>
         </p:txBody>
@@ -12042,7 +12042,7 @@
                 </a:solidFill>
                 <a:latin typeface="Arial"/>
               </a:rPr>
-              <a:t>20</a:t>
+              <a:t>17</a:t>
             </a:r>
           </a:p>
         </p:txBody>
@@ -13178,7 +13178,7 @@
                 </a:solidFill>
                 <a:latin typeface="Arial"/>
               </a:rPr>
-              <a:t>21</a:t>
+              <a:t>18</a:t>
             </a:r>
           </a:p>
         </p:txBody>
@@ -14246,7 +14246,7 @@
                 </a:solidFill>
                 <a:latin typeface="Arial"/>
               </a:rPr>
-              <a:t>22</a:t>
+              <a:t>19</a:t>
             </a:r>
           </a:p>
         </p:txBody>
@@ -15806,7 +15806,7 @@
                 </a:solidFill>
                 <a:latin typeface="Arial"/>
               </a:rPr>
-              <a:t>23</a:t>
+              <a:t>20</a:t>
             </a:r>
           </a:p>
         </p:txBody>
@@ -17046,7 +17046,7 @@
                 </a:solidFill>
                 <a:latin typeface="Arial"/>
               </a:rPr>
-              <a:t>25</a:t>
+              <a:t>21</a:t>
             </a:r>
           </a:p>
         </p:txBody>
@@ -19231,7 +19231,7 @@
                 </a:solidFill>
                 <a:latin typeface="Arial"/>
               </a:rPr>
-              <a:t>26</a:t>
+              <a:t>22</a:t>
             </a:r>
           </a:p>
         </p:txBody>
@@ -20129,7 +20129,7 @@
                 </a:solidFill>
                 <a:latin typeface="Arial"/>
               </a:rPr>
-              <a:t>27</a:t>
+              <a:t>23</a:t>
             </a:r>
           </a:p>
         </p:txBody>
@@ -20648,7 +20648,7 @@
                 </a:solidFill>
                 <a:latin typeface="Arial"/>
               </a:rPr>
-              <a:t>28</a:t>
+              <a:t>24</a:t>
             </a:r>
           </a:p>
         </p:txBody>
@@ -21300,7 +21300,7 @@
                 </a:solidFill>
                 <a:latin typeface="Arial"/>
               </a:rPr>
-              <a:t>29</a:t>
+              <a:t>25</a:t>
             </a:r>
           </a:p>
         </p:txBody>
@@ -22063,7 +22063,7 @@
                 </a:solidFill>
                 <a:latin typeface="Arial"/>
               </a:rPr>
-              <a:t>30</a:t>
+              <a:t>26</a:t>
             </a:r>
           </a:p>
         </p:txBody>
@@ -23375,7 +23375,7 @@
                 </a:solidFill>
                 <a:latin typeface="Arial"/>
               </a:rPr>
-              <a:t>31</a:t>
+              <a:t>27</a:t>
             </a:r>
           </a:p>
         </p:txBody>
@@ -23745,7 +23745,7 @@
                 </a:solidFill>
                 <a:latin typeface="Arial"/>
               </a:rPr>
-              <a:t>37</a:t>
+              <a:t>28</a:t>
             </a:r>
           </a:p>
         </p:txBody>
@@ -24812,7 +24812,7 @@
                 </a:solidFill>
                 <a:latin typeface="Arial"/>
               </a:rPr>
-              <a:t>32</a:t>
+              <a:t>29</a:t>
             </a:r>
           </a:p>
         </p:txBody>
@@ -26997,7 +26997,7 @@
                 </a:solidFill>
                 <a:latin typeface="Arial"/>
               </a:rPr>
-              <a:t>33</a:t>
+              <a:t>30</a:t>
             </a:r>
           </a:p>
         </p:txBody>
@@ -27745,7 +27745,7 @@
                 </a:solidFill>
                 <a:latin typeface="Arial"/>
               </a:rPr>
-              <a:t>34</a:t>
+              <a:t>31</a:t>
             </a:r>
           </a:p>
         </p:txBody>
@@ -28748,7 +28748,7 @@
                 </a:solidFill>
                 <a:latin typeface="Arial"/>
               </a:rPr>
-              <a:t>36</a:t>
+              <a:t>32</a:t>
             </a:r>
           </a:p>
         </p:txBody>
@@ -29348,7 +29348,7 @@
                 </a:solidFill>
                 <a:latin typeface="Arial"/>
               </a:rPr>
-              <a:t>39</a:t>
+              <a:t>33</a:t>
             </a:r>
           </a:p>
         </p:txBody>
@@ -30229,7 +30229,7 @@
                 </a:solidFill>
                 <a:latin typeface="Arial"/>
               </a:rPr>
-              <a:t>40</a:t>
+              <a:t>34</a:t>
             </a:r>
           </a:p>
         </p:txBody>
@@ -31571,7 +31571,7 @@
                 </a:solidFill>
                 <a:latin typeface="Arial"/>
               </a:rPr>
-              <a:t>41</a:t>
+              <a:t>35</a:t>
             </a:r>
           </a:p>
         </p:txBody>
@@ -32501,7 +32501,7 @@
                 </a:solidFill>
                 <a:latin typeface="Arial"/>
               </a:rPr>
-              <a:t>42</a:t>
+              <a:t>36</a:t>
             </a:r>
           </a:p>
         </p:txBody>
@@ -34192,7 +34192,7 @@
                 </a:solidFill>
                 <a:latin typeface="Arial"/>
               </a:rPr>
-              <a:t>43</a:t>
+              <a:t>37</a:t>
             </a:r>
           </a:p>
         </p:txBody>
@@ -35514,7 +35514,7 @@
                 </a:solidFill>
                 <a:latin typeface="Arial"/>
               </a:rPr>
-              <a:t>44</a:t>
+              <a:t>38</a:t>
             </a:r>
           </a:p>
         </p:txBody>
@@ -36142,7 +36142,7 @@
                 </a:solidFill>
                 <a:latin typeface="Arial"/>
               </a:rPr>
-              <a:t>45</a:t>
+              <a:t>39</a:t>
             </a:r>
           </a:p>
         </p:txBody>
@@ -40212,7 +40212,7 @@
                 </a:solidFill>
                 <a:latin typeface="Arial"/>
               </a:rPr>
-              <a:t>47</a:t>
+              <a:t>40</a:t>
             </a:r>
           </a:p>
         </p:txBody>
@@ -41036,7 +41036,7 @@
                 </a:solidFill>
                 <a:latin typeface="Arial"/>
               </a:rPr>
-              <a:t>48</a:t>
+              <a:t>41</a:t>
             </a:r>
           </a:p>
         </p:txBody>
@@ -42012,7 +42012,7 @@
                 </a:solidFill>
                 <a:latin typeface="Arial"/>
               </a:rPr>
-              <a:t>50</a:t>
+              <a:t>42</a:t>
             </a:r>
           </a:p>
         </p:txBody>
@@ -43681,7 +43681,7 @@
                 </a:solidFill>
                 <a:latin typeface="Arial"/>
               </a:rPr>
-              <a:t>51</a:t>
+              <a:t>43</a:t>
             </a:r>
           </a:p>
         </p:txBody>
@@ -44567,7 +44567,7 @@
                 </a:solidFill>
                 <a:latin typeface="Arial"/>
               </a:rPr>
-              <a:t>52</a:t>
+              <a:t>44</a:t>
             </a:r>
           </a:p>
         </p:txBody>
@@ -45450,7 +45450,7 @@
                 </a:solidFill>
                 <a:latin typeface="Arial"/>
               </a:rPr>
-              <a:t>6</a:t>
+              <a:t>5</a:t>
             </a:r>
           </a:p>
         </p:txBody>
@@ -46374,7 +46374,7 @@
                 </a:solidFill>
                 <a:latin typeface="Arial"/>
               </a:rPr>
-              <a:t>7</a:t>
+              <a:t>6</a:t>
             </a:r>
           </a:p>
         </p:txBody>
@@ -46827,7 +46827,7 @@
                 </a:solidFill>
                 <a:latin typeface="Arial"/>
               </a:rPr>
-              <a:t>8</a:t>
+              <a:t>7</a:t>
             </a:r>
           </a:p>
         </p:txBody>
@@ -47897,7 +47897,7 @@
                 </a:solidFill>
                 <a:latin typeface="Arial"/>
               </a:rPr>
-              <a:t>9</a:t>
+              <a:t>8</a:t>
             </a:r>
           </a:p>
         </p:txBody>
@@ -48600,7 +48600,7 @@
                 </a:solidFill>
                 <a:latin typeface="Arial"/>
               </a:rPr>
-              <a:t>10</a:t>
+              <a:t>9</a:t>
             </a:r>
           </a:p>
         </p:txBody>
